--- a/Weekly_Update_Presentation.pptx
+++ b/Weekly_Update_Presentation.pptx
@@ -6,12 +6,12 @@
   </p:sldMasterIdLst>
   <p:sldIdLst>
     <p:sldId id="256" r:id="rId7"/>
-    <p:sldId id="257" r:id="rId8"/>
-    <p:sldId id="258" r:id="rId9"/>
-    <p:sldId id="259" r:id="rId10"/>
-    <p:sldId id="260" r:id="rId11"/>
-    <p:sldId id="261" r:id="rId12"/>
-    <p:sldId id="262" r:id="rId13"/>
+    <p:sldId id="257" r:id="rId9"/>
+    <p:sldId id="258" r:id="rId10"/>
+    <p:sldId id="259" r:id="rId11"/>
+    <p:sldId id="260" r:id="rId12"/>
+    <p:sldId id="261" r:id="rId13"/>
+    <p:sldId id="262" r:id="rId14"/>
   </p:sldIdLst>
   <p:sldSz cx="12188952" cy="6858000" type="screen4x3"/>
   <p:notesSz cx="6858000" cy="9144000"/>
@@ -111,6 +111,846 @@
     </a:lvl9pPr>
   </p:defaultTextStyle>
 </p:presentation>
+</file>
+
+<file path=ppt/notesMasters/notesMaster1.xml><?xml version="1.0" encoding="utf-8"?>
+<p:notesMaster xmlns:a="http://schemas.openxmlformats.org/drawingml/2006/main" xmlns:p="http://schemas.openxmlformats.org/presentationml/2006/main" xmlns:r="http://schemas.openxmlformats.org/officeDocument/2006/relationships">
+  <p:cSld>
+    <p:bg>
+      <p:bgRef idx="1001">
+        <a:schemeClr val="bg1"/>
+      </p:bgRef>
+    </p:bg>
+    <p:spTree>
+      <p:nvGrpSpPr>
+        <p:cNvPr id="1" name=""/>
+        <p:cNvGrpSpPr/>
+        <p:nvPr/>
+      </p:nvGrpSpPr>
+      <p:grpSpPr>
+        <a:xfrm>
+          <a:off x="0" y="0"/>
+          <a:ext cx="0" cy="0"/>
+          <a:chOff x="0" y="0"/>
+          <a:chExt cx="0" cy="0"/>
+        </a:xfrm>
+      </p:grpSpPr>
+      <p:sp>
+        <p:nvSpPr>
+          <p:cNvPr id="2" name="Header Placeholder 1"/>
+          <p:cNvSpPr>
+            <a:spLocks noGrp="1"/>
+          </p:cNvSpPr>
+          <p:nvPr>
+            <p:ph type="hdr" sz="quarter"/>
+          </p:nvPr>
+        </p:nvSpPr>
+        <p:spPr>
+          <a:xfrm>
+            <a:off x="0" y="0"/>
+            <a:ext cx="2971800" cy="457200"/>
+          </a:xfrm>
+          <a:prstGeom prst="rect">
+            <a:avLst/>
+          </a:prstGeom>
+        </p:spPr>
+        <p:txBody>
+          <a:bodyPr vert="horz" lIns="91440" tIns="45720" rIns="91440" bIns="45720" rtlCol="0"/>
+          <a:lstStyle>
+            <a:lvl1pPr algn="l">
+              <a:defRPr sz="1200"/>
+            </a:lvl1pPr>
+          </a:lstStyle>
+          <a:p>
+            <a:endParaRPr lang="en-US"/>
+          </a:p>
+        </p:txBody>
+      </p:sp>
+      <p:sp>
+        <p:nvSpPr>
+          <p:cNvPr id="3" name="Date Placeholder 2"/>
+          <p:cNvSpPr>
+            <a:spLocks noGrp="1"/>
+          </p:cNvSpPr>
+          <p:nvPr>
+            <p:ph type="dt" idx="1"/>
+          </p:nvPr>
+        </p:nvSpPr>
+        <p:spPr>
+          <a:xfrm>
+            <a:off x="3884613" y="0"/>
+            <a:ext cx="2971800" cy="457200"/>
+          </a:xfrm>
+          <a:prstGeom prst="rect">
+            <a:avLst/>
+          </a:prstGeom>
+        </p:spPr>
+        <p:txBody>
+          <a:bodyPr vert="horz" lIns="91440" tIns="45720" rIns="91440" bIns="45720" rtlCol="0"/>
+          <a:lstStyle>
+            <a:lvl1pPr algn="r">
+              <a:defRPr sz="1200"/>
+            </a:lvl1pPr>
+          </a:lstStyle>
+          <a:p>
+            <a:fld id="{0F89C1C7-3DCD-1040-A9CF-14679D8B5DDD}" type="datetimeFigureOut">
+              <a:rPr lang="en-US" smtClean="0"/>
+              <a:t>10/17/16</a:t>
+            </a:fld>
+            <a:endParaRPr lang="en-US"/>
+          </a:p>
+        </p:txBody>
+      </p:sp>
+      <p:sp>
+        <p:nvSpPr>
+          <p:cNvPr id="4" name="Slide Image Placeholder 3"/>
+          <p:cNvSpPr>
+            <a:spLocks noGrp="1" noRot="1" noChangeAspect="1"/>
+          </p:cNvSpPr>
+          <p:nvPr>
+            <p:ph type="sldImg" idx="2"/>
+          </p:nvPr>
+        </p:nvSpPr>
+        <p:spPr>
+          <a:xfrm>
+            <a:off x="1143000" y="685800"/>
+            <a:ext cx="4572000" cy="3429000"/>
+          </a:xfrm>
+          <a:prstGeom prst="rect">
+            <a:avLst/>
+          </a:prstGeom>
+          <a:noFill/>
+          <a:ln w="12700">
+            <a:solidFill>
+              <a:prstClr val="black"/>
+            </a:solidFill>
+          </a:ln>
+        </p:spPr>
+        <p:txBody>
+          <a:bodyPr vert="horz" lIns="91440" tIns="45720" rIns="91440" bIns="45720" rtlCol="0" anchor="ctr"/>
+          <a:lstStyle/>
+          <a:p>
+            <a:endParaRPr lang="en-US"/>
+          </a:p>
+        </p:txBody>
+      </p:sp>
+      <p:sp>
+        <p:nvSpPr>
+          <p:cNvPr id="5" name="Notes Placeholder 4"/>
+          <p:cNvSpPr>
+            <a:spLocks noGrp="1"/>
+          </p:cNvSpPr>
+          <p:nvPr>
+            <p:ph type="body" sz="quarter" idx="3"/>
+          </p:nvPr>
+        </p:nvSpPr>
+        <p:spPr>
+          <a:xfrm>
+            <a:off x="685800" y="4343400"/>
+            <a:ext cx="5486400" cy="4114800"/>
+          </a:xfrm>
+          <a:prstGeom prst="rect">
+            <a:avLst/>
+          </a:prstGeom>
+        </p:spPr>
+        <p:txBody>
+          <a:bodyPr vert="horz" lIns="91440" tIns="45720" rIns="91440" bIns="45720" rtlCol="0"/>
+          <a:lstStyle/>
+          <a:p>
+            <a:pPr lvl="0"/>
+            <a:r>
+              <a:rPr lang="en-US" smtClean="0"/>
+              <a:t>Click to edit Master text styles</a:t>
+            </a:r>
+          </a:p>
+          <a:p>
+            <a:pPr lvl="1"/>
+            <a:r>
+              <a:rPr lang="en-US" smtClean="0"/>
+              <a:t>Second level</a:t>
+            </a:r>
+          </a:p>
+          <a:p>
+            <a:pPr lvl="2"/>
+            <a:r>
+              <a:rPr lang="en-US" smtClean="0"/>
+              <a:t>Third level</a:t>
+            </a:r>
+          </a:p>
+          <a:p>
+            <a:pPr lvl="3"/>
+            <a:r>
+              <a:rPr lang="en-US" smtClean="0"/>
+              <a:t>Fourth level</a:t>
+            </a:r>
+          </a:p>
+          <a:p>
+            <a:pPr lvl="4"/>
+            <a:r>
+              <a:rPr lang="en-US" smtClean="0"/>
+              <a:t>Fifth level</a:t>
+            </a:r>
+            <a:endParaRPr lang="en-US"/>
+          </a:p>
+        </p:txBody>
+      </p:sp>
+      <p:sp>
+        <p:nvSpPr>
+          <p:cNvPr id="6" name="Footer Placeholder 5"/>
+          <p:cNvSpPr>
+            <a:spLocks noGrp="1"/>
+          </p:cNvSpPr>
+          <p:nvPr>
+            <p:ph type="ftr" sz="quarter" idx="4"/>
+          </p:nvPr>
+        </p:nvSpPr>
+        <p:spPr>
+          <a:xfrm>
+            <a:off x="0" y="8685213"/>
+            <a:ext cx="2971800" cy="457200"/>
+          </a:xfrm>
+          <a:prstGeom prst="rect">
+            <a:avLst/>
+          </a:prstGeom>
+        </p:spPr>
+        <p:txBody>
+          <a:bodyPr vert="horz" lIns="91440" tIns="45720" rIns="91440" bIns="45720" rtlCol="0" anchor="b"/>
+          <a:lstStyle>
+            <a:lvl1pPr algn="l">
+              <a:defRPr sz="1200"/>
+            </a:lvl1pPr>
+          </a:lstStyle>
+          <a:p>
+            <a:endParaRPr lang="en-US"/>
+          </a:p>
+        </p:txBody>
+      </p:sp>
+      <p:sp>
+        <p:nvSpPr>
+          <p:cNvPr id="7" name="Slide Number Placeholder 6"/>
+          <p:cNvSpPr>
+            <a:spLocks noGrp="1"/>
+          </p:cNvSpPr>
+          <p:nvPr>
+            <p:ph type="sldNum" sz="quarter" idx="5"/>
+          </p:nvPr>
+        </p:nvSpPr>
+        <p:spPr>
+          <a:xfrm>
+            <a:off x="3884613" y="8685213"/>
+            <a:ext cx="2971800" cy="457200"/>
+          </a:xfrm>
+          <a:prstGeom prst="rect">
+            <a:avLst/>
+          </a:prstGeom>
+        </p:spPr>
+        <p:txBody>
+          <a:bodyPr vert="horz" lIns="91440" tIns="45720" rIns="91440" bIns="45720" rtlCol="0" anchor="b"/>
+          <a:lstStyle>
+            <a:lvl1pPr algn="r">
+              <a:defRPr sz="1200"/>
+            </a:lvl1pPr>
+          </a:lstStyle>
+          <a:p>
+            <a:fld id="{BB5E49A5-4136-284D-997B-48E1D791AD67}" type="slidenum">
+              <a:rPr lang="en-US" smtClean="0"/>
+              <a:t>‹#›</a:t>
+            </a:fld>
+            <a:endParaRPr lang="en-US"/>
+          </a:p>
+        </p:txBody>
+      </p:sp>
+    </p:spTree>
+    <p:extLst>
+      <p:ext uri="{BB962C8B-B14F-4D97-AF65-F5344CB8AC3E}">
+        <p14:creationId xmlns:p14="http://schemas.microsoft.com/office/powerpoint/2010/main" val="2623252185"/>
+      </p:ext>
+    </p:extLst>
+  </p:cSld>
+  <p:clrMap bg1="lt1" tx1="dk1" bg2="lt2" tx2="dk2" accent1="accent1" accent2="accent2" accent3="accent3" accent4="accent4" accent5="accent5" accent6="accent6" hlink="hlink" folHlink="folHlink"/>
+  <p:notesStyle>
+    <a:lvl1pPr marL="0" algn="l" defTabSz="457200" rtl="0" eaLnBrk="1" latinLnBrk="0" hangingPunct="1">
+      <a:defRPr sz="1200" kern="1200">
+        <a:solidFill>
+          <a:schemeClr val="tx1"/>
+        </a:solidFill>
+        <a:latin typeface="+mn-lt"/>
+        <a:ea typeface="+mn-ea"/>
+        <a:cs typeface="+mn-cs"/>
+      </a:defRPr>
+    </a:lvl1pPr>
+    <a:lvl2pPr marL="457200" algn="l" defTabSz="457200" rtl="0" eaLnBrk="1" latinLnBrk="0" hangingPunct="1">
+      <a:defRPr sz="1200" kern="1200">
+        <a:solidFill>
+          <a:schemeClr val="tx1"/>
+        </a:solidFill>
+        <a:latin typeface="+mn-lt"/>
+        <a:ea typeface="+mn-ea"/>
+        <a:cs typeface="+mn-cs"/>
+      </a:defRPr>
+    </a:lvl2pPr>
+    <a:lvl3pPr marL="914400" algn="l" defTabSz="457200" rtl="0" eaLnBrk="1" latinLnBrk="0" hangingPunct="1">
+      <a:defRPr sz="1200" kern="1200">
+        <a:solidFill>
+          <a:schemeClr val="tx1"/>
+        </a:solidFill>
+        <a:latin typeface="+mn-lt"/>
+        <a:ea typeface="+mn-ea"/>
+        <a:cs typeface="+mn-cs"/>
+      </a:defRPr>
+    </a:lvl3pPr>
+    <a:lvl4pPr marL="1371600" algn="l" defTabSz="457200" rtl="0" eaLnBrk="1" latinLnBrk="0" hangingPunct="1">
+      <a:defRPr sz="1200" kern="1200">
+        <a:solidFill>
+          <a:schemeClr val="tx1"/>
+        </a:solidFill>
+        <a:latin typeface="+mn-lt"/>
+        <a:ea typeface="+mn-ea"/>
+        <a:cs typeface="+mn-cs"/>
+      </a:defRPr>
+    </a:lvl4pPr>
+    <a:lvl5pPr marL="1828800" algn="l" defTabSz="457200" rtl="0" eaLnBrk="1" latinLnBrk="0" hangingPunct="1">
+      <a:defRPr sz="1200" kern="1200">
+        <a:solidFill>
+          <a:schemeClr val="tx1"/>
+        </a:solidFill>
+        <a:latin typeface="+mn-lt"/>
+        <a:ea typeface="+mn-ea"/>
+        <a:cs typeface="+mn-cs"/>
+      </a:defRPr>
+    </a:lvl5pPr>
+    <a:lvl6pPr marL="2286000" algn="l" defTabSz="457200" rtl="0" eaLnBrk="1" latinLnBrk="0" hangingPunct="1">
+      <a:defRPr sz="1200" kern="1200">
+        <a:solidFill>
+          <a:schemeClr val="tx1"/>
+        </a:solidFill>
+        <a:latin typeface="+mn-lt"/>
+        <a:ea typeface="+mn-ea"/>
+        <a:cs typeface="+mn-cs"/>
+      </a:defRPr>
+    </a:lvl6pPr>
+    <a:lvl7pPr marL="2743200" algn="l" defTabSz="457200" rtl="0" eaLnBrk="1" latinLnBrk="0" hangingPunct="1">
+      <a:defRPr sz="1200" kern="1200">
+        <a:solidFill>
+          <a:schemeClr val="tx1"/>
+        </a:solidFill>
+        <a:latin typeface="+mn-lt"/>
+        <a:ea typeface="+mn-ea"/>
+        <a:cs typeface="+mn-cs"/>
+      </a:defRPr>
+    </a:lvl7pPr>
+    <a:lvl8pPr marL="3200400" algn="l" defTabSz="457200" rtl="0" eaLnBrk="1" latinLnBrk="0" hangingPunct="1">
+      <a:defRPr sz="1200" kern="1200">
+        <a:solidFill>
+          <a:schemeClr val="tx1"/>
+        </a:solidFill>
+        <a:latin typeface="+mn-lt"/>
+        <a:ea typeface="+mn-ea"/>
+        <a:cs typeface="+mn-cs"/>
+      </a:defRPr>
+    </a:lvl8pPr>
+    <a:lvl9pPr marL="3657600" algn="l" defTabSz="457200" rtl="0" eaLnBrk="1" latinLnBrk="0" hangingPunct="1">
+      <a:defRPr sz="1200" kern="1200">
+        <a:solidFill>
+          <a:schemeClr val="tx1"/>
+        </a:solidFill>
+        <a:latin typeface="+mn-lt"/>
+        <a:ea typeface="+mn-ea"/>
+        <a:cs typeface="+mn-cs"/>
+      </a:defRPr>
+    </a:lvl9pPr>
+  </p:notesStyle>
+</p:notesMaster>
+</file>
+
+<file path=ppt/notesSlides/notesSlide1.xml><?xml version="1.0" encoding="utf-8"?>
+<p:notes xmlns:a="http://schemas.openxmlformats.org/drawingml/2006/main" xmlns:p="http://schemas.openxmlformats.org/presentationml/2006/main" xmlns:r="http://schemas.openxmlformats.org/officeDocument/2006/relationships">
+  <p:cSld>
+    <p:spTree>
+      <p:nvGrpSpPr>
+        <p:cNvPr id="1" name=""/>
+        <p:cNvGrpSpPr/>
+        <p:nvPr/>
+      </p:nvGrpSpPr>
+      <p:grpSpPr>
+        <a:xfrm>
+          <a:off x="0" y="0"/>
+          <a:ext cx="0" cy="0"/>
+          <a:chOff x="0" y="0"/>
+          <a:chExt cx="0" cy="0"/>
+        </a:xfrm>
+      </p:grpSpPr>
+      <p:sp>
+        <p:nvSpPr>
+          <p:cNvPr id="2" name="Slide Image Placeholder 1"/>
+          <p:cNvSpPr>
+            <a:spLocks noGrp="1"/>
+          </p:cNvSpPr>
+          <p:nvPr>
+            <p:ph type="sldImg" idx="2"/>
+          </p:nvPr>
+        </p:nvSpPr>
+        <p:spPr/>
+      </p:sp>
+      <p:sp>
+        <p:nvSpPr>
+          <p:cNvPr id="3" name="Notes Placeholder 2"/>
+          <p:cNvSpPr>
+            <a:spLocks noGrp="1"/>
+          </p:cNvSpPr>
+          <p:nvPr>
+            <p:ph type="body" idx="3" sz="quarter"/>
+          </p:nvPr>
+        </p:nvSpPr>
+        <p:spPr/>
+        <p:txBody>
+          <a:bodyPr/>
+          <a:lstStyle/>
+          <a:p>
+            <a:r>
+              <a:t>Welcome everyone. This week I focused on testing whether satellite imagery can improve our predictions of Annual Average Weekday Daily Traffic — AAWDT — beyond what Road Class alone tells us. I'll walk through what I did, how it works, and the key results.</a:t>
+            </a:r>
+          </a:p>
+        </p:txBody>
+      </p:sp>
+      <p:sp>
+        <p:nvSpPr>
+          <p:cNvPr id="4" name="Slide Number Placeholder 3"/>
+          <p:cNvSpPr>
+            <a:spLocks noGrp="1"/>
+          </p:cNvSpPr>
+          <p:nvPr>
+            <p:ph type="sldNum" idx="5" sz="quarter"/>
+          </p:nvPr>
+        </p:nvSpPr>
+        <p:spPr/>
+      </p:sp>
+    </p:spTree>
+  </p:cSld>
+  <p:clrMapOvr>
+    <a:masterClrMapping/>
+  </p:clrMapOvr>
+</p:notes>
+</file>
+
+<file path=ppt/notesSlides/notesSlide2.xml><?xml version="1.0" encoding="utf-8"?>
+<p:notes xmlns:a="http://schemas.openxmlformats.org/drawingml/2006/main" xmlns:p="http://schemas.openxmlformats.org/presentationml/2006/main" xmlns:r="http://schemas.openxmlformats.org/officeDocument/2006/relationships">
+  <p:cSld>
+    <p:spTree>
+      <p:nvGrpSpPr>
+        <p:cNvPr id="1" name=""/>
+        <p:cNvGrpSpPr/>
+        <p:nvPr/>
+      </p:nvGrpSpPr>
+      <p:grpSpPr>
+        <a:xfrm>
+          <a:off x="0" y="0"/>
+          <a:ext cx="0" cy="0"/>
+          <a:chOff x="0" y="0"/>
+          <a:chExt cx="0" cy="0"/>
+        </a:xfrm>
+      </p:grpSpPr>
+      <p:sp>
+        <p:nvSpPr>
+          <p:cNvPr id="2" name="Slide Image Placeholder 1"/>
+          <p:cNvSpPr>
+            <a:spLocks noGrp="1"/>
+          </p:cNvSpPr>
+          <p:nvPr>
+            <p:ph type="sldImg" idx="2"/>
+          </p:nvPr>
+        </p:nvSpPr>
+        <p:spPr/>
+      </p:sp>
+      <p:sp>
+        <p:nvSpPr>
+          <p:cNvPr id="3" name="Notes Placeholder 2"/>
+          <p:cNvSpPr>
+            <a:spLocks noGrp="1"/>
+          </p:cNvSpPr>
+          <p:nvPr>
+            <p:ph type="body" idx="3" sz="quarter"/>
+          </p:nvPr>
+        </p:nvSpPr>
+        <p:spPr/>
+        <p:txBody>
+          <a:bodyPr/>
+          <a:lstStyle/>
+          <a:p>
+            <a:r>
+              <a:t>This week I ran the full pipeline on our 726 road segments. I tested three clustering algorithms — K-Means, HDBSCAN, and GMM — all applied to satellite image embeddings. I then compared each clustering approach against Road Class for predicting AAWDT. I also ran a sweep to find the optimal number of clusters per method, and did a sensitivity analysis to make sure the results are stable.</a:t>
+            </a:r>
+          </a:p>
+        </p:txBody>
+      </p:sp>
+      <p:sp>
+        <p:nvSpPr>
+          <p:cNvPr id="4" name="Slide Number Placeholder 3"/>
+          <p:cNvSpPr>
+            <a:spLocks noGrp="1"/>
+          </p:cNvSpPr>
+          <p:nvPr>
+            <p:ph type="sldNum" idx="5" sz="quarter"/>
+          </p:nvPr>
+        </p:nvSpPr>
+        <p:spPr/>
+      </p:sp>
+    </p:spTree>
+  </p:cSld>
+  <p:clrMapOvr>
+    <a:masterClrMapping/>
+  </p:clrMapOvr>
+</p:notes>
+</file>
+
+<file path=ppt/notesSlides/notesSlide3.xml><?xml version="1.0" encoding="utf-8"?>
+<p:notes xmlns:a="http://schemas.openxmlformats.org/drawingml/2006/main" xmlns:p="http://schemas.openxmlformats.org/presentationml/2006/main" xmlns:r="http://schemas.openxmlformats.org/officeDocument/2006/relationships">
+  <p:cSld>
+    <p:spTree>
+      <p:nvGrpSpPr>
+        <p:cNvPr id="1" name=""/>
+        <p:cNvGrpSpPr/>
+        <p:nvPr/>
+      </p:nvGrpSpPr>
+      <p:grpSpPr>
+        <a:xfrm>
+          <a:off x="0" y="0"/>
+          <a:ext cx="0" cy="0"/>
+          <a:chOff x="0" y="0"/>
+          <a:chExt cx="0" cy="0"/>
+        </a:xfrm>
+      </p:grpSpPr>
+      <p:sp>
+        <p:nvSpPr>
+          <p:cNvPr id="2" name="Slide Image Placeholder 1"/>
+          <p:cNvSpPr>
+            <a:spLocks noGrp="1"/>
+          </p:cNvSpPr>
+          <p:nvPr>
+            <p:ph type="sldImg" idx="2"/>
+          </p:nvPr>
+        </p:nvSpPr>
+        <p:spPr/>
+      </p:sp>
+      <p:sp>
+        <p:nvSpPr>
+          <p:cNvPr id="3" name="Notes Placeholder 2"/>
+          <p:cNvSpPr>
+            <a:spLocks noGrp="1"/>
+          </p:cNvSpPr>
+          <p:nvPr>
+            <p:ph type="body" idx="3" sz="quarter"/>
+          </p:nvPr>
+        </p:nvSpPr>
+        <p:spPr/>
+        <p:txBody>
+          <a:bodyPr/>
+          <a:lstStyle/>
+          <a:p>
+            <a:r>
+              <a:t>A pre-trained satellite image model converts each road's aerial photo into 512 numbers — essentially a fingerprint of what the road looks like from above. We can't cluster 512 dimensions directly because all points end up equally far apart — this is the curse of dimensionality. UMAP compresses those 512 numbers down to 20 while preserving which roads look similar. We then apply three clustering algorithms to group roads by visual similarity. Finally, we add those cluster labels as features to an XGBoost model and measure whether AAWDT prediction improves.</a:t>
+            </a:r>
+          </a:p>
+        </p:txBody>
+      </p:sp>
+      <p:sp>
+        <p:nvSpPr>
+          <p:cNvPr id="4" name="Slide Number Placeholder 3"/>
+          <p:cNvSpPr>
+            <a:spLocks noGrp="1"/>
+          </p:cNvSpPr>
+          <p:nvPr>
+            <p:ph type="sldNum" idx="5" sz="quarter"/>
+          </p:nvPr>
+        </p:nvSpPr>
+        <p:spPr/>
+      </p:sp>
+    </p:spTree>
+  </p:cSld>
+  <p:clrMapOvr>
+    <a:masterClrMapping/>
+  </p:clrMapOvr>
+</p:notes>
+</file>
+
+<file path=ppt/notesSlides/notesSlide4.xml><?xml version="1.0" encoding="utf-8"?>
+<p:notes xmlns:a="http://schemas.openxmlformats.org/drawingml/2006/main" xmlns:p="http://schemas.openxmlformats.org/presentationml/2006/main" xmlns:r="http://schemas.openxmlformats.org/officeDocument/2006/relationships">
+  <p:cSld>
+    <p:spTree>
+      <p:nvGrpSpPr>
+        <p:cNvPr id="1" name=""/>
+        <p:cNvGrpSpPr/>
+        <p:nvPr/>
+      </p:nvGrpSpPr>
+      <p:grpSpPr>
+        <a:xfrm>
+          <a:off x="0" y="0"/>
+          <a:ext cx="0" cy="0"/>
+          <a:chOff x="0" y="0"/>
+          <a:chExt cx="0" cy="0"/>
+        </a:xfrm>
+      </p:grpSpPr>
+      <p:sp>
+        <p:nvSpPr>
+          <p:cNvPr id="2" name="Slide Image Placeholder 1"/>
+          <p:cNvSpPr>
+            <a:spLocks noGrp="1"/>
+          </p:cNvSpPr>
+          <p:nvPr>
+            <p:ph type="sldImg" idx="2"/>
+          </p:nvPr>
+        </p:nvSpPr>
+        <p:spPr/>
+      </p:sp>
+      <p:sp>
+        <p:nvSpPr>
+          <p:cNvPr id="3" name="Notes Placeholder 2"/>
+          <p:cNvSpPr>
+            <a:spLocks noGrp="1"/>
+          </p:cNvSpPr>
+          <p:nvPr>
+            <p:ph type="body" idx="3" sz="quarter"/>
+          </p:nvPr>
+        </p:nvSpPr>
+        <p:spPr/>
+        <p:txBody>
+          <a:bodyPr/>
+          <a:lstStyle/>
+          <a:p>
+            <a:r>
+              <a:t>Each dot is one road segment. Dots close together look similar from satellite. On the left you can see the clusters found by K-Means. In the middle, I've coloured the same map by actual AAWDT — warmer colours mean higher traffic. Notice how the warm-coloured dots tend to cluster together. On the right, the bar chart shows mean AAWDT per cluster — there are clear differences between groups. This tells us the clusters are capturing something real about traffic, even though they only used imagery.</a:t>
+            </a:r>
+          </a:p>
+        </p:txBody>
+      </p:sp>
+      <p:sp>
+        <p:nvSpPr>
+          <p:cNvPr id="4" name="Slide Number Placeholder 3"/>
+          <p:cNvSpPr>
+            <a:spLocks noGrp="1"/>
+          </p:cNvSpPr>
+          <p:nvPr>
+            <p:ph type="sldNum" idx="5" sz="quarter"/>
+          </p:nvPr>
+        </p:nvSpPr>
+        <p:spPr/>
+      </p:sp>
+    </p:spTree>
+  </p:cSld>
+  <p:clrMapOvr>
+    <a:masterClrMapping/>
+  </p:clrMapOvr>
+</p:notes>
+</file>
+
+<file path=ppt/notesSlides/notesSlide5.xml><?xml version="1.0" encoding="utf-8"?>
+<p:notes xmlns:a="http://schemas.openxmlformats.org/drawingml/2006/main" xmlns:p="http://schemas.openxmlformats.org/presentationml/2006/main" xmlns:r="http://schemas.openxmlformats.org/officeDocument/2006/relationships">
+  <p:cSld>
+    <p:spTree>
+      <p:nvGrpSpPr>
+        <p:cNvPr id="1" name=""/>
+        <p:cNvGrpSpPr/>
+        <p:nvPr/>
+      </p:nvGrpSpPr>
+      <p:grpSpPr>
+        <a:xfrm>
+          <a:off x="0" y="0"/>
+          <a:ext cx="0" cy="0"/>
+          <a:chOff x="0" y="0"/>
+          <a:chExt cx="0" cy="0"/>
+        </a:xfrm>
+      </p:grpSpPr>
+      <p:sp>
+        <p:nvSpPr>
+          <p:cNvPr id="2" name="Slide Image Placeholder 1"/>
+          <p:cNvSpPr>
+            <a:spLocks noGrp="1"/>
+          </p:cNvSpPr>
+          <p:nvPr>
+            <p:ph type="sldImg" idx="2"/>
+          </p:nvPr>
+        </p:nvSpPr>
+        <p:spPr/>
+      </p:sp>
+      <p:sp>
+        <p:nvSpPr>
+          <p:cNvPr id="3" name="Notes Placeholder 2"/>
+          <p:cNvSpPr>
+            <a:spLocks noGrp="1"/>
+          </p:cNvSpPr>
+          <p:nvPr>
+            <p:ph type="body" idx="3" sz="quarter"/>
+          </p:nvPr>
+        </p:nvSpPr>
+        <p:spPr/>
+        <p:txBody>
+          <a:bodyPr/>
+          <a:lstStyle/>
+          <a:p>
+            <a:r>
+              <a:t>The three big numbers at the top tell the story. Road Class alone gives R² of 0.781. Adding GMM satellite clusters on top brings it to 0.801 — breaking the 0.80 barrier. That's a +0.020 improvement. The bars show all six feature combinations. The yellow vertical line marks the Road Class baseline. Anything to the right of that line means satellite clusters added value. Importantly, clusters alone — without Road Class — only reach about 0.71. The clusters supplement Road Class, they don't replace it.</a:t>
+            </a:r>
+          </a:p>
+        </p:txBody>
+      </p:sp>
+      <p:sp>
+        <p:nvSpPr>
+          <p:cNvPr id="4" name="Slide Number Placeholder 3"/>
+          <p:cNvSpPr>
+            <a:spLocks noGrp="1"/>
+          </p:cNvSpPr>
+          <p:nvPr>
+            <p:ph type="sldNum" idx="5" sz="quarter"/>
+          </p:nvPr>
+        </p:nvSpPr>
+        <p:spPr/>
+      </p:sp>
+    </p:spTree>
+  </p:cSld>
+  <p:clrMapOvr>
+    <a:masterClrMapping/>
+  </p:clrMapOvr>
+</p:notes>
+</file>
+
+<file path=ppt/notesSlides/notesSlide6.xml><?xml version="1.0" encoding="utf-8"?>
+<p:notes xmlns:a="http://schemas.openxmlformats.org/drawingml/2006/main" xmlns:p="http://schemas.openxmlformats.org/presentationml/2006/main" xmlns:r="http://schemas.openxmlformats.org/officeDocument/2006/relationships">
+  <p:cSld>
+    <p:spTree>
+      <p:nvGrpSpPr>
+        <p:cNvPr id="1" name=""/>
+        <p:cNvGrpSpPr/>
+        <p:nvPr/>
+      </p:nvGrpSpPr>
+      <p:grpSpPr>
+        <a:xfrm>
+          <a:off x="0" y="0"/>
+          <a:ext cx="0" cy="0"/>
+          <a:chOff x="0" y="0"/>
+          <a:chExt cx="0" cy="0"/>
+        </a:xfrm>
+      </p:grpSpPr>
+      <p:sp>
+        <p:nvSpPr>
+          <p:cNvPr id="2" name="Slide Image Placeholder 1"/>
+          <p:cNvSpPr>
+            <a:spLocks noGrp="1"/>
+          </p:cNvSpPr>
+          <p:nvPr>
+            <p:ph type="sldImg" idx="2"/>
+          </p:nvPr>
+        </p:nvSpPr>
+        <p:spPr/>
+      </p:sp>
+      <p:sp>
+        <p:nvSpPr>
+          <p:cNvPr id="3" name="Notes Placeholder 2"/>
+          <p:cNvSpPr>
+            <a:spLocks noGrp="1"/>
+          </p:cNvSpPr>
+          <p:nvPr>
+            <p:ph type="body" idx="3" sz="quarter"/>
+          </p:nvPr>
+        </p:nvSpPr>
+        <p:spPr/>
+        <p:txBody>
+          <a:bodyPr/>
+          <a:lstStyle/>
+          <a:p>
+            <a:r>
+              <a:t>Road Class is a label assigned by planners. It tells you the functional purpose of the road — arterial, collector, local — but it applies that label uniformly regardless of context. A Minor Arterial in the dense Ottawa city core and a Minor Arterial at the edge of the suburbs get the same label, but they carry very different amounts of traffic. Satellite imagery can see the difference. It captures the surrounding built environment — how dense the buildings are, whether there's a big intersection, a shopping centre, or just fields. That visual context directly influences traffic demand, and that's the extra signal the clusters bring.</a:t>
+            </a:r>
+          </a:p>
+        </p:txBody>
+      </p:sp>
+      <p:sp>
+        <p:nvSpPr>
+          <p:cNvPr id="4" name="Slide Number Placeholder 3"/>
+          <p:cNvSpPr>
+            <a:spLocks noGrp="1"/>
+          </p:cNvSpPr>
+          <p:nvPr>
+            <p:ph type="sldNum" idx="5" sz="quarter"/>
+          </p:nvPr>
+        </p:nvSpPr>
+        <p:spPr/>
+      </p:sp>
+    </p:spTree>
+  </p:cSld>
+  <p:clrMapOvr>
+    <a:masterClrMapping/>
+  </p:clrMapOvr>
+</p:notes>
+</file>
+
+<file path=ppt/notesSlides/notesSlide7.xml><?xml version="1.0" encoding="utf-8"?>
+<p:notes xmlns:a="http://schemas.openxmlformats.org/drawingml/2006/main" xmlns:p="http://schemas.openxmlformats.org/presentationml/2006/main" xmlns:r="http://schemas.openxmlformats.org/officeDocument/2006/relationships">
+  <p:cSld>
+    <p:spTree>
+      <p:nvGrpSpPr>
+        <p:cNvPr id="1" name=""/>
+        <p:cNvGrpSpPr/>
+        <p:nvPr/>
+      </p:nvGrpSpPr>
+      <p:grpSpPr>
+        <a:xfrm>
+          <a:off x="0" y="0"/>
+          <a:ext cx="0" cy="0"/>
+          <a:chOff x="0" y="0"/>
+          <a:chExt cx="0" cy="0"/>
+        </a:xfrm>
+      </p:grpSpPr>
+      <p:sp>
+        <p:nvSpPr>
+          <p:cNvPr id="2" name="Slide Image Placeholder 1"/>
+          <p:cNvSpPr>
+            <a:spLocks noGrp="1"/>
+          </p:cNvSpPr>
+          <p:nvPr>
+            <p:ph type="sldImg" idx="2"/>
+          </p:nvPr>
+        </p:nvSpPr>
+        <p:spPr/>
+      </p:sp>
+      <p:sp>
+        <p:nvSpPr>
+          <p:cNvPr id="3" name="Notes Placeholder 2"/>
+          <p:cNvSpPr>
+            <a:spLocks noGrp="1"/>
+          </p:cNvSpPr>
+          <p:nvPr>
+            <p:ph type="body" idx="3" sz="quarter"/>
+          </p:nvPr>
+        </p:nvSpPr>
+        <p:spPr/>
+        <p:txBody>
+          <a:bodyPr/>
+          <a:lstStyle/>
+          <a:p>
+            <a:r>
+              <a:t>Four things I plan to do next. First, the GMM benefit curve was still noisy at g=30 — I want to extend to g=40 to confirm g=21 is truly optimal. Second, the current R² is measured on the same 726 segments used to build the clusters, so I need to validate on a held-out set to confirm the gains aren't from overfitting. Third, I want to manually label what each cluster actually represents in civil engineering terms — dense urban, suburban commercial, rural, and so on — to make the clusters interpretable to planners. Fourth, I'll start writing this up as a methodology section for the thesis.</a:t>
+            </a:r>
+          </a:p>
+        </p:txBody>
+      </p:sp>
+      <p:sp>
+        <p:nvSpPr>
+          <p:cNvPr id="4" name="Slide Number Placeholder 3"/>
+          <p:cNvSpPr>
+            <a:spLocks noGrp="1"/>
+          </p:cNvSpPr>
+          <p:nvPr>
+            <p:ph type="sldNum" idx="5" sz="quarter"/>
+          </p:nvPr>
+        </p:nvSpPr>
+        <p:spPr/>
+      </p:sp>
+    </p:spTree>
+  </p:cSld>
+  <p:clrMapOvr>
+    <a:masterClrMapping/>
+  </p:clrMapOvr>
+</p:notes>
 </file>
 
 <file path=ppt/slideLayouts/slideLayout1.xml><?xml version="1.0" encoding="utf-8"?>
@@ -3109,7 +3949,7 @@
             <a:avLst/>
           </a:prstGeom>
           <a:solidFill>
-            <a:srgbClr val="1A1A2E"/>
+            <a:srgbClr val="0D1B2A"/>
           </a:solidFill>
           <a:ln>
             <a:noFill/>
@@ -3145,14 +3985,14 @@
         </p:nvSpPr>
         <p:spPr>
           <a:xfrm>
-            <a:off x="0" y="2743200"/>
-            <a:ext cx="12188952" cy="54864"/>
+            <a:off x="0" y="0"/>
+            <a:ext cx="2743200" cy="457200"/>
           </a:xfrm>
           <a:prstGeom prst="rect">
             <a:avLst/>
           </a:prstGeom>
           <a:solidFill>
-            <a:srgbClr val="00B4D8"/>
+            <a:srgbClr val="00C2E0"/>
           </a:solidFill>
           <a:ln>
             <a:noFill/>
@@ -3182,14 +4022,143 @@
       </p:sp>
       <p:sp>
         <p:nvSpPr>
-          <p:cNvPr id="4" name="TextBox 3"/>
+          <p:cNvPr id="4" name="Rectangle 3"/>
+          <p:cNvSpPr/>
+          <p:nvPr/>
+        </p:nvSpPr>
+        <p:spPr>
+          <a:xfrm>
+            <a:off x="0" y="457200"/>
+            <a:ext cx="1371600" cy="6400800"/>
+          </a:xfrm>
+          <a:prstGeom prst="rect">
+            <a:avLst/>
+          </a:prstGeom>
+          <a:solidFill>
+            <a:srgbClr val="1B4F8A"/>
+          </a:solidFill>
+          <a:ln>
+            <a:noFill/>
+          </a:ln>
+        </p:spPr>
+        <p:style>
+          <a:lnRef idx="1">
+            <a:schemeClr val="accent1"/>
+          </a:lnRef>
+          <a:fillRef idx="3">
+            <a:schemeClr val="accent1"/>
+          </a:fillRef>
+          <a:effectRef idx="2">
+            <a:schemeClr val="accent1"/>
+          </a:effectRef>
+          <a:fontRef idx="minor">
+            <a:schemeClr val="lt1"/>
+          </a:fontRef>
+        </p:style>
+        <p:txBody>
+          <a:bodyPr rtlCol="0" anchor="ctr"/>
+          <a:lstStyle/>
+          <a:p>
+            <a:pPr algn="ctr"/>
+          </a:p>
+        </p:txBody>
+      </p:sp>
+      <p:sp>
+        <p:nvSpPr>
+          <p:cNvPr id="5" name="Rectangle 4"/>
+          <p:cNvSpPr/>
+          <p:nvPr/>
+        </p:nvSpPr>
+        <p:spPr>
+          <a:xfrm>
+            <a:off x="9418320" y="6400800"/>
+            <a:ext cx="2770632" cy="457200"/>
+          </a:xfrm>
+          <a:prstGeom prst="rect">
+            <a:avLst/>
+          </a:prstGeom>
+          <a:solidFill>
+            <a:srgbClr val="00C2E0"/>
+          </a:solidFill>
+          <a:ln>
+            <a:noFill/>
+          </a:ln>
+        </p:spPr>
+        <p:style>
+          <a:lnRef idx="1">
+            <a:schemeClr val="accent1"/>
+          </a:lnRef>
+          <a:fillRef idx="3">
+            <a:schemeClr val="accent1"/>
+          </a:fillRef>
+          <a:effectRef idx="2">
+            <a:schemeClr val="accent1"/>
+          </a:effectRef>
+          <a:fontRef idx="minor">
+            <a:schemeClr val="lt1"/>
+          </a:fontRef>
+        </p:style>
+        <p:txBody>
+          <a:bodyPr rtlCol="0" anchor="ctr"/>
+          <a:lstStyle/>
+          <a:p>
+            <a:pPr algn="ctr"/>
+          </a:p>
+        </p:txBody>
+      </p:sp>
+      <p:sp>
+        <p:nvSpPr>
+          <p:cNvPr id="6" name="Rectangle 5"/>
+          <p:cNvSpPr/>
+          <p:nvPr/>
+        </p:nvSpPr>
+        <p:spPr>
+          <a:xfrm>
+            <a:off x="10789920" y="0"/>
+            <a:ext cx="1399032" cy="6400800"/>
+          </a:xfrm>
+          <a:prstGeom prst="rect">
+            <a:avLst/>
+          </a:prstGeom>
+          <a:solidFill>
+            <a:srgbClr val="1B4F8A"/>
+          </a:solidFill>
+          <a:ln>
+            <a:noFill/>
+          </a:ln>
+        </p:spPr>
+        <p:style>
+          <a:lnRef idx="1">
+            <a:schemeClr val="accent1"/>
+          </a:lnRef>
+          <a:fillRef idx="3">
+            <a:schemeClr val="accent1"/>
+          </a:fillRef>
+          <a:effectRef idx="2">
+            <a:schemeClr val="accent1"/>
+          </a:effectRef>
+          <a:fontRef idx="minor">
+            <a:schemeClr val="lt1"/>
+          </a:fontRef>
+        </p:style>
+        <p:txBody>
+          <a:bodyPr rtlCol="0" anchor="ctr"/>
+          <a:lstStyle/>
+          <a:p>
+            <a:pPr algn="ctr"/>
+          </a:p>
+        </p:txBody>
+      </p:sp>
+      <p:sp>
+        <p:nvSpPr>
+          <p:cNvPr id="7" name="TextBox 6"/>
           <p:cNvSpPr txBox="1"/>
           <p:nvPr/>
         </p:nvSpPr>
         <p:spPr>
           <a:xfrm>
-            <a:off x="914400" y="822960"/>
-            <a:ext cx="10360152" cy="1828800"/>
+            <a:off x="4114800" y="548640"/>
+            <a:ext cx="3959352" cy="2560320"/>
           </a:xfrm>
           <a:prstGeom prst="rect">
             <a:avLst/>
@@ -3204,27 +4173,26 @@
           <a:p>
             <a:pPr algn="ctr"/>
             <a:r>
-              <a:rPr sz="3600" b="1" i="0">
+              <a:rPr sz="12000" b="0" i="0">
                 <a:solidFill>
                   <a:srgbClr val="FFFFFF"/>
                 </a:solidFill>
               </a:rPr>
-              <a:t>Can Satellite Imagery Improve
-Traffic Volume Prediction?</a:t>
-            </a:r>
-          </a:p>
-        </p:txBody>
-      </p:sp>
-      <p:sp>
-        <p:nvSpPr>
-          <p:cNvPr id="5" name="TextBox 4"/>
+              <a:t>🛰️</a:t>
+            </a:r>
+          </a:p>
+        </p:txBody>
+      </p:sp>
+      <p:sp>
+        <p:nvSpPr>
+          <p:cNvPr id="8" name="TextBox 7"/>
           <p:cNvSpPr txBox="1"/>
           <p:nvPr/>
         </p:nvSpPr>
         <p:spPr>
           <a:xfrm>
-            <a:off x="914400" y="3017520"/>
-            <a:ext cx="10360152" cy="548640"/>
+            <a:off x="1645920" y="3200400"/>
+            <a:ext cx="8897112" cy="1828800"/>
           </a:xfrm>
           <a:prstGeom prst="rect">
             <a:avLst/>
@@ -3239,26 +4207,70 @@
           <a:p>
             <a:pPr algn="ctr"/>
             <a:r>
-              <a:rPr sz="1800" b="0" i="0">
-                <a:solidFill>
-                  <a:srgbClr val="CAE9FF"/>
+              <a:rPr sz="3400" b="1" i="0">
+                <a:solidFill>
+                  <a:srgbClr val="FFFFFF"/>
                 </a:solidFill>
               </a:rPr>
-              <a:t>Weekly Research Update  —  March 2026</a:t>
-            </a:r>
-          </a:p>
-        </p:txBody>
-      </p:sp>
-      <p:sp>
-        <p:nvSpPr>
-          <p:cNvPr id="6" name="TextBox 5"/>
+              <a:t>Can Satellite Imagery
+Improve Traffic Prediction?</a:t>
+            </a:r>
+          </a:p>
+        </p:txBody>
+      </p:sp>
+      <p:sp>
+        <p:nvSpPr>
+          <p:cNvPr id="9" name="Rectangle 8"/>
+          <p:cNvSpPr/>
+          <p:nvPr/>
+        </p:nvSpPr>
+        <p:spPr>
+          <a:xfrm>
+            <a:off x="1645920" y="5074920"/>
+            <a:ext cx="8897112" cy="45720"/>
+          </a:xfrm>
+          <a:prstGeom prst="rect">
+            <a:avLst/>
+          </a:prstGeom>
+          <a:solidFill>
+            <a:srgbClr val="00C2E0"/>
+          </a:solidFill>
+          <a:ln>
+            <a:noFill/>
+          </a:ln>
+        </p:spPr>
+        <p:style>
+          <a:lnRef idx="1">
+            <a:schemeClr val="accent1"/>
+          </a:lnRef>
+          <a:fillRef idx="3">
+            <a:schemeClr val="accent1"/>
+          </a:fillRef>
+          <a:effectRef idx="2">
+            <a:schemeClr val="accent1"/>
+          </a:effectRef>
+          <a:fontRef idx="minor">
+            <a:schemeClr val="lt1"/>
+          </a:fontRef>
+        </p:style>
+        <p:txBody>
+          <a:bodyPr rtlCol="0" anchor="ctr"/>
+          <a:lstStyle/>
+          <a:p>
+            <a:pPr algn="ctr"/>
+          </a:p>
+        </p:txBody>
+      </p:sp>
+      <p:sp>
+        <p:nvSpPr>
+          <p:cNvPr id="10" name="TextBox 9"/>
           <p:cNvSpPr txBox="1"/>
           <p:nvPr/>
         </p:nvSpPr>
         <p:spPr>
           <a:xfrm>
-            <a:off x="914400" y="3657600"/>
-            <a:ext cx="10360152" cy="457200"/>
+            <a:off x="1645920" y="5166360"/>
+            <a:ext cx="8897112" cy="457200"/>
           </a:xfrm>
           <a:prstGeom prst="rect">
             <a:avLst/>
@@ -3273,46 +4285,12 @@
           <a:p>
             <a:pPr algn="ctr"/>
             <a:r>
-              <a:rPr sz="1600" b="0" i="0">
-                <a:solidFill>
-                  <a:srgbClr val="CAE9FF"/>
+              <a:rPr sz="1400" b="0" i="0">
+                <a:solidFill>
+                  <a:srgbClr val="B8D8F0"/>
                 </a:solidFill>
               </a:rPr>
-              <a:t>Mohammed Mostain</a:t>
-            </a:r>
-          </a:p>
-        </p:txBody>
-      </p:sp>
-      <p:sp>
-        <p:nvSpPr>
-          <p:cNvPr id="7" name="TextBox 6"/>
-          <p:cNvSpPr txBox="1"/>
-          <p:nvPr/>
-        </p:nvSpPr>
-        <p:spPr>
-          <a:xfrm>
-            <a:off x="914400" y="4572000"/>
-            <a:ext cx="10360152" cy="457200"/>
-          </a:xfrm>
-          <a:prstGeom prst="rect">
-            <a:avLst/>
-          </a:prstGeom>
-          <a:noFill/>
-        </p:spPr>
-        <p:txBody>
-          <a:bodyPr wrap="square">
-            <a:spAutoFit/>
-          </a:bodyPr>
-          <a:lstStyle/>
-          <a:p>
-            <a:pPr algn="ctr"/>
-            <a:r>
-              <a:rPr sz="1300" b="0" i="1">
-                <a:solidFill>
-                  <a:srgbClr val="CAE9FF"/>
-                </a:solidFill>
-              </a:rPr>
-              <a:t>Dataset: 726 road segments  |  Ottawa region  |  AAWDT as target variable</a:t>
+              <a:t>Weekly Research Update  ·  Mohammed Mostain  ·  March 2026</a:t>
             </a:r>
           </a:p>
         </p:txBody>
@@ -3350,7 +4328,7 @@
             <a:avLst/>
           </a:prstGeom>
           <a:solidFill>
-            <a:srgbClr val="1A1A2E"/>
+            <a:srgbClr val="0D1B2A"/>
           </a:solidFill>
           <a:ln>
             <a:noFill/>
@@ -3380,20 +4358,54 @@
       </p:sp>
       <p:sp>
         <p:nvSpPr>
-          <p:cNvPr id="3" name="Rectangle 2"/>
+          <p:cNvPr id="3" name="TextBox 2"/>
+          <p:cNvSpPr txBox="1"/>
+          <p:nvPr/>
+        </p:nvSpPr>
+        <p:spPr>
+          <a:xfrm>
+            <a:off x="502920" y="164592"/>
+            <a:ext cx="10972800" cy="804672"/>
+          </a:xfrm>
+          <a:prstGeom prst="rect">
+            <a:avLst/>
+          </a:prstGeom>
+          <a:noFill/>
+        </p:spPr>
+        <p:txBody>
+          <a:bodyPr wrap="square">
+            <a:spAutoFit/>
+          </a:bodyPr>
+          <a:lstStyle/>
+          <a:p>
+            <a:pPr algn="l"/>
+            <a:r>
+              <a:rPr sz="2800" b="1" i="0">
+                <a:solidFill>
+                  <a:srgbClr val="FFFFFF"/>
+                </a:solidFill>
+              </a:rPr>
+              <a:t>This Week</a:t>
+            </a:r>
+          </a:p>
+        </p:txBody>
+      </p:sp>
+      <p:sp>
+        <p:nvSpPr>
+          <p:cNvPr id="4" name="Rectangle 3"/>
           <p:cNvSpPr/>
           <p:nvPr/>
         </p:nvSpPr>
         <p:spPr>
           <a:xfrm>
-            <a:off x="0" y="1005840"/>
+            <a:off x="0" y="1024128"/>
             <a:ext cx="12188952" cy="45720"/>
           </a:xfrm>
           <a:prstGeom prst="rect">
             <a:avLst/>
           </a:prstGeom>
           <a:solidFill>
-            <a:srgbClr val="00B4D8"/>
+            <a:srgbClr val="00C2E0"/>
           </a:solidFill>
           <a:ln>
             <a:noFill/>
@@ -3423,14 +4435,59 @@
       </p:sp>
       <p:sp>
         <p:nvSpPr>
-          <p:cNvPr id="4" name="TextBox 3"/>
+          <p:cNvPr id="5" name="Rounded Rectangle 4"/>
+          <p:cNvSpPr/>
+          <p:nvPr/>
+        </p:nvSpPr>
+        <p:spPr>
+          <a:xfrm>
+            <a:off x="365760" y="1371600"/>
+            <a:ext cx="2103120" cy="2011680"/>
+          </a:xfrm>
+          <a:prstGeom prst="roundRect">
+            <a:avLst>
+              <a:gd name="adj" fmla="val 8000"/>
+            </a:avLst>
+          </a:prstGeom>
+          <a:solidFill>
+            <a:srgbClr val="1B4F8A"/>
+          </a:solidFill>
+          <a:ln>
+            <a:noFill/>
+          </a:ln>
+        </p:spPr>
+        <p:style>
+          <a:lnRef idx="1">
+            <a:schemeClr val="accent1"/>
+          </a:lnRef>
+          <a:fillRef idx="3">
+            <a:schemeClr val="accent1"/>
+          </a:fillRef>
+          <a:effectRef idx="2">
+            <a:schemeClr val="accent1"/>
+          </a:effectRef>
+          <a:fontRef idx="minor">
+            <a:schemeClr val="lt1"/>
+          </a:fontRef>
+        </p:style>
+        <p:txBody>
+          <a:bodyPr rtlCol="0" anchor="ctr"/>
+          <a:lstStyle/>
+          <a:p>
+            <a:pPr algn="ctr"/>
+          </a:p>
+        </p:txBody>
+      </p:sp>
+      <p:sp>
+        <p:nvSpPr>
+          <p:cNvPr id="6" name="TextBox 5"/>
           <p:cNvSpPr txBox="1"/>
           <p:nvPr/>
         </p:nvSpPr>
         <p:spPr>
           <a:xfrm>
-            <a:off x="457200" y="137160"/>
-            <a:ext cx="11430000" cy="868680"/>
+            <a:off x="365760" y="1572768"/>
+            <a:ext cx="2103120" cy="822960"/>
           </a:xfrm>
           <a:prstGeom prst="rect">
             <a:avLst/>
@@ -3443,28 +4500,28 @@
           </a:bodyPr>
           <a:lstStyle/>
           <a:p>
-            <a:pPr algn="l"/>
-            <a:r>
-              <a:rPr sz="3000" b="1" i="0">
+            <a:pPr algn="ctr"/>
+            <a:r>
+              <a:rPr sz="3600" b="0" i="0">
                 <a:solidFill>
                   <a:srgbClr val="FFFFFF"/>
                 </a:solidFill>
               </a:rPr>
-              <a:t>What I Did This Week</a:t>
-            </a:r>
-          </a:p>
-        </p:txBody>
-      </p:sp>
-      <p:sp>
-        <p:nvSpPr>
-          <p:cNvPr id="5" name="TextBox 4"/>
+              <a:t>🛰️</a:t>
+            </a:r>
+          </a:p>
+        </p:txBody>
+      </p:sp>
+      <p:sp>
+        <p:nvSpPr>
+          <p:cNvPr id="7" name="TextBox 6"/>
           <p:cNvSpPr txBox="1"/>
           <p:nvPr/>
         </p:nvSpPr>
         <p:spPr>
           <a:xfrm>
-            <a:off x="548640" y="1280160"/>
-            <a:ext cx="10972800" cy="658368"/>
+            <a:off x="365760" y="2724912"/>
+            <a:ext cx="2103120" cy="594360"/>
           </a:xfrm>
           <a:prstGeom prst="rect">
             <a:avLst/>
@@ -3477,28 +4534,74 @@
           </a:bodyPr>
           <a:lstStyle/>
           <a:p>
-            <a:pPr algn="l"/>
-            <a:r>
-              <a:rPr sz="1700" b="0" i="0">
+            <a:pPr algn="ctr"/>
+            <a:r>
+              <a:rPr sz="1300" b="1" i="0">
                 <a:solidFill>
                   <a:srgbClr val="FFFFFF"/>
                 </a:solidFill>
               </a:rPr>
-              <a:t>•   Clustered 726 road segments using their satellite images</a:t>
-            </a:r>
-          </a:p>
-        </p:txBody>
-      </p:sp>
-      <p:sp>
-        <p:nvSpPr>
-          <p:cNvPr id="6" name="TextBox 5"/>
+              <a:t>Satellite
+Clustering</a:t>
+            </a:r>
+          </a:p>
+        </p:txBody>
+      </p:sp>
+      <p:sp>
+        <p:nvSpPr>
+          <p:cNvPr id="8" name="Rounded Rectangle 7"/>
+          <p:cNvSpPr/>
+          <p:nvPr/>
+        </p:nvSpPr>
+        <p:spPr>
+          <a:xfrm>
+            <a:off x="2697479" y="1371600"/>
+            <a:ext cx="2103120" cy="2011680"/>
+          </a:xfrm>
+          <a:prstGeom prst="roundRect">
+            <a:avLst>
+              <a:gd name="adj" fmla="val 8000"/>
+            </a:avLst>
+          </a:prstGeom>
+          <a:solidFill>
+            <a:srgbClr val="1B4F8A"/>
+          </a:solidFill>
+          <a:ln>
+            <a:noFill/>
+          </a:ln>
+        </p:spPr>
+        <p:style>
+          <a:lnRef idx="1">
+            <a:schemeClr val="accent1"/>
+          </a:lnRef>
+          <a:fillRef idx="3">
+            <a:schemeClr val="accent1"/>
+          </a:fillRef>
+          <a:effectRef idx="2">
+            <a:schemeClr val="accent1"/>
+          </a:effectRef>
+          <a:fontRef idx="minor">
+            <a:schemeClr val="lt1"/>
+          </a:fontRef>
+        </p:style>
+        <p:txBody>
+          <a:bodyPr rtlCol="0" anchor="ctr"/>
+          <a:lstStyle/>
+          <a:p>
+            <a:pPr algn="ctr"/>
+          </a:p>
+        </p:txBody>
+      </p:sp>
+      <p:sp>
+        <p:nvSpPr>
+          <p:cNvPr id="9" name="TextBox 8"/>
           <p:cNvSpPr txBox="1"/>
           <p:nvPr/>
         </p:nvSpPr>
         <p:spPr>
           <a:xfrm>
-            <a:off x="548640" y="1847088"/>
-            <a:ext cx="10972800" cy="658368"/>
+            <a:off x="2697479" y="1572768"/>
+            <a:ext cx="2103120" cy="822960"/>
           </a:xfrm>
           <a:prstGeom prst="rect">
             <a:avLst/>
@@ -3511,28 +4614,28 @@
           </a:bodyPr>
           <a:lstStyle/>
           <a:p>
-            <a:pPr algn="l"/>
-            <a:r>
-              <a:rPr sz="1700" b="0" i="0">
+            <a:pPr algn="ctr"/>
+            <a:r>
+              <a:rPr sz="3600" b="0" i="0">
                 <a:solidFill>
                   <a:srgbClr val="FFFFFF"/>
                 </a:solidFill>
               </a:rPr>
-              <a:t>•   Tested 3 clustering methods: K-Means, HDBSCAN, and GMM</a:t>
-            </a:r>
-          </a:p>
-        </p:txBody>
-      </p:sp>
-      <p:sp>
-        <p:nvSpPr>
-          <p:cNvPr id="7" name="TextBox 6"/>
+              <a:t>⚙️</a:t>
+            </a:r>
+          </a:p>
+        </p:txBody>
+      </p:sp>
+      <p:sp>
+        <p:nvSpPr>
+          <p:cNvPr id="10" name="TextBox 9"/>
           <p:cNvSpPr txBox="1"/>
           <p:nvPr/>
         </p:nvSpPr>
         <p:spPr>
           <a:xfrm>
-            <a:off x="548640" y="2414015"/>
-            <a:ext cx="10972800" cy="658368"/>
+            <a:off x="2697479" y="2724912"/>
+            <a:ext cx="2103120" cy="594360"/>
           </a:xfrm>
           <a:prstGeom prst="rect">
             <a:avLst/>
@@ -3545,28 +4648,74 @@
           </a:bodyPr>
           <a:lstStyle/>
           <a:p>
-            <a:pPr algn="l"/>
-            <a:r>
-              <a:rPr sz="1700" b="0" i="0">
+            <a:pPr algn="ctr"/>
+            <a:r>
+              <a:rPr sz="1300" b="1" i="0">
                 <a:solidFill>
                   <a:srgbClr val="FFFFFF"/>
                 </a:solidFill>
               </a:rPr>
-              <a:t>•   Compared each cluster set against Road Class for predicting AAWDT</a:t>
-            </a:r>
-          </a:p>
-        </p:txBody>
-      </p:sp>
-      <p:sp>
-        <p:nvSpPr>
-          <p:cNvPr id="8" name="TextBox 7"/>
+              <a:t>3 Methods
+Tested</a:t>
+            </a:r>
+          </a:p>
+        </p:txBody>
+      </p:sp>
+      <p:sp>
+        <p:nvSpPr>
+          <p:cNvPr id="11" name="Rounded Rectangle 10"/>
+          <p:cNvSpPr/>
+          <p:nvPr/>
+        </p:nvSpPr>
+        <p:spPr>
+          <a:xfrm>
+            <a:off x="5029200" y="1371600"/>
+            <a:ext cx="2103120" cy="2011680"/>
+          </a:xfrm>
+          <a:prstGeom prst="roundRect">
+            <a:avLst>
+              <a:gd name="adj" fmla="val 8000"/>
+            </a:avLst>
+          </a:prstGeom>
+          <a:solidFill>
+            <a:srgbClr val="1B4F8A"/>
+          </a:solidFill>
+          <a:ln>
+            <a:noFill/>
+          </a:ln>
+        </p:spPr>
+        <p:style>
+          <a:lnRef idx="1">
+            <a:schemeClr val="accent1"/>
+          </a:lnRef>
+          <a:fillRef idx="3">
+            <a:schemeClr val="accent1"/>
+          </a:fillRef>
+          <a:effectRef idx="2">
+            <a:schemeClr val="accent1"/>
+          </a:effectRef>
+          <a:fontRef idx="minor">
+            <a:schemeClr val="lt1"/>
+          </a:fontRef>
+        </p:style>
+        <p:txBody>
+          <a:bodyPr rtlCol="0" anchor="ctr"/>
+          <a:lstStyle/>
+          <a:p>
+            <a:pPr algn="ctr"/>
+          </a:p>
+        </p:txBody>
+      </p:sp>
+      <p:sp>
+        <p:nvSpPr>
+          <p:cNvPr id="12" name="TextBox 11"/>
           <p:cNvSpPr txBox="1"/>
           <p:nvPr/>
         </p:nvSpPr>
         <p:spPr>
           <a:xfrm>
-            <a:off x="548640" y="2980944"/>
-            <a:ext cx="10972800" cy="658368"/>
+            <a:off x="5029200" y="1572768"/>
+            <a:ext cx="2103120" cy="822960"/>
           </a:xfrm>
           <a:prstGeom prst="rect">
             <a:avLst/>
@@ -3579,28 +4728,28 @@
           </a:bodyPr>
           <a:lstStyle/>
           <a:p>
-            <a:pPr algn="l"/>
-            <a:r>
-              <a:rPr sz="1700" b="0" i="0">
+            <a:pPr algn="ctr"/>
+            <a:r>
+              <a:rPr sz="3600" b="0" i="0">
                 <a:solidFill>
                   <a:srgbClr val="FFFFFF"/>
                 </a:solidFill>
               </a:rPr>
-              <a:t>•   Ran a sweep to find the optimal number of clusters per method</a:t>
-            </a:r>
-          </a:p>
-        </p:txBody>
-      </p:sp>
-      <p:sp>
-        <p:nvSpPr>
-          <p:cNvPr id="9" name="TextBox 8"/>
+              <a:t>📊</a:t>
+            </a:r>
+          </a:p>
+        </p:txBody>
+      </p:sp>
+      <p:sp>
+        <p:nvSpPr>
+          <p:cNvPr id="13" name="TextBox 12"/>
           <p:cNvSpPr txBox="1"/>
           <p:nvPr/>
         </p:nvSpPr>
         <p:spPr>
           <a:xfrm>
-            <a:off x="548640" y="3547872"/>
-            <a:ext cx="10972800" cy="658368"/>
+            <a:off x="5029200" y="2724912"/>
+            <a:ext cx="2103120" cy="594360"/>
           </a:xfrm>
           <a:prstGeom prst="rect">
             <a:avLst/>
@@ -3613,28 +4762,74 @@
           </a:bodyPr>
           <a:lstStyle/>
           <a:p>
-            <a:pPr algn="l"/>
-            <a:r>
-              <a:rPr sz="1700" b="0" i="0">
+            <a:pPr algn="ctr"/>
+            <a:r>
+              <a:rPr sz="1300" b="1" i="0">
                 <a:solidFill>
                   <a:srgbClr val="FFFFFF"/>
                 </a:solidFill>
               </a:rPr>
-              <a:t>•   Checked whether results are stable (sensitivity analysis)</a:t>
-            </a:r>
-          </a:p>
-        </p:txBody>
-      </p:sp>
-      <p:sp>
-        <p:nvSpPr>
-          <p:cNvPr id="10" name="TextBox 9"/>
+              <a:t>Road Class
+Comparison</a:t>
+            </a:r>
+          </a:p>
+        </p:txBody>
+      </p:sp>
+      <p:sp>
+        <p:nvSpPr>
+          <p:cNvPr id="14" name="Rounded Rectangle 13"/>
+          <p:cNvSpPr/>
+          <p:nvPr/>
+        </p:nvSpPr>
+        <p:spPr>
+          <a:xfrm>
+            <a:off x="7360919" y="1371600"/>
+            <a:ext cx="2103120" cy="2011680"/>
+          </a:xfrm>
+          <a:prstGeom prst="roundRect">
+            <a:avLst>
+              <a:gd name="adj" fmla="val 8000"/>
+            </a:avLst>
+          </a:prstGeom>
+          <a:solidFill>
+            <a:srgbClr val="1B4F8A"/>
+          </a:solidFill>
+          <a:ln>
+            <a:noFill/>
+          </a:ln>
+        </p:spPr>
+        <p:style>
+          <a:lnRef idx="1">
+            <a:schemeClr val="accent1"/>
+          </a:lnRef>
+          <a:fillRef idx="3">
+            <a:schemeClr val="accent1"/>
+          </a:fillRef>
+          <a:effectRef idx="2">
+            <a:schemeClr val="accent1"/>
+          </a:effectRef>
+          <a:fontRef idx="minor">
+            <a:schemeClr val="lt1"/>
+          </a:fontRef>
+        </p:style>
+        <p:txBody>
+          <a:bodyPr rtlCol="0" anchor="ctr"/>
+          <a:lstStyle/>
+          <a:p>
+            <a:pPr algn="ctr"/>
+          </a:p>
+        </p:txBody>
+      </p:sp>
+      <p:sp>
+        <p:nvSpPr>
+          <p:cNvPr id="15" name="TextBox 14"/>
           <p:cNvSpPr txBox="1"/>
           <p:nvPr/>
         </p:nvSpPr>
         <p:spPr>
           <a:xfrm>
-            <a:off x="548640" y="5760720"/>
-            <a:ext cx="10972800" cy="731520"/>
+            <a:off x="7360919" y="1572768"/>
+            <a:ext cx="2103120" cy="822960"/>
           </a:xfrm>
           <a:prstGeom prst="rect">
             <a:avLst/>
@@ -3647,18 +4842,342 @@
           </a:bodyPr>
           <a:lstStyle/>
           <a:p>
-            <a:pPr algn="l"/>
-            <a:r>
-              <a:rPr sz="1400" b="0" i="1">
-                <a:solidFill>
-                  <a:srgbClr val="FFD166"/>
+            <a:pPr algn="ctr"/>
+            <a:r>
+              <a:rPr sz="3600" b="0" i="0">
+                <a:solidFill>
+                  <a:srgbClr val="FFFFFF"/>
                 </a:solidFill>
               </a:rPr>
-              <a:t>Core question: do road segments that look similar from satellite also have similar traffic volumes?</a:t>
-            </a:r>
-          </a:p>
-        </p:txBody>
-      </p:sp>
+              <a:t>🔍</a:t>
+            </a:r>
+          </a:p>
+        </p:txBody>
+      </p:sp>
+      <p:sp>
+        <p:nvSpPr>
+          <p:cNvPr id="16" name="TextBox 15"/>
+          <p:cNvSpPr txBox="1"/>
+          <p:nvPr/>
+        </p:nvSpPr>
+        <p:spPr>
+          <a:xfrm>
+            <a:off x="7360919" y="2724912"/>
+            <a:ext cx="2103120" cy="594360"/>
+          </a:xfrm>
+          <a:prstGeom prst="rect">
+            <a:avLst/>
+          </a:prstGeom>
+          <a:noFill/>
+        </p:spPr>
+        <p:txBody>
+          <a:bodyPr wrap="square">
+            <a:spAutoFit/>
+          </a:bodyPr>
+          <a:lstStyle/>
+          <a:p>
+            <a:pPr algn="ctr"/>
+            <a:r>
+              <a:rPr sz="1300" b="1" i="0">
+                <a:solidFill>
+                  <a:srgbClr val="FFFFFF"/>
+                </a:solidFill>
+              </a:rPr>
+              <a:t>Optimal k
+Sweep</a:t>
+            </a:r>
+          </a:p>
+        </p:txBody>
+      </p:sp>
+      <p:sp>
+        <p:nvSpPr>
+          <p:cNvPr id="17" name="Rounded Rectangle 16"/>
+          <p:cNvSpPr/>
+          <p:nvPr/>
+        </p:nvSpPr>
+        <p:spPr>
+          <a:xfrm>
+            <a:off x="9692640" y="1371600"/>
+            <a:ext cx="2103120" cy="2011680"/>
+          </a:xfrm>
+          <a:prstGeom prst="roundRect">
+            <a:avLst>
+              <a:gd name="adj" fmla="val 8000"/>
+            </a:avLst>
+          </a:prstGeom>
+          <a:solidFill>
+            <a:srgbClr val="1B4F8A"/>
+          </a:solidFill>
+          <a:ln>
+            <a:noFill/>
+          </a:ln>
+        </p:spPr>
+        <p:style>
+          <a:lnRef idx="1">
+            <a:schemeClr val="accent1"/>
+          </a:lnRef>
+          <a:fillRef idx="3">
+            <a:schemeClr val="accent1"/>
+          </a:fillRef>
+          <a:effectRef idx="2">
+            <a:schemeClr val="accent1"/>
+          </a:effectRef>
+          <a:fontRef idx="minor">
+            <a:schemeClr val="lt1"/>
+          </a:fontRef>
+        </p:style>
+        <p:txBody>
+          <a:bodyPr rtlCol="0" anchor="ctr"/>
+          <a:lstStyle/>
+          <a:p>
+            <a:pPr algn="ctr"/>
+          </a:p>
+        </p:txBody>
+      </p:sp>
+      <p:sp>
+        <p:nvSpPr>
+          <p:cNvPr id="18" name="TextBox 17"/>
+          <p:cNvSpPr txBox="1"/>
+          <p:nvPr/>
+        </p:nvSpPr>
+        <p:spPr>
+          <a:xfrm>
+            <a:off x="9692640" y="1572768"/>
+            <a:ext cx="2103120" cy="822960"/>
+          </a:xfrm>
+          <a:prstGeom prst="rect">
+            <a:avLst/>
+          </a:prstGeom>
+          <a:noFill/>
+        </p:spPr>
+        <p:txBody>
+          <a:bodyPr wrap="square">
+            <a:spAutoFit/>
+          </a:bodyPr>
+          <a:lstStyle/>
+          <a:p>
+            <a:pPr algn="ctr"/>
+            <a:r>
+              <a:rPr sz="3600" b="0" i="0">
+                <a:solidFill>
+                  <a:srgbClr val="FFFFFF"/>
+                </a:solidFill>
+              </a:rPr>
+              <a:t>✅</a:t>
+            </a:r>
+          </a:p>
+        </p:txBody>
+      </p:sp>
+      <p:sp>
+        <p:nvSpPr>
+          <p:cNvPr id="19" name="TextBox 18"/>
+          <p:cNvSpPr txBox="1"/>
+          <p:nvPr/>
+        </p:nvSpPr>
+        <p:spPr>
+          <a:xfrm>
+            <a:off x="9692640" y="2724912"/>
+            <a:ext cx="2103120" cy="594360"/>
+          </a:xfrm>
+          <a:prstGeom prst="rect">
+            <a:avLst/>
+          </a:prstGeom>
+          <a:noFill/>
+        </p:spPr>
+        <p:txBody>
+          <a:bodyPr wrap="square">
+            <a:spAutoFit/>
+          </a:bodyPr>
+          <a:lstStyle/>
+          <a:p>
+            <a:pPr algn="ctr"/>
+            <a:r>
+              <a:rPr sz="1300" b="1" i="0">
+                <a:solidFill>
+                  <a:srgbClr val="FFFFFF"/>
+                </a:solidFill>
+              </a:rPr>
+              <a:t>Stability
+Checked</a:t>
+            </a:r>
+          </a:p>
+        </p:txBody>
+      </p:sp>
+      <p:sp>
+        <p:nvSpPr>
+          <p:cNvPr id="20" name="Rounded Rectangle 19"/>
+          <p:cNvSpPr/>
+          <p:nvPr/>
+        </p:nvSpPr>
+        <p:spPr>
+          <a:xfrm>
+            <a:off x="365760" y="3749039"/>
+            <a:ext cx="11457432" cy="914400"/>
+          </a:xfrm>
+          <a:prstGeom prst="roundRect">
+            <a:avLst>
+              <a:gd name="adj" fmla="val 8000"/>
+            </a:avLst>
+          </a:prstGeom>
+          <a:solidFill>
+            <a:srgbClr val="2C3E55"/>
+          </a:solidFill>
+          <a:ln>
+            <a:noFill/>
+          </a:ln>
+        </p:spPr>
+        <p:style>
+          <a:lnRef idx="1">
+            <a:schemeClr val="accent1"/>
+          </a:lnRef>
+          <a:fillRef idx="3">
+            <a:schemeClr val="accent1"/>
+          </a:fillRef>
+          <a:effectRef idx="2">
+            <a:schemeClr val="accent1"/>
+          </a:effectRef>
+          <a:fontRef idx="minor">
+            <a:schemeClr val="lt1"/>
+          </a:fontRef>
+        </p:style>
+        <p:txBody>
+          <a:bodyPr rtlCol="0" anchor="ctr"/>
+          <a:lstStyle/>
+          <a:p>
+            <a:pPr algn="ctr"/>
+          </a:p>
+        </p:txBody>
+      </p:sp>
+      <p:sp>
+        <p:nvSpPr>
+          <p:cNvPr id="21" name="TextBox 20"/>
+          <p:cNvSpPr txBox="1"/>
+          <p:nvPr/>
+        </p:nvSpPr>
+        <p:spPr>
+          <a:xfrm>
+            <a:off x="502920" y="3840480"/>
+            <a:ext cx="11155680" cy="731520"/>
+          </a:xfrm>
+          <a:prstGeom prst="rect">
+            <a:avLst/>
+          </a:prstGeom>
+          <a:noFill/>
+        </p:spPr>
+        <p:txBody>
+          <a:bodyPr wrap="square">
+            <a:spAutoFit/>
+          </a:bodyPr>
+          <a:lstStyle/>
+          <a:p>
+            <a:pPr algn="ctr"/>
+            <a:r>
+              <a:rPr sz="1800" b="1" i="0">
+                <a:solidFill>
+                  <a:srgbClr val="FFCA3A"/>
+                </a:solidFill>
+              </a:rPr>
+              <a:t>Do road segments that look similar from above also carry similar traffic volumes?</a:t>
+            </a:r>
+          </a:p>
+        </p:txBody>
+      </p:sp>
+      <p:pic>
+        <p:nvPicPr>
+          <p:cNvPr id="22" name="Picture 21" descr="03_umap_kmeans_clusters.png"/>
+          <p:cNvPicPr>
+            <a:picLocks noChangeAspect="1"/>
+          </p:cNvPicPr>
+          <p:nvPr/>
+        </p:nvPicPr>
+        <p:blipFill>
+          <a:blip r:embed="rId2"/>
+          <a:stretch>
+            <a:fillRect/>
+          </a:stretch>
+        </p:blipFill>
+        <p:spPr>
+          <a:xfrm>
+            <a:off x="365760" y="4846320"/>
+            <a:ext cx="2926080" cy="1828800"/>
+          </a:xfrm>
+          <a:prstGeom prst="rect">
+            <a:avLst/>
+          </a:prstGeom>
+        </p:spPr>
+      </p:pic>
+      <p:pic>
+        <p:nvPicPr>
+          <p:cNvPr id="23" name="Picture 22" descr="04_umap_aawdt.png"/>
+          <p:cNvPicPr>
+            <a:picLocks noChangeAspect="1"/>
+          </p:cNvPicPr>
+          <p:nvPr/>
+        </p:nvPicPr>
+        <p:blipFill>
+          <a:blip r:embed="rId3"/>
+          <a:stretch>
+            <a:fillRect/>
+          </a:stretch>
+        </p:blipFill>
+        <p:spPr>
+          <a:xfrm>
+            <a:off x="3474720" y="4846320"/>
+            <a:ext cx="2926080" cy="1828800"/>
+          </a:xfrm>
+          <a:prstGeom prst="rect">
+            <a:avLst/>
+          </a:prstGeom>
+        </p:spPr>
+      </p:pic>
+      <p:pic>
+        <p:nvPicPr>
+          <p:cNvPr id="24" name="Picture 23" descr="10_bar_roadclass.png"/>
+          <p:cNvPicPr>
+            <a:picLocks noChangeAspect="1"/>
+          </p:cNvPicPr>
+          <p:nvPr/>
+        </p:nvPicPr>
+        <p:blipFill>
+          <a:blip r:embed="rId4"/>
+          <a:stretch>
+            <a:fillRect/>
+          </a:stretch>
+        </p:blipFill>
+        <p:spPr>
+          <a:xfrm>
+            <a:off x="6583680" y="4846320"/>
+            <a:ext cx="2743200" cy="1828800"/>
+          </a:xfrm>
+          <a:prstGeom prst="rect">
+            <a:avLst/>
+          </a:prstGeom>
+        </p:spPr>
+      </p:pic>
+      <p:pic>
+        <p:nvPicPr>
+          <p:cNvPr id="25" name="Picture 24" descr="11_r2_heatmap.png"/>
+          <p:cNvPicPr>
+            <a:picLocks noChangeAspect="1"/>
+          </p:cNvPicPr>
+          <p:nvPr/>
+        </p:nvPicPr>
+        <p:blipFill>
+          <a:blip r:embed="rId5"/>
+          <a:stretch>
+            <a:fillRect/>
+          </a:stretch>
+        </p:blipFill>
+        <p:spPr>
+          <a:xfrm>
+            <a:off x="9464040" y="4846320"/>
+            <a:ext cx="2606040" cy="1828800"/>
+          </a:xfrm>
+          <a:prstGeom prst="rect">
+            <a:avLst/>
+          </a:prstGeom>
+        </p:spPr>
+      </p:pic>
     </p:spTree>
   </p:cSld>
   <p:clrMapOvr>
@@ -3692,7 +5211,7 @@
             <a:avLst/>
           </a:prstGeom>
           <a:solidFill>
-            <a:srgbClr val="1A1A2E"/>
+            <a:srgbClr val="0D1B2A"/>
           </a:solidFill>
           <a:ln>
             <a:noFill/>
@@ -3722,20 +5241,54 @@
       </p:sp>
       <p:sp>
         <p:nvSpPr>
-          <p:cNvPr id="3" name="Rectangle 2"/>
+          <p:cNvPr id="3" name="TextBox 2"/>
+          <p:cNvSpPr txBox="1"/>
+          <p:nvPr/>
+        </p:nvSpPr>
+        <p:spPr>
+          <a:xfrm>
+            <a:off x="502920" y="164592"/>
+            <a:ext cx="10972800" cy="804672"/>
+          </a:xfrm>
+          <a:prstGeom prst="rect">
+            <a:avLst/>
+          </a:prstGeom>
+          <a:noFill/>
+        </p:spPr>
+        <p:txBody>
+          <a:bodyPr wrap="square">
+            <a:spAutoFit/>
+          </a:bodyPr>
+          <a:lstStyle/>
+          <a:p>
+            <a:pPr algn="l"/>
+            <a:r>
+              <a:rPr sz="2800" b="1" i="0">
+                <a:solidFill>
+                  <a:srgbClr val="FFFFFF"/>
+                </a:solidFill>
+              </a:rPr>
+              <a:t>The Approach</a:t>
+            </a:r>
+          </a:p>
+        </p:txBody>
+      </p:sp>
+      <p:sp>
+        <p:nvSpPr>
+          <p:cNvPr id="4" name="Rectangle 3"/>
           <p:cNvSpPr/>
           <p:nvPr/>
         </p:nvSpPr>
         <p:spPr>
           <a:xfrm>
-            <a:off x="0" y="1005840"/>
+            <a:off x="0" y="1024128"/>
             <a:ext cx="12188952" cy="45720"/>
           </a:xfrm>
           <a:prstGeom prst="rect">
             <a:avLst/>
           </a:prstGeom>
           <a:solidFill>
-            <a:srgbClr val="00B4D8"/>
+            <a:srgbClr val="00C2E0"/>
           </a:solidFill>
           <a:ln>
             <a:noFill/>
@@ -3765,54 +5318,22 @@
       </p:sp>
       <p:sp>
         <p:nvSpPr>
-          <p:cNvPr id="4" name="TextBox 3"/>
-          <p:cNvSpPr txBox="1"/>
-          <p:nvPr/>
-        </p:nvSpPr>
-        <p:spPr>
-          <a:xfrm>
-            <a:off x="457200" y="137160"/>
-            <a:ext cx="11430000" cy="868680"/>
-          </a:xfrm>
-          <a:prstGeom prst="rect">
-            <a:avLst/>
-          </a:prstGeom>
-          <a:noFill/>
-        </p:spPr>
-        <p:txBody>
-          <a:bodyPr wrap="square">
-            <a:spAutoFit/>
-          </a:bodyPr>
-          <a:lstStyle/>
-          <a:p>
-            <a:pPr algn="l"/>
-            <a:r>
-              <a:rPr sz="3000" b="1" i="0">
-                <a:solidFill>
-                  <a:srgbClr val="FFFFFF"/>
-                </a:solidFill>
-              </a:rPr>
-              <a:t>How It Works  (Plain Language)</a:t>
-            </a:r>
-          </a:p>
-        </p:txBody>
-      </p:sp>
-      <p:sp>
-        <p:nvSpPr>
-          <p:cNvPr id="5" name="Rectangle 4"/>
+          <p:cNvPr id="5" name="Rounded Rectangle 4"/>
           <p:cNvSpPr/>
           <p:nvPr/>
         </p:nvSpPr>
         <p:spPr>
           <a:xfrm>
-            <a:off x="457200" y="1234440"/>
-            <a:ext cx="502920" cy="1097280"/>
-          </a:xfrm>
-          <a:prstGeom prst="rect">
-            <a:avLst/>
+            <a:off x="411480" y="1371600"/>
+            <a:ext cx="2286000" cy="2926080"/>
+          </a:xfrm>
+          <a:prstGeom prst="roundRect">
+            <a:avLst>
+              <a:gd name="adj" fmla="val 8000"/>
+            </a:avLst>
           </a:prstGeom>
           <a:solidFill>
-            <a:srgbClr val="00B4D8"/>
+            <a:srgbClr val="1B4F8A"/>
           </a:solidFill>
           <a:ln>
             <a:noFill/>
@@ -3842,54 +5363,22 @@
       </p:sp>
       <p:sp>
         <p:nvSpPr>
-          <p:cNvPr id="6" name="TextBox 5"/>
-          <p:cNvSpPr txBox="1"/>
-          <p:nvPr/>
-        </p:nvSpPr>
-        <p:spPr>
-          <a:xfrm>
-            <a:off x="457200" y="1508760"/>
-            <a:ext cx="502920" cy="548640"/>
-          </a:xfrm>
-          <a:prstGeom prst="rect">
-            <a:avLst/>
-          </a:prstGeom>
-          <a:noFill/>
-        </p:spPr>
-        <p:txBody>
-          <a:bodyPr wrap="square">
-            <a:spAutoFit/>
-          </a:bodyPr>
-          <a:lstStyle/>
-          <a:p>
-            <a:pPr algn="ctr"/>
-            <a:r>
-              <a:rPr sz="2200" b="1" i="0">
-                <a:solidFill>
-                  <a:srgbClr val="1A1A2E"/>
-                </a:solidFill>
-              </a:rPr>
-              <a:t>1</a:t>
-            </a:r>
-          </a:p>
-        </p:txBody>
-      </p:sp>
-      <p:sp>
-        <p:nvSpPr>
-          <p:cNvPr id="7" name="Rectangle 6"/>
+          <p:cNvPr id="6" name="Rounded Rectangle 5"/>
           <p:cNvSpPr/>
           <p:nvPr/>
         </p:nvSpPr>
         <p:spPr>
           <a:xfrm>
-            <a:off x="1051560" y="1234440"/>
-            <a:ext cx="10515600" cy="1097280"/>
-          </a:xfrm>
-          <a:prstGeom prst="rect">
-            <a:avLst/>
+            <a:off x="1325880" y="1234440"/>
+            <a:ext cx="457200" cy="457200"/>
+          </a:xfrm>
+          <a:prstGeom prst="roundRect">
+            <a:avLst>
+              <a:gd name="adj" fmla="val 8000"/>
+            </a:avLst>
           </a:prstGeom>
           <a:solidFill>
-            <a:srgbClr val="0F3C78"/>
+            <a:srgbClr val="00C2E0"/>
           </a:solidFill>
           <a:ln>
             <a:noFill/>
@@ -3919,14 +5408,14 @@
       </p:sp>
       <p:sp>
         <p:nvSpPr>
-          <p:cNvPr id="8" name="TextBox 7"/>
+          <p:cNvPr id="7" name="TextBox 6"/>
           <p:cNvSpPr txBox="1"/>
           <p:nvPr/>
         </p:nvSpPr>
         <p:spPr>
           <a:xfrm>
-            <a:off x="1188720" y="1280160"/>
-            <a:ext cx="10241280" cy="411480"/>
+            <a:off x="1325880" y="1234440"/>
+            <a:ext cx="457200" cy="457200"/>
           </a:xfrm>
           <a:prstGeom prst="rect">
             <a:avLst/>
@@ -3939,28 +5428,28 @@
           </a:bodyPr>
           <a:lstStyle/>
           <a:p>
-            <a:pPr algn="l"/>
-            <a:r>
-              <a:rPr sz="1500" b="1" i="0">
-                <a:solidFill>
-                  <a:srgbClr val="00B4D8"/>
+            <a:pPr algn="ctr"/>
+            <a:r>
+              <a:rPr sz="1400" b="1" i="0">
+                <a:solidFill>
+                  <a:srgbClr val="0D1B2A"/>
                 </a:solidFill>
               </a:rPr>
-              <a:t>Satellite image → 512 numbers</a:t>
-            </a:r>
-          </a:p>
-        </p:txBody>
-      </p:sp>
-      <p:sp>
-        <p:nvSpPr>
-          <p:cNvPr id="9" name="TextBox 8"/>
+              <a:t>1</a:t>
+            </a:r>
+          </a:p>
+        </p:txBody>
+      </p:sp>
+      <p:sp>
+        <p:nvSpPr>
+          <p:cNvPr id="8" name="TextBox 7"/>
           <p:cNvSpPr txBox="1"/>
           <p:nvPr/>
         </p:nvSpPr>
         <p:spPr>
           <a:xfrm>
-            <a:off x="1188720" y="1691640"/>
-            <a:ext cx="10241280" cy="594360"/>
+            <a:off x="411480" y="1508760"/>
+            <a:ext cx="2286000" cy="1005840"/>
           </a:xfrm>
           <a:prstGeom prst="rect">
             <a:avLst/>
@@ -3973,15 +5462,49 @@
           </a:bodyPr>
           <a:lstStyle/>
           <a:p>
-            <a:pPr algn="l"/>
-            <a:r>
-              <a:rPr sz="1300" b="0" i="0">
+            <a:pPr algn="ctr"/>
+            <a:r>
+              <a:rPr sz="4600" b="0" i="0">
                 <a:solidFill>
                   <a:srgbClr val="FFFFFF"/>
                 </a:solidFill>
               </a:rPr>
-              <a:t>A pre-trained AI model converts each road's satellite image into a list of 512 numbers
-that capture what the road and its surroundings look like.</a:t>
+              <a:t>🛰️</a:t>
+            </a:r>
+          </a:p>
+        </p:txBody>
+      </p:sp>
+      <p:sp>
+        <p:nvSpPr>
+          <p:cNvPr id="9" name="TextBox 8"/>
+          <p:cNvSpPr txBox="1"/>
+          <p:nvPr/>
+        </p:nvSpPr>
+        <p:spPr>
+          <a:xfrm>
+            <a:off x="411480" y="2514600"/>
+            <a:ext cx="2286000" cy="777240"/>
+          </a:xfrm>
+          <a:prstGeom prst="rect">
+            <a:avLst/>
+          </a:prstGeom>
+          <a:noFill/>
+        </p:spPr>
+        <p:txBody>
+          <a:bodyPr wrap="square">
+            <a:spAutoFit/>
+          </a:bodyPr>
+          <a:lstStyle/>
+          <a:p>
+            <a:pPr algn="ctr"/>
+            <a:r>
+              <a:rPr sz="1600" b="1" i="0">
+                <a:solidFill>
+                  <a:srgbClr val="FFFFFF"/>
+                </a:solidFill>
+              </a:rPr>
+              <a:t>Satellite
+Image</a:t>
             </a:r>
           </a:p>
         </p:txBody>
@@ -3994,14 +5517,14 @@
         </p:nvSpPr>
         <p:spPr>
           <a:xfrm>
-            <a:off x="457200" y="2560320"/>
-            <a:ext cx="502920" cy="1097280"/>
+            <a:off x="594360" y="3291840"/>
+            <a:ext cx="1920240" cy="36576"/>
           </a:xfrm>
           <a:prstGeom prst="rect">
             <a:avLst/>
           </a:prstGeom>
           <a:solidFill>
-            <a:srgbClr val="00B4D8"/>
+            <a:srgbClr val="00C2E0"/>
           </a:solidFill>
           <a:ln>
             <a:noFill/>
@@ -4037,8 +5560,8 @@
         </p:nvSpPr>
         <p:spPr>
           <a:xfrm>
-            <a:off x="457200" y="2834639"/>
-            <a:ext cx="502920" cy="548640"/>
+            <a:off x="411480" y="3364992"/>
+            <a:ext cx="2286000" cy="777240"/>
           </a:xfrm>
           <a:prstGeom prst="rect">
             <a:avLst/>
@@ -4053,32 +5576,69 @@
           <a:p>
             <a:pPr algn="ctr"/>
             <a:r>
-              <a:rPr sz="2200" b="1" i="0">
-                <a:solidFill>
-                  <a:srgbClr val="1A1A2E"/>
+              <a:rPr sz="1300" b="0" i="0">
+                <a:solidFill>
+                  <a:srgbClr val="B8D8F0"/>
                 </a:solidFill>
               </a:rPr>
-              <a:t>2</a:t>
-            </a:r>
-          </a:p>
-        </p:txBody>
-      </p:sp>
-      <p:sp>
-        <p:nvSpPr>
-          <p:cNvPr id="12" name="Rectangle 11"/>
+              <a:t>512 numbers
+per road</a:t>
+            </a:r>
+          </a:p>
+        </p:txBody>
+      </p:sp>
+      <p:sp>
+        <p:nvSpPr>
+          <p:cNvPr id="12" name="TextBox 11"/>
+          <p:cNvSpPr txBox="1"/>
+          <p:nvPr/>
+        </p:nvSpPr>
+        <p:spPr>
+          <a:xfrm>
+            <a:off x="2770632" y="2377440"/>
+            <a:ext cx="384048" cy="640080"/>
+          </a:xfrm>
+          <a:prstGeom prst="rect">
+            <a:avLst/>
+          </a:prstGeom>
+          <a:noFill/>
+        </p:spPr>
+        <p:txBody>
+          <a:bodyPr wrap="square">
+            <a:spAutoFit/>
+          </a:bodyPr>
+          <a:lstStyle/>
+          <a:p>
+            <a:pPr algn="ctr"/>
+            <a:r>
+              <a:rPr sz="2800" b="0" i="0">
+                <a:solidFill>
+                  <a:srgbClr val="00C2E0"/>
+                </a:solidFill>
+              </a:rPr>
+              <a:t>➔</a:t>
+            </a:r>
+          </a:p>
+        </p:txBody>
+      </p:sp>
+      <p:sp>
+        <p:nvSpPr>
+          <p:cNvPr id="13" name="Rounded Rectangle 12"/>
           <p:cNvSpPr/>
           <p:nvPr/>
         </p:nvSpPr>
         <p:spPr>
           <a:xfrm>
-            <a:off x="1051560" y="2560320"/>
-            <a:ext cx="10515600" cy="1097280"/>
-          </a:xfrm>
-          <a:prstGeom prst="rect">
-            <a:avLst/>
+            <a:off x="3154680" y="1371600"/>
+            <a:ext cx="2286000" cy="2926080"/>
+          </a:xfrm>
+          <a:prstGeom prst="roundRect">
+            <a:avLst>
+              <a:gd name="adj" fmla="val 8000"/>
+            </a:avLst>
           </a:prstGeom>
           <a:solidFill>
-            <a:srgbClr val="0F3C78"/>
+            <a:srgbClr val="1B4F8A"/>
           </a:solidFill>
           <a:ln>
             <a:noFill/>
@@ -4108,89 +5668,22 @@
       </p:sp>
       <p:sp>
         <p:nvSpPr>
-          <p:cNvPr id="13" name="TextBox 12"/>
-          <p:cNvSpPr txBox="1"/>
-          <p:nvPr/>
-        </p:nvSpPr>
-        <p:spPr>
-          <a:xfrm>
-            <a:off x="1188720" y="2606039"/>
-            <a:ext cx="10241280" cy="411480"/>
-          </a:xfrm>
-          <a:prstGeom prst="rect">
-            <a:avLst/>
-          </a:prstGeom>
-          <a:noFill/>
-        </p:spPr>
-        <p:txBody>
-          <a:bodyPr wrap="square">
-            <a:spAutoFit/>
-          </a:bodyPr>
-          <a:lstStyle/>
-          <a:p>
-            <a:pPr algn="l"/>
-            <a:r>
-              <a:rPr sz="1500" b="1" i="0">
-                <a:solidFill>
-                  <a:srgbClr val="00B4D8"/>
-                </a:solidFill>
-              </a:rPr>
-              <a:t>Reduce to 20 dimensions (UMAP)</a:t>
-            </a:r>
-          </a:p>
-        </p:txBody>
-      </p:sp>
-      <p:sp>
-        <p:nvSpPr>
-          <p:cNvPr id="14" name="TextBox 13"/>
-          <p:cNvSpPr txBox="1"/>
-          <p:nvPr/>
-        </p:nvSpPr>
-        <p:spPr>
-          <a:xfrm>
-            <a:off x="1188720" y="3017520"/>
-            <a:ext cx="10241280" cy="594360"/>
-          </a:xfrm>
-          <a:prstGeom prst="rect">
-            <a:avLst/>
-          </a:prstGeom>
-          <a:noFill/>
-        </p:spPr>
-        <p:txBody>
-          <a:bodyPr wrap="square">
-            <a:spAutoFit/>
-          </a:bodyPr>
-          <a:lstStyle/>
-          <a:p>
-            <a:pPr algn="l"/>
-            <a:r>
-              <a:rPr sz="1300" b="0" i="0">
-                <a:solidFill>
-                  <a:srgbClr val="FFFFFF"/>
-                </a:solidFill>
-              </a:rPr>
-              <a:t>512 numbers is too many to cluster directly — distances become meaningless.
-UMAP compresses them to 20 while preserving which roads look similar.</a:t>
-            </a:r>
-          </a:p>
-        </p:txBody>
-      </p:sp>
-      <p:sp>
-        <p:nvSpPr>
-          <p:cNvPr id="15" name="Rectangle 14"/>
+          <p:cNvPr id="14" name="Rounded Rectangle 13"/>
           <p:cNvSpPr/>
           <p:nvPr/>
         </p:nvSpPr>
         <p:spPr>
           <a:xfrm>
-            <a:off x="457200" y="3886200"/>
-            <a:ext cx="502920" cy="1097280"/>
-          </a:xfrm>
-          <a:prstGeom prst="rect">
-            <a:avLst/>
+            <a:off x="4069080" y="1234440"/>
+            <a:ext cx="457200" cy="457200"/>
+          </a:xfrm>
+          <a:prstGeom prst="roundRect">
+            <a:avLst>
+              <a:gd name="adj" fmla="val 8000"/>
+            </a:avLst>
           </a:prstGeom>
           <a:solidFill>
-            <a:srgbClr val="00B4D8"/>
+            <a:srgbClr val="00C2E0"/>
           </a:solidFill>
           <a:ln>
             <a:noFill/>
@@ -4220,14 +5713,14 @@
       </p:sp>
       <p:sp>
         <p:nvSpPr>
-          <p:cNvPr id="16" name="TextBox 15"/>
+          <p:cNvPr id="15" name="TextBox 14"/>
           <p:cNvSpPr txBox="1"/>
           <p:nvPr/>
         </p:nvSpPr>
         <p:spPr>
           <a:xfrm>
-            <a:off x="457200" y="4160520"/>
-            <a:ext cx="502920" cy="548640"/>
+            <a:off x="4069080" y="1234440"/>
+            <a:ext cx="457200" cy="457200"/>
           </a:xfrm>
           <a:prstGeom prst="rect">
             <a:avLst/>
@@ -4242,32 +5735,101 @@
           <a:p>
             <a:pPr algn="ctr"/>
             <a:r>
-              <a:rPr sz="2200" b="1" i="0">
-                <a:solidFill>
-                  <a:srgbClr val="1A1A2E"/>
+              <a:rPr sz="1400" b="1" i="0">
+                <a:solidFill>
+                  <a:srgbClr val="0D1B2A"/>
                 </a:solidFill>
               </a:rPr>
-              <a:t>3</a:t>
-            </a:r>
-          </a:p>
-        </p:txBody>
-      </p:sp>
-      <p:sp>
-        <p:nvSpPr>
-          <p:cNvPr id="17" name="Rectangle 16"/>
+              <a:t>2</a:t>
+            </a:r>
+          </a:p>
+        </p:txBody>
+      </p:sp>
+      <p:sp>
+        <p:nvSpPr>
+          <p:cNvPr id="16" name="TextBox 15"/>
+          <p:cNvSpPr txBox="1"/>
+          <p:nvPr/>
+        </p:nvSpPr>
+        <p:spPr>
+          <a:xfrm>
+            <a:off x="3154680" y="1508760"/>
+            <a:ext cx="2286000" cy="1005840"/>
+          </a:xfrm>
+          <a:prstGeom prst="rect">
+            <a:avLst/>
+          </a:prstGeom>
+          <a:noFill/>
+        </p:spPr>
+        <p:txBody>
+          <a:bodyPr wrap="square">
+            <a:spAutoFit/>
+          </a:bodyPr>
+          <a:lstStyle/>
+          <a:p>
+            <a:pPr algn="ctr"/>
+            <a:r>
+              <a:rPr sz="4600" b="0" i="0">
+                <a:solidFill>
+                  <a:srgbClr val="FFFFFF"/>
+                </a:solidFill>
+              </a:rPr>
+              <a:t>📐</a:t>
+            </a:r>
+          </a:p>
+        </p:txBody>
+      </p:sp>
+      <p:sp>
+        <p:nvSpPr>
+          <p:cNvPr id="17" name="TextBox 16"/>
+          <p:cNvSpPr txBox="1"/>
+          <p:nvPr/>
+        </p:nvSpPr>
+        <p:spPr>
+          <a:xfrm>
+            <a:off x="3154680" y="2514600"/>
+            <a:ext cx="2286000" cy="777240"/>
+          </a:xfrm>
+          <a:prstGeom prst="rect">
+            <a:avLst/>
+          </a:prstGeom>
+          <a:noFill/>
+        </p:spPr>
+        <p:txBody>
+          <a:bodyPr wrap="square">
+            <a:spAutoFit/>
+          </a:bodyPr>
+          <a:lstStyle/>
+          <a:p>
+            <a:pPr algn="ctr"/>
+            <a:r>
+              <a:rPr sz="1600" b="1" i="0">
+                <a:solidFill>
+                  <a:srgbClr val="FFFFFF"/>
+                </a:solidFill>
+              </a:rPr>
+              <a:t>Compress
+(UMAP)</a:t>
+            </a:r>
+          </a:p>
+        </p:txBody>
+      </p:sp>
+      <p:sp>
+        <p:nvSpPr>
+          <p:cNvPr id="18" name="Rectangle 17"/>
           <p:cNvSpPr/>
           <p:nvPr/>
         </p:nvSpPr>
         <p:spPr>
           <a:xfrm>
-            <a:off x="1051560" y="3886200"/>
-            <a:ext cx="10515600" cy="1097280"/>
+            <a:off x="3337560" y="3291840"/>
+            <a:ext cx="1920240" cy="36576"/>
           </a:xfrm>
           <a:prstGeom prst="rect">
             <a:avLst/>
           </a:prstGeom>
           <a:solidFill>
-            <a:srgbClr val="0F3C78"/>
+            <a:srgbClr val="00C2E0"/>
           </a:solidFill>
           <a:ln>
             <a:noFill/>
@@ -4297,14 +5859,14 @@
       </p:sp>
       <p:sp>
         <p:nvSpPr>
-          <p:cNvPr id="18" name="TextBox 17"/>
+          <p:cNvPr id="19" name="TextBox 18"/>
           <p:cNvSpPr txBox="1"/>
           <p:nvPr/>
         </p:nvSpPr>
         <p:spPr>
           <a:xfrm>
-            <a:off x="1188720" y="3931920"/>
-            <a:ext cx="10241280" cy="411480"/>
+            <a:off x="3154680" y="3364992"/>
+            <a:ext cx="2286000" cy="777240"/>
           </a:xfrm>
           <a:prstGeom prst="rect">
             <a:avLst/>
@@ -4317,28 +5879,29 @@
           </a:bodyPr>
           <a:lstStyle/>
           <a:p>
-            <a:pPr algn="l"/>
-            <a:r>
-              <a:rPr sz="1500" b="1" i="0">
-                <a:solidFill>
-                  <a:srgbClr val="00B4D8"/>
+            <a:pPr algn="ctr"/>
+            <a:r>
+              <a:rPr sz="1300" b="0" i="0">
+                <a:solidFill>
+                  <a:srgbClr val="B8D8F0"/>
                 </a:solidFill>
               </a:rPr>
-              <a:t>Group similar roads  (Clustering)</a:t>
-            </a:r>
-          </a:p>
-        </p:txBody>
-      </p:sp>
-      <p:sp>
-        <p:nvSpPr>
-          <p:cNvPr id="19" name="TextBox 18"/>
+              <a:t>512 → 20
+dimensions</a:t>
+            </a:r>
+          </a:p>
+        </p:txBody>
+      </p:sp>
+      <p:sp>
+        <p:nvSpPr>
+          <p:cNvPr id="20" name="TextBox 19"/>
           <p:cNvSpPr txBox="1"/>
           <p:nvPr/>
         </p:nvSpPr>
         <p:spPr>
           <a:xfrm>
-            <a:off x="1188720" y="4343400"/>
-            <a:ext cx="10241280" cy="594360"/>
+            <a:off x="5513832" y="2377440"/>
+            <a:ext cx="384048" cy="640080"/>
           </a:xfrm>
           <a:prstGeom prst="rect">
             <a:avLst/>
@@ -4351,35 +5914,36 @@
           </a:bodyPr>
           <a:lstStyle/>
           <a:p>
-            <a:pPr algn="l"/>
-            <a:r>
-              <a:rPr sz="1300" b="0" i="0">
-                <a:solidFill>
-                  <a:srgbClr val="FFFFFF"/>
+            <a:pPr algn="ctr"/>
+            <a:r>
+              <a:rPr sz="2800" b="0" i="0">
+                <a:solidFill>
+                  <a:srgbClr val="00C2E0"/>
                 </a:solidFill>
               </a:rPr>
-              <a:t>Roads that look alike end up in the same cluster.
-Three algorithms tested — each finds groups differently.</a:t>
-            </a:r>
-          </a:p>
-        </p:txBody>
-      </p:sp>
-      <p:sp>
-        <p:nvSpPr>
-          <p:cNvPr id="20" name="Rectangle 19"/>
+              <a:t>➔</a:t>
+            </a:r>
+          </a:p>
+        </p:txBody>
+      </p:sp>
+      <p:sp>
+        <p:nvSpPr>
+          <p:cNvPr id="21" name="Rounded Rectangle 20"/>
           <p:cNvSpPr/>
           <p:nvPr/>
         </p:nvSpPr>
         <p:spPr>
           <a:xfrm>
-            <a:off x="457200" y="5212079"/>
-            <a:ext cx="502920" cy="1097280"/>
-          </a:xfrm>
-          <a:prstGeom prst="rect">
-            <a:avLst/>
+            <a:off x="5897880" y="1371600"/>
+            <a:ext cx="2286000" cy="2926080"/>
+          </a:xfrm>
+          <a:prstGeom prst="roundRect">
+            <a:avLst>
+              <a:gd name="adj" fmla="val 8000"/>
+            </a:avLst>
           </a:prstGeom>
           <a:solidFill>
-            <a:srgbClr val="00B4D8"/>
+            <a:srgbClr val="1B4F8A"/>
           </a:solidFill>
           <a:ln>
             <a:noFill/>
@@ -4409,54 +5973,22 @@
       </p:sp>
       <p:sp>
         <p:nvSpPr>
-          <p:cNvPr id="21" name="TextBox 20"/>
-          <p:cNvSpPr txBox="1"/>
-          <p:nvPr/>
-        </p:nvSpPr>
-        <p:spPr>
-          <a:xfrm>
-            <a:off x="457200" y="5486399"/>
-            <a:ext cx="502920" cy="548640"/>
-          </a:xfrm>
-          <a:prstGeom prst="rect">
-            <a:avLst/>
-          </a:prstGeom>
-          <a:noFill/>
-        </p:spPr>
-        <p:txBody>
-          <a:bodyPr wrap="square">
-            <a:spAutoFit/>
-          </a:bodyPr>
-          <a:lstStyle/>
-          <a:p>
-            <a:pPr algn="ctr"/>
-            <a:r>
-              <a:rPr sz="2200" b="1" i="0">
-                <a:solidFill>
-                  <a:srgbClr val="1A1A2E"/>
-                </a:solidFill>
-              </a:rPr>
-              <a:t>4</a:t>
-            </a:r>
-          </a:p>
-        </p:txBody>
-      </p:sp>
-      <p:sp>
-        <p:nvSpPr>
-          <p:cNvPr id="22" name="Rectangle 21"/>
+          <p:cNvPr id="22" name="Rounded Rectangle 21"/>
           <p:cNvSpPr/>
           <p:nvPr/>
         </p:nvSpPr>
         <p:spPr>
           <a:xfrm>
-            <a:off x="1051560" y="5212079"/>
-            <a:ext cx="10515600" cy="1097280"/>
-          </a:xfrm>
-          <a:prstGeom prst="rect">
-            <a:avLst/>
+            <a:off x="6812280" y="1234440"/>
+            <a:ext cx="457200" cy="457200"/>
+          </a:xfrm>
+          <a:prstGeom prst="roundRect">
+            <a:avLst>
+              <a:gd name="adj" fmla="val 8000"/>
+            </a:avLst>
           </a:prstGeom>
           <a:solidFill>
-            <a:srgbClr val="0F3C78"/>
+            <a:srgbClr val="00C2E0"/>
           </a:solidFill>
           <a:ln>
             <a:noFill/>
@@ -4492,8 +6024,8 @@
         </p:nvSpPr>
         <p:spPr>
           <a:xfrm>
-            <a:off x="1188720" y="5257799"/>
-            <a:ext cx="10241280" cy="411480"/>
+            <a:off x="6812280" y="1234440"/>
+            <a:ext cx="457200" cy="457200"/>
           </a:xfrm>
           <a:prstGeom prst="rect">
             <a:avLst/>
@@ -4506,14 +6038,14 @@
           </a:bodyPr>
           <a:lstStyle/>
           <a:p>
-            <a:pPr algn="l"/>
-            <a:r>
-              <a:rPr sz="1500" b="1" i="0">
-                <a:solidFill>
-                  <a:srgbClr val="00B4D8"/>
+            <a:pPr algn="ctr"/>
+            <a:r>
+              <a:rPr sz="1400" b="1" i="0">
+                <a:solidFill>
+                  <a:srgbClr val="0D1B2A"/>
                 </a:solidFill>
               </a:rPr>
-              <a:t>Test prediction quality  (XGBoost)</a:t>
+              <a:t>3</a:t>
             </a:r>
           </a:p>
         </p:txBody>
@@ -4526,8 +6058,8 @@
         </p:nvSpPr>
         <p:spPr>
           <a:xfrm>
-            <a:off x="1188720" y="5669279"/>
-            <a:ext cx="10241280" cy="594360"/>
+            <a:off x="5897880" y="1508760"/>
+            <a:ext cx="2286000" cy="1005840"/>
           </a:xfrm>
           <a:prstGeom prst="rect">
             <a:avLst/>
@@ -4540,15 +6072,511 @@
           </a:bodyPr>
           <a:lstStyle/>
           <a:p>
-            <a:pPr algn="l"/>
+            <a:pPr algn="ctr"/>
+            <a:r>
+              <a:rPr sz="4600" b="0" i="0">
+                <a:solidFill>
+                  <a:srgbClr val="FFFFFF"/>
+                </a:solidFill>
+              </a:rPr>
+              <a:t>🔵</a:t>
+            </a:r>
+          </a:p>
+        </p:txBody>
+      </p:sp>
+      <p:sp>
+        <p:nvSpPr>
+          <p:cNvPr id="25" name="TextBox 24"/>
+          <p:cNvSpPr txBox="1"/>
+          <p:nvPr/>
+        </p:nvSpPr>
+        <p:spPr>
+          <a:xfrm>
+            <a:off x="5897880" y="2514600"/>
+            <a:ext cx="2286000" cy="777240"/>
+          </a:xfrm>
+          <a:prstGeom prst="rect">
+            <a:avLst/>
+          </a:prstGeom>
+          <a:noFill/>
+        </p:spPr>
+        <p:txBody>
+          <a:bodyPr wrap="square">
+            <a:spAutoFit/>
+          </a:bodyPr>
+          <a:lstStyle/>
+          <a:p>
+            <a:pPr algn="ctr"/>
+            <a:r>
+              <a:rPr sz="1600" b="1" i="0">
+                <a:solidFill>
+                  <a:srgbClr val="FFFFFF"/>
+                </a:solidFill>
+              </a:rPr>
+              <a:t>Group
+Similar Roads</a:t>
+            </a:r>
+          </a:p>
+        </p:txBody>
+      </p:sp>
+      <p:sp>
+        <p:nvSpPr>
+          <p:cNvPr id="26" name="Rectangle 25"/>
+          <p:cNvSpPr/>
+          <p:nvPr/>
+        </p:nvSpPr>
+        <p:spPr>
+          <a:xfrm>
+            <a:off x="6080760" y="3291840"/>
+            <a:ext cx="1920240" cy="36576"/>
+          </a:xfrm>
+          <a:prstGeom prst="rect">
+            <a:avLst/>
+          </a:prstGeom>
+          <a:solidFill>
+            <a:srgbClr val="00C2E0"/>
+          </a:solidFill>
+          <a:ln>
+            <a:noFill/>
+          </a:ln>
+        </p:spPr>
+        <p:style>
+          <a:lnRef idx="1">
+            <a:schemeClr val="accent1"/>
+          </a:lnRef>
+          <a:fillRef idx="3">
+            <a:schemeClr val="accent1"/>
+          </a:fillRef>
+          <a:effectRef idx="2">
+            <a:schemeClr val="accent1"/>
+          </a:effectRef>
+          <a:fontRef idx="minor">
+            <a:schemeClr val="lt1"/>
+          </a:fontRef>
+        </p:style>
+        <p:txBody>
+          <a:bodyPr rtlCol="0" anchor="ctr"/>
+          <a:lstStyle/>
+          <a:p>
+            <a:pPr algn="ctr"/>
+          </a:p>
+        </p:txBody>
+      </p:sp>
+      <p:sp>
+        <p:nvSpPr>
+          <p:cNvPr id="27" name="TextBox 26"/>
+          <p:cNvSpPr txBox="1"/>
+          <p:nvPr/>
+        </p:nvSpPr>
+        <p:spPr>
+          <a:xfrm>
+            <a:off x="5897880" y="3364992"/>
+            <a:ext cx="2286000" cy="777240"/>
+          </a:xfrm>
+          <a:prstGeom prst="rect">
+            <a:avLst/>
+          </a:prstGeom>
+          <a:noFill/>
+        </p:spPr>
+        <p:txBody>
+          <a:bodyPr wrap="square">
+            <a:spAutoFit/>
+          </a:bodyPr>
+          <a:lstStyle/>
+          <a:p>
+            <a:pPr algn="ctr"/>
             <a:r>
               <a:rPr sz="1300" b="0" i="0">
                 <a:solidFill>
+                  <a:srgbClr val="B8D8F0"/>
+                </a:solidFill>
+              </a:rPr>
+              <a:t>K-Means
+HDBSCAN  GMM</a:t>
+            </a:r>
+          </a:p>
+        </p:txBody>
+      </p:sp>
+      <p:sp>
+        <p:nvSpPr>
+          <p:cNvPr id="28" name="TextBox 27"/>
+          <p:cNvSpPr txBox="1"/>
+          <p:nvPr/>
+        </p:nvSpPr>
+        <p:spPr>
+          <a:xfrm>
+            <a:off x="8257031" y="2377440"/>
+            <a:ext cx="384048" cy="640080"/>
+          </a:xfrm>
+          <a:prstGeom prst="rect">
+            <a:avLst/>
+          </a:prstGeom>
+          <a:noFill/>
+        </p:spPr>
+        <p:txBody>
+          <a:bodyPr wrap="square">
+            <a:spAutoFit/>
+          </a:bodyPr>
+          <a:lstStyle/>
+          <a:p>
+            <a:pPr algn="ctr"/>
+            <a:r>
+              <a:rPr sz="2800" b="0" i="0">
+                <a:solidFill>
+                  <a:srgbClr val="00C2E0"/>
+                </a:solidFill>
+              </a:rPr>
+              <a:t>➔</a:t>
+            </a:r>
+          </a:p>
+        </p:txBody>
+      </p:sp>
+      <p:sp>
+        <p:nvSpPr>
+          <p:cNvPr id="29" name="Rounded Rectangle 28"/>
+          <p:cNvSpPr/>
+          <p:nvPr/>
+        </p:nvSpPr>
+        <p:spPr>
+          <a:xfrm>
+            <a:off x="8641080" y="1371600"/>
+            <a:ext cx="2286000" cy="2926080"/>
+          </a:xfrm>
+          <a:prstGeom prst="roundRect">
+            <a:avLst>
+              <a:gd name="adj" fmla="val 8000"/>
+            </a:avLst>
+          </a:prstGeom>
+          <a:solidFill>
+            <a:srgbClr val="1B4F8A"/>
+          </a:solidFill>
+          <a:ln>
+            <a:noFill/>
+          </a:ln>
+        </p:spPr>
+        <p:style>
+          <a:lnRef idx="1">
+            <a:schemeClr val="accent1"/>
+          </a:lnRef>
+          <a:fillRef idx="3">
+            <a:schemeClr val="accent1"/>
+          </a:fillRef>
+          <a:effectRef idx="2">
+            <a:schemeClr val="accent1"/>
+          </a:effectRef>
+          <a:fontRef idx="minor">
+            <a:schemeClr val="lt1"/>
+          </a:fontRef>
+        </p:style>
+        <p:txBody>
+          <a:bodyPr rtlCol="0" anchor="ctr"/>
+          <a:lstStyle/>
+          <a:p>
+            <a:pPr algn="ctr"/>
+          </a:p>
+        </p:txBody>
+      </p:sp>
+      <p:sp>
+        <p:nvSpPr>
+          <p:cNvPr id="30" name="Rounded Rectangle 29"/>
+          <p:cNvSpPr/>
+          <p:nvPr/>
+        </p:nvSpPr>
+        <p:spPr>
+          <a:xfrm>
+            <a:off x="9555480" y="1234440"/>
+            <a:ext cx="457200" cy="457200"/>
+          </a:xfrm>
+          <a:prstGeom prst="roundRect">
+            <a:avLst>
+              <a:gd name="adj" fmla="val 8000"/>
+            </a:avLst>
+          </a:prstGeom>
+          <a:solidFill>
+            <a:srgbClr val="00C2E0"/>
+          </a:solidFill>
+          <a:ln>
+            <a:noFill/>
+          </a:ln>
+        </p:spPr>
+        <p:style>
+          <a:lnRef idx="1">
+            <a:schemeClr val="accent1"/>
+          </a:lnRef>
+          <a:fillRef idx="3">
+            <a:schemeClr val="accent1"/>
+          </a:fillRef>
+          <a:effectRef idx="2">
+            <a:schemeClr val="accent1"/>
+          </a:effectRef>
+          <a:fontRef idx="minor">
+            <a:schemeClr val="lt1"/>
+          </a:fontRef>
+        </p:style>
+        <p:txBody>
+          <a:bodyPr rtlCol="0" anchor="ctr"/>
+          <a:lstStyle/>
+          <a:p>
+            <a:pPr algn="ctr"/>
+          </a:p>
+        </p:txBody>
+      </p:sp>
+      <p:sp>
+        <p:nvSpPr>
+          <p:cNvPr id="31" name="TextBox 30"/>
+          <p:cNvSpPr txBox="1"/>
+          <p:nvPr/>
+        </p:nvSpPr>
+        <p:spPr>
+          <a:xfrm>
+            <a:off x="9555480" y="1234440"/>
+            <a:ext cx="457200" cy="457200"/>
+          </a:xfrm>
+          <a:prstGeom prst="rect">
+            <a:avLst/>
+          </a:prstGeom>
+          <a:noFill/>
+        </p:spPr>
+        <p:txBody>
+          <a:bodyPr wrap="square">
+            <a:spAutoFit/>
+          </a:bodyPr>
+          <a:lstStyle/>
+          <a:p>
+            <a:pPr algn="ctr"/>
+            <a:r>
+              <a:rPr sz="1400" b="1" i="0">
+                <a:solidFill>
+                  <a:srgbClr val="0D1B2A"/>
+                </a:solidFill>
+              </a:rPr>
+              <a:t>4</a:t>
+            </a:r>
+          </a:p>
+        </p:txBody>
+      </p:sp>
+      <p:sp>
+        <p:nvSpPr>
+          <p:cNvPr id="32" name="TextBox 31"/>
+          <p:cNvSpPr txBox="1"/>
+          <p:nvPr/>
+        </p:nvSpPr>
+        <p:spPr>
+          <a:xfrm>
+            <a:off x="8641080" y="1508760"/>
+            <a:ext cx="2286000" cy="1005840"/>
+          </a:xfrm>
+          <a:prstGeom prst="rect">
+            <a:avLst/>
+          </a:prstGeom>
+          <a:noFill/>
+        </p:spPr>
+        <p:txBody>
+          <a:bodyPr wrap="square">
+            <a:spAutoFit/>
+          </a:bodyPr>
+          <a:lstStyle/>
+          <a:p>
+            <a:pPr algn="ctr"/>
+            <a:r>
+              <a:rPr sz="4600" b="0" i="0">
+                <a:solidFill>
                   <a:srgbClr val="FFFFFF"/>
                 </a:solidFill>
               </a:rPr>
-              <a:t>Add cluster labels as features to a traffic prediction model.
-Measure R² improvement vs using Road Class alone.</a:t>
+              <a:t>📈</a:t>
+            </a:r>
+          </a:p>
+        </p:txBody>
+      </p:sp>
+      <p:sp>
+        <p:nvSpPr>
+          <p:cNvPr id="33" name="TextBox 32"/>
+          <p:cNvSpPr txBox="1"/>
+          <p:nvPr/>
+        </p:nvSpPr>
+        <p:spPr>
+          <a:xfrm>
+            <a:off x="8641080" y="2514600"/>
+            <a:ext cx="2286000" cy="777240"/>
+          </a:xfrm>
+          <a:prstGeom prst="rect">
+            <a:avLst/>
+          </a:prstGeom>
+          <a:noFill/>
+        </p:spPr>
+        <p:txBody>
+          <a:bodyPr wrap="square">
+            <a:spAutoFit/>
+          </a:bodyPr>
+          <a:lstStyle/>
+          <a:p>
+            <a:pPr algn="ctr"/>
+            <a:r>
+              <a:rPr sz="1600" b="1" i="0">
+                <a:solidFill>
+                  <a:srgbClr val="FFFFFF"/>
+                </a:solidFill>
+              </a:rPr>
+              <a:t>Predict
+AAWDT</a:t>
+            </a:r>
+          </a:p>
+        </p:txBody>
+      </p:sp>
+      <p:sp>
+        <p:nvSpPr>
+          <p:cNvPr id="34" name="Rectangle 33"/>
+          <p:cNvSpPr/>
+          <p:nvPr/>
+        </p:nvSpPr>
+        <p:spPr>
+          <a:xfrm>
+            <a:off x="8823959" y="3291840"/>
+            <a:ext cx="1920240" cy="36576"/>
+          </a:xfrm>
+          <a:prstGeom prst="rect">
+            <a:avLst/>
+          </a:prstGeom>
+          <a:solidFill>
+            <a:srgbClr val="00C2E0"/>
+          </a:solidFill>
+          <a:ln>
+            <a:noFill/>
+          </a:ln>
+        </p:spPr>
+        <p:style>
+          <a:lnRef idx="1">
+            <a:schemeClr val="accent1"/>
+          </a:lnRef>
+          <a:fillRef idx="3">
+            <a:schemeClr val="accent1"/>
+          </a:fillRef>
+          <a:effectRef idx="2">
+            <a:schemeClr val="accent1"/>
+          </a:effectRef>
+          <a:fontRef idx="minor">
+            <a:schemeClr val="lt1"/>
+          </a:fontRef>
+        </p:style>
+        <p:txBody>
+          <a:bodyPr rtlCol="0" anchor="ctr"/>
+          <a:lstStyle/>
+          <a:p>
+            <a:pPr algn="ctr"/>
+          </a:p>
+        </p:txBody>
+      </p:sp>
+      <p:sp>
+        <p:nvSpPr>
+          <p:cNvPr id="35" name="TextBox 34"/>
+          <p:cNvSpPr txBox="1"/>
+          <p:nvPr/>
+        </p:nvSpPr>
+        <p:spPr>
+          <a:xfrm>
+            <a:off x="8641080" y="3364992"/>
+            <a:ext cx="2286000" cy="777240"/>
+          </a:xfrm>
+          <a:prstGeom prst="rect">
+            <a:avLst/>
+          </a:prstGeom>
+          <a:noFill/>
+        </p:spPr>
+        <p:txBody>
+          <a:bodyPr wrap="square">
+            <a:spAutoFit/>
+          </a:bodyPr>
+          <a:lstStyle/>
+          <a:p>
+            <a:pPr algn="ctr"/>
+            <a:r>
+              <a:rPr sz="1300" b="0" i="0">
+                <a:solidFill>
+                  <a:srgbClr val="B8D8F0"/>
+                </a:solidFill>
+              </a:rPr>
+              <a:t>XGBoost
+5-fold CV</a:t>
+            </a:r>
+          </a:p>
+        </p:txBody>
+      </p:sp>
+      <p:sp>
+        <p:nvSpPr>
+          <p:cNvPr id="36" name="Rounded Rectangle 35"/>
+          <p:cNvSpPr/>
+          <p:nvPr/>
+        </p:nvSpPr>
+        <p:spPr>
+          <a:xfrm>
+            <a:off x="411480" y="4617720"/>
+            <a:ext cx="11457432" cy="685800"/>
+          </a:xfrm>
+          <a:prstGeom prst="roundRect">
+            <a:avLst>
+              <a:gd name="adj" fmla="val 8000"/>
+            </a:avLst>
+          </a:prstGeom>
+          <a:solidFill>
+            <a:srgbClr val="2C3E55"/>
+          </a:solidFill>
+          <a:ln>
+            <a:noFill/>
+          </a:ln>
+        </p:spPr>
+        <p:style>
+          <a:lnRef idx="1">
+            <a:schemeClr val="accent1"/>
+          </a:lnRef>
+          <a:fillRef idx="3">
+            <a:schemeClr val="accent1"/>
+          </a:fillRef>
+          <a:effectRef idx="2">
+            <a:schemeClr val="accent1"/>
+          </a:effectRef>
+          <a:fontRef idx="minor">
+            <a:schemeClr val="lt1"/>
+          </a:fontRef>
+        </p:style>
+        <p:txBody>
+          <a:bodyPr rtlCol="0" anchor="ctr"/>
+          <a:lstStyle/>
+          <a:p>
+            <a:pPr algn="ctr"/>
+          </a:p>
+        </p:txBody>
+      </p:sp>
+      <p:sp>
+        <p:nvSpPr>
+          <p:cNvPr id="37" name="TextBox 36"/>
+          <p:cNvSpPr txBox="1"/>
+          <p:nvPr/>
+        </p:nvSpPr>
+        <p:spPr>
+          <a:xfrm>
+            <a:off x="594360" y="4663440"/>
+            <a:ext cx="11155680" cy="594360"/>
+          </a:xfrm>
+          <a:prstGeom prst="rect">
+            <a:avLst/>
+          </a:prstGeom>
+          <a:noFill/>
+        </p:spPr>
+        <p:txBody>
+          <a:bodyPr wrap="square">
+            <a:spAutoFit/>
+          </a:bodyPr>
+          <a:lstStyle/>
+          <a:p>
+            <a:pPr algn="ctr"/>
+            <a:r>
+              <a:rPr sz="1400" b="0" i="0">
+                <a:solidFill>
+                  <a:srgbClr val="FFCA3A"/>
+                </a:solidFill>
+              </a:rPr>
+              <a:t>⚠️   Clustering must happen AFTER compression — raw 512-dim distances are nearly uniform (curse of dimensionality)</a:t>
             </a:r>
           </a:p>
         </p:txBody>
@@ -4586,7 +6614,7 @@
             <a:avLst/>
           </a:prstGeom>
           <a:solidFill>
-            <a:srgbClr val="1A1A2E"/>
+            <a:srgbClr val="0D1B2A"/>
           </a:solidFill>
           <a:ln>
             <a:noFill/>
@@ -4616,20 +6644,54 @@
       </p:sp>
       <p:sp>
         <p:nvSpPr>
-          <p:cNvPr id="3" name="Rectangle 2"/>
+          <p:cNvPr id="3" name="TextBox 2"/>
+          <p:cNvSpPr txBox="1"/>
+          <p:nvPr/>
+        </p:nvSpPr>
+        <p:spPr>
+          <a:xfrm>
+            <a:off x="502920" y="164592"/>
+            <a:ext cx="10972800" cy="804672"/>
+          </a:xfrm>
+          <a:prstGeom prst="rect">
+            <a:avLst/>
+          </a:prstGeom>
+          <a:noFill/>
+        </p:spPr>
+        <p:txBody>
+          <a:bodyPr wrap="square">
+            <a:spAutoFit/>
+          </a:bodyPr>
+          <a:lstStyle/>
+          <a:p>
+            <a:pPr algn="l"/>
+            <a:r>
+              <a:rPr sz="2800" b="1" i="0">
+                <a:solidFill>
+                  <a:srgbClr val="FFFFFF"/>
+                </a:solidFill>
+              </a:rPr>
+              <a:t>Roads Grouped by Visual Similarity</a:t>
+            </a:r>
+          </a:p>
+        </p:txBody>
+      </p:sp>
+      <p:sp>
+        <p:nvSpPr>
+          <p:cNvPr id="4" name="Rectangle 3"/>
           <p:cNvSpPr/>
           <p:nvPr/>
         </p:nvSpPr>
         <p:spPr>
           <a:xfrm>
-            <a:off x="0" y="1005840"/>
+            <a:off x="0" y="1024128"/>
             <a:ext cx="12188952" cy="45720"/>
           </a:xfrm>
           <a:prstGeom prst="rect">
             <a:avLst/>
           </a:prstGeom>
           <a:solidFill>
-            <a:srgbClr val="00B4D8"/>
+            <a:srgbClr val="00C2E0"/>
           </a:solidFill>
           <a:ln>
             <a:noFill/>
@@ -4654,40 +6716,6 @@
           <a:lstStyle/>
           <a:p>
             <a:pPr algn="ctr"/>
-          </a:p>
-        </p:txBody>
-      </p:sp>
-      <p:sp>
-        <p:nvSpPr>
-          <p:cNvPr id="4" name="TextBox 3"/>
-          <p:cNvSpPr txBox="1"/>
-          <p:nvPr/>
-        </p:nvSpPr>
-        <p:spPr>
-          <a:xfrm>
-            <a:off x="457200" y="137160"/>
-            <a:ext cx="11430000" cy="868680"/>
-          </a:xfrm>
-          <a:prstGeom prst="rect">
-            <a:avLst/>
-          </a:prstGeom>
-          <a:noFill/>
-        </p:spPr>
-        <p:txBody>
-          <a:bodyPr wrap="square">
-            <a:spAutoFit/>
-          </a:bodyPr>
-          <a:lstStyle/>
-          <a:p>
-            <a:pPr algn="l"/>
-            <a:r>
-              <a:rPr sz="3000" b="1" i="0">
-                <a:solidFill>
-                  <a:srgbClr val="FFFFFF"/>
-                </a:solidFill>
-              </a:rPr>
-              <a:t>What the Clusters Look Like</a:t>
-            </a:r>
           </a:p>
         </p:txBody>
       </p:sp>
@@ -4708,7 +6736,7 @@
         <p:spPr>
           <a:xfrm>
             <a:off x="274320" y="1188720"/>
-            <a:ext cx="2834640" cy="2468880"/>
+            <a:ext cx="3657600" cy="3017520"/>
           </a:xfrm>
           <a:prstGeom prst="rect">
             <a:avLst/>
@@ -4731,8 +6759,8 @@
         </p:blipFill>
         <p:spPr>
           <a:xfrm>
-            <a:off x="3246120" y="1188720"/>
-            <a:ext cx="2834640" cy="2468880"/>
+            <a:off x="4114800" y="1188720"/>
+            <a:ext cx="3657600" cy="3017520"/>
           </a:xfrm>
           <a:prstGeom prst="rect">
             <a:avLst/>
@@ -4755,8 +6783,8 @@
         </p:blipFill>
         <p:spPr>
           <a:xfrm>
-            <a:off x="6217920" y="1188720"/>
-            <a:ext cx="5669280" cy="2468880"/>
+            <a:off x="7955279" y="1188720"/>
+            <a:ext cx="4023360" cy="3017520"/>
           </a:xfrm>
           <a:prstGeom prst="rect">
             <a:avLst/>
@@ -4771,8 +6799,8 @@
         </p:nvSpPr>
         <p:spPr>
           <a:xfrm>
-            <a:off x="274320" y="3749039"/>
-            <a:ext cx="2834640" cy="731520"/>
+            <a:off x="274320" y="4251960"/>
+            <a:ext cx="3657600" cy="411480"/>
           </a:xfrm>
           <a:prstGeom prst="rect">
             <a:avLst/>
@@ -4787,13 +6815,12 @@
           <a:p>
             <a:pPr algn="ctr"/>
             <a:r>
-              <a:rPr sz="1100" b="0" i="0">
-                <a:solidFill>
-                  <a:srgbClr val="CAE9FF"/>
+              <a:rPr sz="1300" b="1" i="0">
+                <a:solidFill>
+                  <a:srgbClr val="00C2E0"/>
                 </a:solidFill>
               </a:rPr>
-              <a:t>K-Means clusters (left) — each dot is a road segment.
-Proximity = visual similarity.</a:t>
+              <a:t>Clusters</a:t>
             </a:r>
           </a:p>
         </p:txBody>
@@ -4806,8 +6833,8 @@
         </p:nvSpPr>
         <p:spPr>
           <a:xfrm>
-            <a:off x="3246120" y="3749039"/>
-            <a:ext cx="2834640" cy="731520"/>
+            <a:off x="4114800" y="4251960"/>
+            <a:ext cx="3657600" cy="411480"/>
           </a:xfrm>
           <a:prstGeom prst="rect">
             <a:avLst/>
@@ -4822,13 +6849,12 @@
           <a:p>
             <a:pPr algn="ctr"/>
             <a:r>
-              <a:rPr sz="1100" b="0" i="0">
-                <a:solidFill>
-                  <a:srgbClr val="CAE9FF"/>
+              <a:rPr sz="1300" b="1" i="0">
+                <a:solidFill>
+                  <a:srgbClr val="FFCA3A"/>
                 </a:solidFill>
               </a:rPr>
-              <a:t>Same map coloured by AAWDT.
-Higher traffic = warmer colour.</a:t>
+              <a:t>AAWDT</a:t>
             </a:r>
           </a:p>
         </p:txBody>
@@ -4841,8 +6867,8 @@
         </p:nvSpPr>
         <p:spPr>
           <a:xfrm>
-            <a:off x="6217920" y="3749039"/>
-            <a:ext cx="5669280" cy="731520"/>
+            <a:off x="7955279" y="4251960"/>
+            <a:ext cx="3657600" cy="411480"/>
           </a:xfrm>
           <a:prstGeom prst="rect">
             <a:avLst/>
@@ -4857,27 +6883,71 @@
           <a:p>
             <a:pPr algn="ctr"/>
             <a:r>
-              <a:rPr sz="1100" b="0" i="0">
-                <a:solidFill>
-                  <a:srgbClr val="CAE9FF"/>
+              <a:rPr sz="1300" b="1" i="0">
+                <a:solidFill>
+                  <a:srgbClr val="00C974"/>
                 </a:solidFill>
               </a:rPr>
-              <a:t>Mean AAWDT per cluster.
-Clusters do separate roads by traffic volume.</a:t>
-            </a:r>
-          </a:p>
-        </p:txBody>
-      </p:sp>
-      <p:sp>
-        <p:nvSpPr>
-          <p:cNvPr id="11" name="TextBox 10"/>
+              <a:t>Mean Traffic per Cluster</a:t>
+            </a:r>
+          </a:p>
+        </p:txBody>
+      </p:sp>
+      <p:sp>
+        <p:nvSpPr>
+          <p:cNvPr id="11" name="Rounded Rectangle 10"/>
+          <p:cNvSpPr/>
+          <p:nvPr/>
+        </p:nvSpPr>
+        <p:spPr>
+          <a:xfrm>
+            <a:off x="274320" y="4846320"/>
+            <a:ext cx="11640312" cy="1188720"/>
+          </a:xfrm>
+          <a:prstGeom prst="roundRect">
+            <a:avLst>
+              <a:gd name="adj" fmla="val 8000"/>
+            </a:avLst>
+          </a:prstGeom>
+          <a:solidFill>
+            <a:srgbClr val="2C3E55"/>
+          </a:solidFill>
+          <a:ln>
+            <a:noFill/>
+          </a:ln>
+        </p:spPr>
+        <p:style>
+          <a:lnRef idx="1">
+            <a:schemeClr val="accent1"/>
+          </a:lnRef>
+          <a:fillRef idx="3">
+            <a:schemeClr val="accent1"/>
+          </a:fillRef>
+          <a:effectRef idx="2">
+            <a:schemeClr val="accent1"/>
+          </a:effectRef>
+          <a:fontRef idx="minor">
+            <a:schemeClr val="lt1"/>
+          </a:fontRef>
+        </p:style>
+        <p:txBody>
+          <a:bodyPr rtlCol="0" anchor="ctr"/>
+          <a:lstStyle/>
+          <a:p>
+            <a:pPr algn="ctr"/>
+          </a:p>
+        </p:txBody>
+      </p:sp>
+      <p:sp>
+        <p:nvSpPr>
+          <p:cNvPr id="12" name="TextBox 11"/>
           <p:cNvSpPr txBox="1"/>
           <p:nvPr/>
         </p:nvSpPr>
         <p:spPr>
           <a:xfrm>
             <a:off x="457200" y="4937760"/>
-            <a:ext cx="11274552" cy="731520"/>
+            <a:ext cx="731520" cy="1005840"/>
           </a:xfrm>
           <a:prstGeom prst="rect">
             <a:avLst/>
@@ -4892,12 +6962,47 @@
           <a:p>
             <a:pPr algn="ctr"/>
             <a:r>
-              <a:rPr sz="1400" b="1" i="0">
-                <a:solidFill>
-                  <a:srgbClr val="FFD166"/>
+              <a:rPr sz="3600" b="0" i="0">
+                <a:solidFill>
+                  <a:srgbClr val="FFFFFF"/>
                 </a:solidFill>
               </a:rPr>
-              <a:t>Key observation: satellite image clusters align with traffic volume — roads that look similar tend to carry similar traffic.</a:t>
+              <a:t>💡</a:t>
+            </a:r>
+          </a:p>
+        </p:txBody>
+      </p:sp>
+      <p:sp>
+        <p:nvSpPr>
+          <p:cNvPr id="13" name="TextBox 12"/>
+          <p:cNvSpPr txBox="1"/>
+          <p:nvPr/>
+        </p:nvSpPr>
+        <p:spPr>
+          <a:xfrm>
+            <a:off x="1188720" y="4937760"/>
+            <a:ext cx="10607040" cy="1005840"/>
+          </a:xfrm>
+          <a:prstGeom prst="rect">
+            <a:avLst/>
+          </a:prstGeom>
+          <a:noFill/>
+        </p:spPr>
+        <p:txBody>
+          <a:bodyPr wrap="square">
+            <a:spAutoFit/>
+          </a:bodyPr>
+          <a:lstStyle/>
+          <a:p>
+            <a:pPr algn="l"/>
+            <a:r>
+              <a:rPr sz="1500" b="0" i="0">
+                <a:solidFill>
+                  <a:srgbClr val="FFFFFF"/>
+                </a:solidFill>
+              </a:rPr>
+              <a:t>Clusters that look similar visually also carry similar traffic volumes.
+The AAWDT heatmap and the cluster map align — this is not a coincidence.</a:t>
             </a:r>
           </a:p>
         </p:txBody>
@@ -4935,7 +7040,7 @@
             <a:avLst/>
           </a:prstGeom>
           <a:solidFill>
-            <a:srgbClr val="1A1A2E"/>
+            <a:srgbClr val="0D1B2A"/>
           </a:solidFill>
           <a:ln>
             <a:noFill/>
@@ -4965,20 +7070,54 @@
       </p:sp>
       <p:sp>
         <p:nvSpPr>
-          <p:cNvPr id="3" name="Rectangle 2"/>
+          <p:cNvPr id="3" name="TextBox 2"/>
+          <p:cNvSpPr txBox="1"/>
+          <p:nvPr/>
+        </p:nvSpPr>
+        <p:spPr>
+          <a:xfrm>
+            <a:off x="502920" y="164592"/>
+            <a:ext cx="10972800" cy="804672"/>
+          </a:xfrm>
+          <a:prstGeom prst="rect">
+            <a:avLst/>
+          </a:prstGeom>
+          <a:noFill/>
+        </p:spPr>
+        <p:txBody>
+          <a:bodyPr wrap="square">
+            <a:spAutoFit/>
+          </a:bodyPr>
+          <a:lstStyle/>
+          <a:p>
+            <a:pPr algn="l"/>
+            <a:r>
+              <a:rPr sz="2800" b="1" i="0">
+                <a:solidFill>
+                  <a:srgbClr val="FFFFFF"/>
+                </a:solidFill>
+              </a:rPr>
+              <a:t>Results</a:t>
+            </a:r>
+          </a:p>
+        </p:txBody>
+      </p:sp>
+      <p:sp>
+        <p:nvSpPr>
+          <p:cNvPr id="4" name="Rectangle 3"/>
           <p:cNvSpPr/>
           <p:nvPr/>
         </p:nvSpPr>
         <p:spPr>
           <a:xfrm>
-            <a:off x="0" y="1005840"/>
+            <a:off x="0" y="1024128"/>
             <a:ext cx="12188952" cy="45720"/>
           </a:xfrm>
           <a:prstGeom prst="rect">
             <a:avLst/>
           </a:prstGeom>
           <a:solidFill>
-            <a:srgbClr val="00B4D8"/>
+            <a:srgbClr val="00C2E0"/>
           </a:solidFill>
           <a:ln>
             <a:noFill/>
@@ -5008,54 +7147,22 @@
       </p:sp>
       <p:sp>
         <p:nvSpPr>
-          <p:cNvPr id="4" name="TextBox 3"/>
-          <p:cNvSpPr txBox="1"/>
-          <p:nvPr/>
-        </p:nvSpPr>
-        <p:spPr>
-          <a:xfrm>
-            <a:off x="457200" y="137160"/>
-            <a:ext cx="11430000" cy="868680"/>
-          </a:xfrm>
-          <a:prstGeom prst="rect">
-            <a:avLst/>
-          </a:prstGeom>
-          <a:noFill/>
-        </p:spPr>
-        <p:txBody>
-          <a:bodyPr wrap="square">
-            <a:spAutoFit/>
-          </a:bodyPr>
-          <a:lstStyle/>
-          <a:p>
-            <a:pPr algn="l"/>
-            <a:r>
-              <a:rPr sz="3000" b="1" i="0">
-                <a:solidFill>
-                  <a:srgbClr val="FFFFFF"/>
-                </a:solidFill>
-              </a:rPr>
-              <a:t>Results</a:t>
-            </a:r>
-          </a:p>
-        </p:txBody>
-      </p:sp>
-      <p:sp>
-        <p:nvSpPr>
-          <p:cNvPr id="5" name="Rectangle 4"/>
+          <p:cNvPr id="5" name="Rounded Rectangle 4"/>
           <p:cNvSpPr/>
           <p:nvPr/>
         </p:nvSpPr>
         <p:spPr>
           <a:xfrm>
-            <a:off x="457200" y="1188720"/>
-            <a:ext cx="6400800" cy="4572000"/>
-          </a:xfrm>
-          <a:prstGeom prst="rect">
-            <a:avLst/>
+            <a:off x="365760" y="1280160"/>
+            <a:ext cx="3474720" cy="1828800"/>
+          </a:xfrm>
+          <a:prstGeom prst="roundRect">
+            <a:avLst>
+              <a:gd name="adj" fmla="val 8000"/>
+            </a:avLst>
           </a:prstGeom>
           <a:solidFill>
-            <a:srgbClr val="0F3C78"/>
+            <a:srgbClr val="2C3E55"/>
           </a:solidFill>
           <a:ln>
             <a:noFill/>
@@ -5091,8 +7198,8 @@
         </p:nvSpPr>
         <p:spPr>
           <a:xfrm>
-            <a:off x="502920" y="1234440"/>
-            <a:ext cx="6309360" cy="457200"/>
+            <a:off x="365760" y="1371600"/>
+            <a:ext cx="3474720" cy="822960"/>
           </a:xfrm>
           <a:prstGeom prst="rect">
             <a:avLst/>
@@ -5105,34 +7212,104 @@
           </a:bodyPr>
           <a:lstStyle/>
           <a:p>
-            <a:pPr algn="l"/>
-            <a:r>
-              <a:rPr sz="1300" b="1" i="0">
-                <a:solidFill>
-                  <a:srgbClr val="00B4D8"/>
+            <a:pPr algn="ctr"/>
+            <a:r>
+              <a:rPr sz="4400" b="1" i="0">
+                <a:solidFill>
+                  <a:srgbClr val="00C974"/>
                 </a:solidFill>
               </a:rPr>
-              <a:t>R² (higher = better AAWDT prediction)</a:t>
-            </a:r>
-          </a:p>
-        </p:txBody>
-      </p:sp>
-      <p:sp>
-        <p:nvSpPr>
-          <p:cNvPr id="7" name="Rectangle 6"/>
+              <a:t>0.801</a:t>
+            </a:r>
+          </a:p>
+        </p:txBody>
+      </p:sp>
+      <p:sp>
+        <p:nvSpPr>
+          <p:cNvPr id="7" name="TextBox 6"/>
+          <p:cNvSpPr txBox="1"/>
+          <p:nvPr/>
+        </p:nvSpPr>
+        <p:spPr>
+          <a:xfrm>
+            <a:off x="365760" y="2194560"/>
+            <a:ext cx="3474720" cy="457200"/>
+          </a:xfrm>
+          <a:prstGeom prst="rect">
+            <a:avLst/>
+          </a:prstGeom>
+          <a:noFill/>
+        </p:spPr>
+        <p:txBody>
+          <a:bodyPr wrap="square">
+            <a:spAutoFit/>
+          </a:bodyPr>
+          <a:lstStyle/>
+          <a:p>
+            <a:pPr algn="ctr"/>
+            <a:r>
+              <a:rPr sz="1400" b="1" i="0">
+                <a:solidFill>
+                  <a:srgbClr val="FFFFFF"/>
+                </a:solidFill>
+              </a:rPr>
+              <a:t>Road Class + GMM</a:t>
+            </a:r>
+          </a:p>
+        </p:txBody>
+      </p:sp>
+      <p:sp>
+        <p:nvSpPr>
+          <p:cNvPr id="8" name="TextBox 7"/>
+          <p:cNvSpPr txBox="1"/>
+          <p:nvPr/>
+        </p:nvSpPr>
+        <p:spPr>
+          <a:xfrm>
+            <a:off x="365760" y="2633472"/>
+            <a:ext cx="3474720" cy="347472"/>
+          </a:xfrm>
+          <a:prstGeom prst="rect">
+            <a:avLst/>
+          </a:prstGeom>
+          <a:noFill/>
+        </p:spPr>
+        <p:txBody>
+          <a:bodyPr wrap="square">
+            <a:spAutoFit/>
+          </a:bodyPr>
+          <a:lstStyle/>
+          <a:p>
+            <a:pPr algn="ctr"/>
+            <a:r>
+              <a:rPr sz="1100" b="0" i="1">
+                <a:solidFill>
+                  <a:srgbClr val="B8D8F0"/>
+                </a:solidFill>
+              </a:rPr>
+              <a:t>Best R² achieved</a:t>
+            </a:r>
+          </a:p>
+        </p:txBody>
+      </p:sp>
+      <p:sp>
+        <p:nvSpPr>
+          <p:cNvPr id="9" name="Rounded Rectangle 8"/>
           <p:cNvSpPr/>
           <p:nvPr/>
         </p:nvSpPr>
         <p:spPr>
           <a:xfrm>
-            <a:off x="502920" y="1783080"/>
-            <a:ext cx="6309360" cy="594360"/>
-          </a:xfrm>
-          <a:prstGeom prst="rect">
-            <a:avLst/>
+            <a:off x="4114800" y="1280160"/>
+            <a:ext cx="3474720" cy="1828800"/>
+          </a:xfrm>
+          <a:prstGeom prst="roundRect">
+            <a:avLst>
+              <a:gd name="adj" fmla="val 8000"/>
+            </a:avLst>
           </a:prstGeom>
           <a:solidFill>
-            <a:srgbClr val="064060"/>
+            <a:srgbClr val="2C3E55"/>
           </a:solidFill>
           <a:ln>
             <a:noFill/>
@@ -5162,14 +7339,14 @@
       </p:sp>
       <p:sp>
         <p:nvSpPr>
-          <p:cNvPr id="8" name="TextBox 7"/>
+          <p:cNvPr id="10" name="TextBox 9"/>
           <p:cNvSpPr txBox="1"/>
           <p:nvPr/>
         </p:nvSpPr>
         <p:spPr>
           <a:xfrm>
-            <a:off x="594360" y="1856231"/>
-            <a:ext cx="5029200" cy="457200"/>
+            <a:off x="4114800" y="1371600"/>
+            <a:ext cx="3474720" cy="822960"/>
           </a:xfrm>
           <a:prstGeom prst="rect">
             <a:avLst/>
@@ -5182,28 +7359,28 @@
           </a:bodyPr>
           <a:lstStyle/>
           <a:p>
-            <a:pPr algn="l"/>
-            <a:r>
-              <a:rPr sz="1300" b="0" i="0">
-                <a:solidFill>
-                  <a:srgbClr val="06D676"/>
+            <a:pPr algn="ctr"/>
+            <a:r>
+              <a:rPr sz="4400" b="1" i="0">
+                <a:solidFill>
+                  <a:srgbClr val="FFCA3A"/>
                 </a:solidFill>
               </a:rPr>
-              <a:t>Road Class + GMM clusters</a:t>
-            </a:r>
-          </a:p>
-        </p:txBody>
-      </p:sp>
-      <p:sp>
-        <p:nvSpPr>
-          <p:cNvPr id="9" name="TextBox 8"/>
+              <a:t>0.781</a:t>
+            </a:r>
+          </a:p>
+        </p:txBody>
+      </p:sp>
+      <p:sp>
+        <p:nvSpPr>
+          <p:cNvPr id="11" name="TextBox 10"/>
           <p:cNvSpPr txBox="1"/>
           <p:nvPr/>
         </p:nvSpPr>
         <p:spPr>
           <a:xfrm>
-            <a:off x="5394960" y="1856231"/>
-            <a:ext cx="822960" cy="457200"/>
+            <a:off x="4114800" y="2194560"/>
+            <a:ext cx="3474720" cy="457200"/>
           </a:xfrm>
           <a:prstGeom prst="rect">
             <a:avLst/>
@@ -5216,34 +7393,70 @@
           </a:bodyPr>
           <a:lstStyle/>
           <a:p>
-            <a:pPr algn="r"/>
+            <a:pPr algn="ctr"/>
             <a:r>
               <a:rPr sz="1400" b="1" i="0">
                 <a:solidFill>
-                  <a:srgbClr val="06D676"/>
+                  <a:srgbClr val="FFFFFF"/>
                 </a:solidFill>
               </a:rPr>
-              <a:t>0.801</a:t>
-            </a:r>
-          </a:p>
-        </p:txBody>
-      </p:sp>
-      <p:sp>
-        <p:nvSpPr>
-          <p:cNvPr id="10" name="Rectangle 9"/>
+              <a:t>Road Class alone</a:t>
+            </a:r>
+          </a:p>
+        </p:txBody>
+      </p:sp>
+      <p:sp>
+        <p:nvSpPr>
+          <p:cNvPr id="12" name="TextBox 11"/>
+          <p:cNvSpPr txBox="1"/>
+          <p:nvPr/>
+        </p:nvSpPr>
+        <p:spPr>
+          <a:xfrm>
+            <a:off x="4114800" y="2633472"/>
+            <a:ext cx="3474720" cy="347472"/>
+          </a:xfrm>
+          <a:prstGeom prst="rect">
+            <a:avLst/>
+          </a:prstGeom>
+          <a:noFill/>
+        </p:spPr>
+        <p:txBody>
+          <a:bodyPr wrap="square">
+            <a:spAutoFit/>
+          </a:bodyPr>
+          <a:lstStyle/>
+          <a:p>
+            <a:pPr algn="ctr"/>
+            <a:r>
+              <a:rPr sz="1100" b="0" i="1">
+                <a:solidFill>
+                  <a:srgbClr val="B8D8F0"/>
+                </a:solidFill>
+              </a:rPr>
+              <a:t>Baseline R²</a:t>
+            </a:r>
+          </a:p>
+        </p:txBody>
+      </p:sp>
+      <p:sp>
+        <p:nvSpPr>
+          <p:cNvPr id="13" name="Rounded Rectangle 12"/>
           <p:cNvSpPr/>
           <p:nvPr/>
         </p:nvSpPr>
         <p:spPr>
           <a:xfrm>
-            <a:off x="502920" y="2423160"/>
-            <a:ext cx="6309360" cy="594360"/>
-          </a:xfrm>
-          <a:prstGeom prst="rect">
-            <a:avLst/>
+            <a:off x="7863840" y="1280160"/>
+            <a:ext cx="3776472" cy="1828800"/>
+          </a:xfrm>
+          <a:prstGeom prst="roundRect">
+            <a:avLst>
+              <a:gd name="adj" fmla="val 8000"/>
+            </a:avLst>
           </a:prstGeom>
           <a:solidFill>
-            <a:srgbClr val="064060"/>
+            <a:srgbClr val="2C3E55"/>
           </a:solidFill>
           <a:ln>
             <a:noFill/>
@@ -5273,14 +7486,14 @@
       </p:sp>
       <p:sp>
         <p:nvSpPr>
-          <p:cNvPr id="11" name="TextBox 10"/>
+          <p:cNvPr id="14" name="TextBox 13"/>
           <p:cNvSpPr txBox="1"/>
           <p:nvPr/>
         </p:nvSpPr>
         <p:spPr>
           <a:xfrm>
-            <a:off x="594360" y="2496312"/>
-            <a:ext cx="5029200" cy="457200"/>
+            <a:off x="7863840" y="1371600"/>
+            <a:ext cx="3776472" cy="822960"/>
           </a:xfrm>
           <a:prstGeom prst="rect">
             <a:avLst/>
@@ -5293,28 +7506,28 @@
           </a:bodyPr>
           <a:lstStyle/>
           <a:p>
-            <a:pPr algn="l"/>
-            <a:r>
-              <a:rPr sz="1300" b="0" i="0">
-                <a:solidFill>
-                  <a:srgbClr val="06D676"/>
+            <a:pPr algn="ctr"/>
+            <a:r>
+              <a:rPr sz="4400" b="1" i="0">
+                <a:solidFill>
+                  <a:srgbClr val="00C2E0"/>
                 </a:solidFill>
               </a:rPr>
-              <a:t>Road Class + K-Means</a:t>
-            </a:r>
-          </a:p>
-        </p:txBody>
-      </p:sp>
-      <p:sp>
-        <p:nvSpPr>
-          <p:cNvPr id="12" name="TextBox 11"/>
+              <a:t>+0.020</a:t>
+            </a:r>
+          </a:p>
+        </p:txBody>
+      </p:sp>
+      <p:sp>
+        <p:nvSpPr>
+          <p:cNvPr id="15" name="TextBox 14"/>
           <p:cNvSpPr txBox="1"/>
           <p:nvPr/>
         </p:nvSpPr>
         <p:spPr>
           <a:xfrm>
-            <a:off x="5394960" y="2496312"/>
-            <a:ext cx="822960" cy="457200"/>
+            <a:off x="7863840" y="2194560"/>
+            <a:ext cx="3776472" cy="457200"/>
           </a:xfrm>
           <a:prstGeom prst="rect">
             <a:avLst/>
@@ -5327,28 +7540,28 @@
           </a:bodyPr>
           <a:lstStyle/>
           <a:p>
-            <a:pPr algn="r"/>
+            <a:pPr algn="ctr"/>
             <a:r>
               <a:rPr sz="1400" b="1" i="0">
                 <a:solidFill>
-                  <a:srgbClr val="06D676"/>
+                  <a:srgbClr val="FFFFFF"/>
                 </a:solidFill>
               </a:rPr>
-              <a:t>0.801</a:t>
-            </a:r>
-          </a:p>
-        </p:txBody>
-      </p:sp>
-      <p:sp>
-        <p:nvSpPr>
-          <p:cNvPr id="13" name="TextBox 12"/>
+              <a:t>Improvement</a:t>
+            </a:r>
+          </a:p>
+        </p:txBody>
+      </p:sp>
+      <p:sp>
+        <p:nvSpPr>
+          <p:cNvPr id="16" name="TextBox 15"/>
           <p:cNvSpPr txBox="1"/>
           <p:nvPr/>
         </p:nvSpPr>
         <p:spPr>
           <a:xfrm>
-            <a:off x="594360" y="3136391"/>
-            <a:ext cx="5029200" cy="457200"/>
+            <a:off x="7863840" y="2633472"/>
+            <a:ext cx="3776472" cy="347472"/>
           </a:xfrm>
           <a:prstGeom prst="rect">
             <a:avLst/>
@@ -5361,272 +7574,36 @@
           </a:bodyPr>
           <a:lstStyle/>
           <a:p>
-            <a:pPr algn="l"/>
-            <a:r>
-              <a:rPr sz="1300" b="0" i="0">
-                <a:solidFill>
-                  <a:srgbClr val="FFD166"/>
+            <a:pPr algn="ctr"/>
+            <a:r>
+              <a:rPr sz="1100" b="0" i="1">
+                <a:solidFill>
+                  <a:srgbClr val="B8D8F0"/>
                 </a:solidFill>
               </a:rPr>
-              <a:t>Road Class alone</a:t>
-            </a:r>
-          </a:p>
-        </p:txBody>
-      </p:sp>
-      <p:sp>
-        <p:nvSpPr>
-          <p:cNvPr id="14" name="TextBox 13"/>
-          <p:cNvSpPr txBox="1"/>
-          <p:nvPr/>
-        </p:nvSpPr>
-        <p:spPr>
-          <a:xfrm>
-            <a:off x="5394960" y="3136391"/>
-            <a:ext cx="822960" cy="457200"/>
-          </a:xfrm>
-          <a:prstGeom prst="rect">
-            <a:avLst/>
-          </a:prstGeom>
-          <a:noFill/>
-        </p:spPr>
-        <p:txBody>
-          <a:bodyPr wrap="square">
-            <a:spAutoFit/>
-          </a:bodyPr>
-          <a:lstStyle/>
-          <a:p>
-            <a:pPr algn="r"/>
-            <a:r>
-              <a:rPr sz="1400" b="1" i="0">
-                <a:solidFill>
-                  <a:srgbClr val="FFD166"/>
-                </a:solidFill>
-              </a:rPr>
-              <a:t>0.781</a:t>
-            </a:r>
-          </a:p>
-        </p:txBody>
-      </p:sp>
-      <p:sp>
-        <p:nvSpPr>
-          <p:cNvPr id="15" name="TextBox 14"/>
-          <p:cNvSpPr txBox="1"/>
-          <p:nvPr/>
-        </p:nvSpPr>
-        <p:spPr>
-          <a:xfrm>
-            <a:off x="594360" y="3776472"/>
-            <a:ext cx="5029200" cy="457200"/>
-          </a:xfrm>
-          <a:prstGeom prst="rect">
-            <a:avLst/>
-          </a:prstGeom>
-          <a:noFill/>
-        </p:spPr>
-        <p:txBody>
-          <a:bodyPr wrap="square">
-            <a:spAutoFit/>
-          </a:bodyPr>
-          <a:lstStyle/>
-          <a:p>
-            <a:pPr algn="l"/>
-            <a:r>
-              <a:rPr sz="1300" b="0" i="0">
-                <a:solidFill>
-                  <a:srgbClr val="CAE9FF"/>
-                </a:solidFill>
-              </a:rPr>
-              <a:t>K-Means clusters only</a:t>
-            </a:r>
-          </a:p>
-        </p:txBody>
-      </p:sp>
-      <p:sp>
-        <p:nvSpPr>
-          <p:cNvPr id="16" name="TextBox 15"/>
-          <p:cNvSpPr txBox="1"/>
-          <p:nvPr/>
-        </p:nvSpPr>
-        <p:spPr>
-          <a:xfrm>
-            <a:off x="5394960" y="3776472"/>
-            <a:ext cx="822960" cy="457200"/>
-          </a:xfrm>
-          <a:prstGeom prst="rect">
-            <a:avLst/>
-          </a:prstGeom>
-          <a:noFill/>
-        </p:spPr>
-        <p:txBody>
-          <a:bodyPr wrap="square">
-            <a:spAutoFit/>
-          </a:bodyPr>
-          <a:lstStyle/>
-          <a:p>
-            <a:pPr algn="r"/>
-            <a:r>
-              <a:rPr sz="1400" b="1" i="0">
-                <a:solidFill>
-                  <a:srgbClr val="CAE9FF"/>
-                </a:solidFill>
-              </a:rPr>
-              <a:t>0.713</a:t>
-            </a:r>
-          </a:p>
-        </p:txBody>
-      </p:sp>
-      <p:sp>
-        <p:nvSpPr>
-          <p:cNvPr id="17" name="TextBox 16"/>
-          <p:cNvSpPr txBox="1"/>
-          <p:nvPr/>
-        </p:nvSpPr>
-        <p:spPr>
-          <a:xfrm>
-            <a:off x="594360" y="4416552"/>
-            <a:ext cx="5029200" cy="457200"/>
-          </a:xfrm>
-          <a:prstGeom prst="rect">
-            <a:avLst/>
-          </a:prstGeom>
-          <a:noFill/>
-        </p:spPr>
-        <p:txBody>
-          <a:bodyPr wrap="square">
-            <a:spAutoFit/>
-          </a:bodyPr>
-          <a:lstStyle/>
-          <a:p>
-            <a:pPr algn="l"/>
-            <a:r>
-              <a:rPr sz="1300" b="0" i="0">
-                <a:solidFill>
-                  <a:srgbClr val="CAE9FF"/>
-                </a:solidFill>
-              </a:rPr>
-              <a:t>HDBSCAN clusters only</a:t>
-            </a:r>
-          </a:p>
-        </p:txBody>
-      </p:sp>
-      <p:sp>
-        <p:nvSpPr>
-          <p:cNvPr id="18" name="TextBox 17"/>
-          <p:cNvSpPr txBox="1"/>
-          <p:nvPr/>
-        </p:nvSpPr>
-        <p:spPr>
-          <a:xfrm>
-            <a:off x="5394960" y="4416552"/>
-            <a:ext cx="822960" cy="457200"/>
-          </a:xfrm>
-          <a:prstGeom prst="rect">
-            <a:avLst/>
-          </a:prstGeom>
-          <a:noFill/>
-        </p:spPr>
-        <p:txBody>
-          <a:bodyPr wrap="square">
-            <a:spAutoFit/>
-          </a:bodyPr>
-          <a:lstStyle/>
-          <a:p>
-            <a:pPr algn="r"/>
-            <a:r>
-              <a:rPr sz="1400" b="1" i="0">
-                <a:solidFill>
-                  <a:srgbClr val="CAE9FF"/>
-                </a:solidFill>
-              </a:rPr>
-              <a:t>0.711</a:t>
-            </a:r>
-          </a:p>
-        </p:txBody>
-      </p:sp>
-      <p:sp>
-        <p:nvSpPr>
-          <p:cNvPr id="19" name="TextBox 18"/>
-          <p:cNvSpPr txBox="1"/>
-          <p:nvPr/>
-        </p:nvSpPr>
-        <p:spPr>
-          <a:xfrm>
-            <a:off x="594360" y="5056632"/>
-            <a:ext cx="5029200" cy="457200"/>
-          </a:xfrm>
-          <a:prstGeom prst="rect">
-            <a:avLst/>
-          </a:prstGeom>
-          <a:noFill/>
-        </p:spPr>
-        <p:txBody>
-          <a:bodyPr wrap="square">
-            <a:spAutoFit/>
-          </a:bodyPr>
-          <a:lstStyle/>
-          <a:p>
-            <a:pPr algn="l"/>
-            <a:r>
-              <a:rPr sz="1300" b="0" i="0">
-                <a:solidFill>
-                  <a:srgbClr val="CAE9FF"/>
-                </a:solidFill>
-              </a:rPr>
-              <a:t>No clusters (baseline)</a:t>
-            </a:r>
-          </a:p>
-        </p:txBody>
-      </p:sp>
-      <p:sp>
-        <p:nvSpPr>
-          <p:cNvPr id="20" name="TextBox 19"/>
-          <p:cNvSpPr txBox="1"/>
-          <p:nvPr/>
-        </p:nvSpPr>
-        <p:spPr>
-          <a:xfrm>
-            <a:off x="5394960" y="5056632"/>
-            <a:ext cx="822960" cy="457200"/>
-          </a:xfrm>
-          <a:prstGeom prst="rect">
-            <a:avLst/>
-          </a:prstGeom>
-          <a:noFill/>
-        </p:spPr>
-        <p:txBody>
-          <a:bodyPr wrap="square">
-            <a:spAutoFit/>
-          </a:bodyPr>
-          <a:lstStyle/>
-          <a:p>
-            <a:pPr algn="r"/>
-            <a:r>
-              <a:rPr sz="1400" b="1" i="0">
-                <a:solidFill>
-                  <a:srgbClr val="CAE9FF"/>
-                </a:solidFill>
-              </a:rPr>
-              <a:t>0.709</a:t>
-            </a:r>
-          </a:p>
-        </p:txBody>
-      </p:sp>
-      <p:sp>
-        <p:nvSpPr>
-          <p:cNvPr id="21" name="Rectangle 20"/>
+              <a:t>From adding clusters</a:t>
+            </a:r>
+          </a:p>
+        </p:txBody>
+      </p:sp>
+      <p:sp>
+        <p:nvSpPr>
+          <p:cNvPr id="17" name="Rounded Rectangle 16"/>
           <p:cNvSpPr/>
           <p:nvPr/>
         </p:nvSpPr>
         <p:spPr>
           <a:xfrm>
-            <a:off x="7132320" y="1188720"/>
-            <a:ext cx="4754880" cy="4572000"/>
-          </a:xfrm>
-          <a:prstGeom prst="rect">
-            <a:avLst/>
+            <a:off x="365760" y="3383280"/>
+            <a:ext cx="11457432" cy="3246120"/>
+          </a:xfrm>
+          <a:prstGeom prst="roundRect">
+            <a:avLst>
+              <a:gd name="adj" fmla="val 8000"/>
+            </a:avLst>
           </a:prstGeom>
           <a:solidFill>
-            <a:srgbClr val="0F3C78"/>
+            <a:srgbClr val="112840"/>
           </a:solidFill>
           <a:ln>
             <a:noFill/>
@@ -5656,14 +7633,14 @@
       </p:sp>
       <p:sp>
         <p:nvSpPr>
-          <p:cNvPr id="22" name="TextBox 21"/>
+          <p:cNvPr id="18" name="TextBox 17"/>
           <p:cNvSpPr txBox="1"/>
           <p:nvPr/>
         </p:nvSpPr>
         <p:spPr>
           <a:xfrm>
-            <a:off x="7223760" y="1234440"/>
-            <a:ext cx="4572000" cy="457200"/>
+            <a:off x="640080" y="3474720"/>
+            <a:ext cx="3657600" cy="457200"/>
           </a:xfrm>
           <a:prstGeom prst="rect">
             <a:avLst/>
@@ -5678,26 +7655,112 @@
           <a:p>
             <a:pPr algn="l"/>
             <a:r>
-              <a:rPr sz="1500" b="1" i="0">
-                <a:solidFill>
-                  <a:srgbClr val="00B4D8"/>
+              <a:rPr sz="1300" b="1" i="0">
+                <a:solidFill>
+                  <a:srgbClr val="00C2E0"/>
                 </a:solidFill>
               </a:rPr>
-              <a:t>What this means</a:t>
-            </a:r>
-          </a:p>
-        </p:txBody>
-      </p:sp>
-      <p:sp>
-        <p:nvSpPr>
-          <p:cNvPr id="23" name="TextBox 22"/>
+              <a:t>R²  by feature set</a:t>
+            </a:r>
+          </a:p>
+        </p:txBody>
+      </p:sp>
+      <p:sp>
+        <p:nvSpPr>
+          <p:cNvPr id="19" name="Rectangle 18"/>
+          <p:cNvSpPr/>
+          <p:nvPr/>
+        </p:nvSpPr>
+        <p:spPr>
+          <a:xfrm>
+            <a:off x="4754880" y="3474720"/>
+            <a:ext cx="6858000" cy="402336"/>
+          </a:xfrm>
+          <a:prstGeom prst="rect">
+            <a:avLst/>
+          </a:prstGeom>
+          <a:solidFill>
+            <a:srgbClr val="1B3A55"/>
+          </a:solidFill>
+          <a:ln>
+            <a:noFill/>
+          </a:ln>
+        </p:spPr>
+        <p:style>
+          <a:lnRef idx="1">
+            <a:schemeClr val="accent1"/>
+          </a:lnRef>
+          <a:fillRef idx="3">
+            <a:schemeClr val="accent1"/>
+          </a:fillRef>
+          <a:effectRef idx="2">
+            <a:schemeClr val="accent1"/>
+          </a:effectRef>
+          <a:fontRef idx="minor">
+            <a:schemeClr val="lt1"/>
+          </a:fontRef>
+        </p:style>
+        <p:txBody>
+          <a:bodyPr rtlCol="0" anchor="ctr"/>
+          <a:lstStyle/>
+          <a:p>
+            <a:pPr algn="ctr"/>
+          </a:p>
+        </p:txBody>
+      </p:sp>
+      <p:sp>
+        <p:nvSpPr>
+          <p:cNvPr id="20" name="Rectangle 19"/>
+          <p:cNvSpPr/>
+          <p:nvPr/>
+        </p:nvSpPr>
+        <p:spPr>
+          <a:xfrm>
+            <a:off x="4754880" y="3474720"/>
+            <a:ext cx="6146800" cy="402336"/>
+          </a:xfrm>
+          <a:prstGeom prst="rect">
+            <a:avLst/>
+          </a:prstGeom>
+          <a:solidFill>
+            <a:srgbClr val="00C974"/>
+          </a:solidFill>
+          <a:ln>
+            <a:noFill/>
+          </a:ln>
+        </p:spPr>
+        <p:style>
+          <a:lnRef idx="1">
+            <a:schemeClr val="accent1"/>
+          </a:lnRef>
+          <a:fillRef idx="3">
+            <a:schemeClr val="accent1"/>
+          </a:fillRef>
+          <a:effectRef idx="2">
+            <a:schemeClr val="accent1"/>
+          </a:effectRef>
+          <a:fontRef idx="minor">
+            <a:schemeClr val="lt1"/>
+          </a:fontRef>
+        </p:style>
+        <p:txBody>
+          <a:bodyPr rtlCol="0" anchor="ctr"/>
+          <a:lstStyle/>
+          <a:p>
+            <a:pPr algn="ctr"/>
+          </a:p>
+        </p:txBody>
+      </p:sp>
+      <p:sp>
+        <p:nvSpPr>
+          <p:cNvPr id="21" name="TextBox 20"/>
           <p:cNvSpPr txBox="1"/>
           <p:nvPr/>
         </p:nvSpPr>
         <p:spPr>
           <a:xfrm>
-            <a:off x="7223760" y="1737360"/>
-            <a:ext cx="4572000" cy="960120"/>
+            <a:off x="502920" y="3520439"/>
+            <a:ext cx="4160520" cy="356616"/>
           </a:xfrm>
           <a:prstGeom prst="rect">
             <a:avLst/>
@@ -5712,26 +7775,26 @@
           <a:p>
             <a:pPr algn="l"/>
             <a:r>
-              <a:rPr sz="1300" b="0" i="0">
+              <a:rPr sz="1200" b="1" i="0">
                 <a:solidFill>
                   <a:srgbClr val="FFFFFF"/>
                 </a:solidFill>
               </a:rPr>
-              <a:t>•   Adding satellite clusters ON TOP of Road Class improves R² from 0.781 to 0.801</a:t>
-            </a:r>
-          </a:p>
-        </p:txBody>
-      </p:sp>
-      <p:sp>
-        <p:nvSpPr>
-          <p:cNvPr id="24" name="TextBox 23"/>
+              <a:t>RC + GMM clusters</a:t>
+            </a:r>
+          </a:p>
+        </p:txBody>
+      </p:sp>
+      <p:sp>
+        <p:nvSpPr>
+          <p:cNvPr id="22" name="TextBox 21"/>
           <p:cNvSpPr txBox="1"/>
           <p:nvPr/>
         </p:nvSpPr>
         <p:spPr>
           <a:xfrm>
-            <a:off x="7223760" y="2606039"/>
-            <a:ext cx="4572000" cy="960120"/>
+            <a:off x="10974832" y="3520439"/>
+            <a:ext cx="640080" cy="356616"/>
           </a:xfrm>
           <a:prstGeom prst="rect">
             <a:avLst/>
@@ -5746,13 +7809,99 @@
           <a:p>
             <a:pPr algn="l"/>
             <a:r>
-              <a:rPr sz="1300" b="0" i="0">
-                <a:solidFill>
-                  <a:srgbClr val="FFFFFF"/>
+              <a:rPr sz="1200" b="1" i="0">
+                <a:solidFill>
+                  <a:srgbClr val="00C974"/>
                 </a:solidFill>
               </a:rPr>
-              <a:t>•   That +0.020 represents the visual context Road Class does not capture</a:t>
-            </a:r>
+              <a:t>0.801</a:t>
+            </a:r>
+          </a:p>
+        </p:txBody>
+      </p:sp>
+      <p:sp>
+        <p:nvSpPr>
+          <p:cNvPr id="23" name="Rectangle 22"/>
+          <p:cNvSpPr/>
+          <p:nvPr/>
+        </p:nvSpPr>
+        <p:spPr>
+          <a:xfrm>
+            <a:off x="4754880" y="3941063"/>
+            <a:ext cx="6858000" cy="402336"/>
+          </a:xfrm>
+          <a:prstGeom prst="rect">
+            <a:avLst/>
+          </a:prstGeom>
+          <a:solidFill>
+            <a:srgbClr val="1B3A55"/>
+          </a:solidFill>
+          <a:ln>
+            <a:noFill/>
+          </a:ln>
+        </p:spPr>
+        <p:style>
+          <a:lnRef idx="1">
+            <a:schemeClr val="accent1"/>
+          </a:lnRef>
+          <a:fillRef idx="3">
+            <a:schemeClr val="accent1"/>
+          </a:fillRef>
+          <a:effectRef idx="2">
+            <a:schemeClr val="accent1"/>
+          </a:effectRef>
+          <a:fontRef idx="minor">
+            <a:schemeClr val="lt1"/>
+          </a:fontRef>
+        </p:style>
+        <p:txBody>
+          <a:bodyPr rtlCol="0" anchor="ctr"/>
+          <a:lstStyle/>
+          <a:p>
+            <a:pPr algn="ctr"/>
+          </a:p>
+        </p:txBody>
+      </p:sp>
+      <p:sp>
+        <p:nvSpPr>
+          <p:cNvPr id="24" name="Rectangle 23"/>
+          <p:cNvSpPr/>
+          <p:nvPr/>
+        </p:nvSpPr>
+        <p:spPr>
+          <a:xfrm>
+            <a:off x="4754880" y="3941063"/>
+            <a:ext cx="6146800" cy="402336"/>
+          </a:xfrm>
+          <a:prstGeom prst="rect">
+            <a:avLst/>
+          </a:prstGeom>
+          <a:solidFill>
+            <a:srgbClr val="00C974"/>
+          </a:solidFill>
+          <a:ln>
+            <a:noFill/>
+          </a:ln>
+        </p:spPr>
+        <p:style>
+          <a:lnRef idx="1">
+            <a:schemeClr val="accent1"/>
+          </a:lnRef>
+          <a:fillRef idx="3">
+            <a:schemeClr val="accent1"/>
+          </a:fillRef>
+          <a:effectRef idx="2">
+            <a:schemeClr val="accent1"/>
+          </a:effectRef>
+          <a:fontRef idx="minor">
+            <a:schemeClr val="lt1"/>
+          </a:fontRef>
+        </p:style>
+        <p:txBody>
+          <a:bodyPr rtlCol="0" anchor="ctr"/>
+          <a:lstStyle/>
+          <a:p>
+            <a:pPr algn="ctr"/>
           </a:p>
         </p:txBody>
       </p:sp>
@@ -5764,8 +7913,8 @@
         </p:nvSpPr>
         <p:spPr>
           <a:xfrm>
-            <a:off x="7223760" y="3474720"/>
-            <a:ext cx="4572000" cy="960120"/>
+            <a:off x="502920" y="3986783"/>
+            <a:ext cx="4160520" cy="356616"/>
           </a:xfrm>
           <a:prstGeom prst="rect">
             <a:avLst/>
@@ -5780,12 +7929,12 @@
           <a:p>
             <a:pPr algn="l"/>
             <a:r>
-              <a:rPr sz="1300" b="0" i="0">
-                <a:solidFill>
-                  <a:srgbClr val="FFD166"/>
+              <a:rPr sz="1200" b="1" i="0">
+                <a:solidFill>
+                  <a:srgbClr val="FFFFFF"/>
                 </a:solidFill>
               </a:rPr>
-              <a:t>•   Clusters alone (~0.71) do not replace Road Class — they supplement it</a:t>
+              <a:t>RC + K-Means</a:t>
             </a:r>
           </a:p>
         </p:txBody>
@@ -5798,8 +7947,8 @@
         </p:nvSpPr>
         <p:spPr>
           <a:xfrm>
-            <a:off x="7223760" y="4343400"/>
-            <a:ext cx="4572000" cy="960120"/>
+            <a:off x="10974832" y="3986783"/>
+            <a:ext cx="640080" cy="356616"/>
           </a:xfrm>
           <a:prstGeom prst="rect">
             <a:avLst/>
@@ -5814,13 +7963,672 @@
           <a:p>
             <a:pPr algn="l"/>
             <a:r>
-              <a:rPr sz="1300" b="0" i="0">
-                <a:solidFill>
-                  <a:srgbClr val="FFFFFF"/>
+              <a:rPr sz="1200" b="1" i="0">
+                <a:solidFill>
+                  <a:srgbClr val="00C974"/>
                 </a:solidFill>
               </a:rPr>
-              <a:t>•   Best cluster count: GMM with 21 groups or K-Means with 18 groups</a:t>
-            </a:r>
+              <a:t>0.801</a:t>
+            </a:r>
+          </a:p>
+        </p:txBody>
+      </p:sp>
+      <p:sp>
+        <p:nvSpPr>
+          <p:cNvPr id="27" name="Rectangle 26"/>
+          <p:cNvSpPr/>
+          <p:nvPr/>
+        </p:nvSpPr>
+        <p:spPr>
+          <a:xfrm>
+            <a:off x="4754880" y="4407408"/>
+            <a:ext cx="6858000" cy="402336"/>
+          </a:xfrm>
+          <a:prstGeom prst="rect">
+            <a:avLst/>
+          </a:prstGeom>
+          <a:solidFill>
+            <a:srgbClr val="112840"/>
+          </a:solidFill>
+          <a:ln>
+            <a:noFill/>
+          </a:ln>
+        </p:spPr>
+        <p:style>
+          <a:lnRef idx="1">
+            <a:schemeClr val="accent1"/>
+          </a:lnRef>
+          <a:fillRef idx="3">
+            <a:schemeClr val="accent1"/>
+          </a:fillRef>
+          <a:effectRef idx="2">
+            <a:schemeClr val="accent1"/>
+          </a:effectRef>
+          <a:fontRef idx="minor">
+            <a:schemeClr val="lt1"/>
+          </a:fontRef>
+        </p:style>
+        <p:txBody>
+          <a:bodyPr rtlCol="0" anchor="ctr"/>
+          <a:lstStyle/>
+          <a:p>
+            <a:pPr algn="ctr"/>
+          </a:p>
+        </p:txBody>
+      </p:sp>
+      <p:sp>
+        <p:nvSpPr>
+          <p:cNvPr id="28" name="Rectangle 27"/>
+          <p:cNvSpPr/>
+          <p:nvPr/>
+        </p:nvSpPr>
+        <p:spPr>
+          <a:xfrm>
+            <a:off x="4754880" y="4407408"/>
+            <a:ext cx="5130800" cy="402336"/>
+          </a:xfrm>
+          <a:prstGeom prst="rect">
+            <a:avLst/>
+          </a:prstGeom>
+          <a:solidFill>
+            <a:srgbClr val="FFCA3A"/>
+          </a:solidFill>
+          <a:ln>
+            <a:noFill/>
+          </a:ln>
+        </p:spPr>
+        <p:style>
+          <a:lnRef idx="1">
+            <a:schemeClr val="accent1"/>
+          </a:lnRef>
+          <a:fillRef idx="3">
+            <a:schemeClr val="accent1"/>
+          </a:fillRef>
+          <a:effectRef idx="2">
+            <a:schemeClr val="accent1"/>
+          </a:effectRef>
+          <a:fontRef idx="minor">
+            <a:schemeClr val="lt1"/>
+          </a:fontRef>
+        </p:style>
+        <p:txBody>
+          <a:bodyPr rtlCol="0" anchor="ctr"/>
+          <a:lstStyle/>
+          <a:p>
+            <a:pPr algn="ctr"/>
+          </a:p>
+        </p:txBody>
+      </p:sp>
+      <p:sp>
+        <p:nvSpPr>
+          <p:cNvPr id="29" name="TextBox 28"/>
+          <p:cNvSpPr txBox="1"/>
+          <p:nvPr/>
+        </p:nvSpPr>
+        <p:spPr>
+          <a:xfrm>
+            <a:off x="502920" y="4453128"/>
+            <a:ext cx="4160520" cy="356616"/>
+          </a:xfrm>
+          <a:prstGeom prst="rect">
+            <a:avLst/>
+          </a:prstGeom>
+          <a:noFill/>
+        </p:spPr>
+        <p:txBody>
+          <a:bodyPr wrap="square">
+            <a:spAutoFit/>
+          </a:bodyPr>
+          <a:lstStyle/>
+          <a:p>
+            <a:pPr algn="l"/>
+            <a:r>
+              <a:rPr sz="1200" b="0" i="0">
+                <a:solidFill>
+                  <a:srgbClr val="B8D8F0"/>
+                </a:solidFill>
+              </a:rPr>
+              <a:t>Road Class only</a:t>
+            </a:r>
+          </a:p>
+        </p:txBody>
+      </p:sp>
+      <p:sp>
+        <p:nvSpPr>
+          <p:cNvPr id="30" name="TextBox 29"/>
+          <p:cNvSpPr txBox="1"/>
+          <p:nvPr/>
+        </p:nvSpPr>
+        <p:spPr>
+          <a:xfrm>
+            <a:off x="9958832" y="4453128"/>
+            <a:ext cx="640080" cy="356616"/>
+          </a:xfrm>
+          <a:prstGeom prst="rect">
+            <a:avLst/>
+          </a:prstGeom>
+          <a:noFill/>
+        </p:spPr>
+        <p:txBody>
+          <a:bodyPr wrap="square">
+            <a:spAutoFit/>
+          </a:bodyPr>
+          <a:lstStyle/>
+          <a:p>
+            <a:pPr algn="l"/>
+            <a:r>
+              <a:rPr sz="1200" b="0" i="0">
+                <a:solidFill>
+                  <a:srgbClr val="FFCA3A"/>
+                </a:solidFill>
+              </a:rPr>
+              <a:t>0.781</a:t>
+            </a:r>
+          </a:p>
+        </p:txBody>
+      </p:sp>
+      <p:sp>
+        <p:nvSpPr>
+          <p:cNvPr id="31" name="Rectangle 30"/>
+          <p:cNvSpPr/>
+          <p:nvPr/>
+        </p:nvSpPr>
+        <p:spPr>
+          <a:xfrm>
+            <a:off x="4754880" y="4873752"/>
+            <a:ext cx="6858000" cy="402336"/>
+          </a:xfrm>
+          <a:prstGeom prst="rect">
+            <a:avLst/>
+          </a:prstGeom>
+          <a:solidFill>
+            <a:srgbClr val="112840"/>
+          </a:solidFill>
+          <a:ln>
+            <a:noFill/>
+          </a:ln>
+        </p:spPr>
+        <p:style>
+          <a:lnRef idx="1">
+            <a:schemeClr val="accent1"/>
+          </a:lnRef>
+          <a:fillRef idx="3">
+            <a:schemeClr val="accent1"/>
+          </a:fillRef>
+          <a:effectRef idx="2">
+            <a:schemeClr val="accent1"/>
+          </a:effectRef>
+          <a:fontRef idx="minor">
+            <a:schemeClr val="lt1"/>
+          </a:fontRef>
+        </p:style>
+        <p:txBody>
+          <a:bodyPr rtlCol="0" anchor="ctr"/>
+          <a:lstStyle/>
+          <a:p>
+            <a:pPr algn="ctr"/>
+          </a:p>
+        </p:txBody>
+      </p:sp>
+      <p:sp>
+        <p:nvSpPr>
+          <p:cNvPr id="32" name="Rectangle 31"/>
+          <p:cNvSpPr/>
+          <p:nvPr/>
+        </p:nvSpPr>
+        <p:spPr>
+          <a:xfrm>
+            <a:off x="4754880" y="4873752"/>
+            <a:ext cx="1676399" cy="402336"/>
+          </a:xfrm>
+          <a:prstGeom prst="rect">
+            <a:avLst/>
+          </a:prstGeom>
+          <a:solidFill>
+            <a:srgbClr val="B8D8F0"/>
+          </a:solidFill>
+          <a:ln>
+            <a:noFill/>
+          </a:ln>
+        </p:spPr>
+        <p:style>
+          <a:lnRef idx="1">
+            <a:schemeClr val="accent1"/>
+          </a:lnRef>
+          <a:fillRef idx="3">
+            <a:schemeClr val="accent1"/>
+          </a:fillRef>
+          <a:effectRef idx="2">
+            <a:schemeClr val="accent1"/>
+          </a:effectRef>
+          <a:fontRef idx="minor">
+            <a:schemeClr val="lt1"/>
+          </a:fontRef>
+        </p:style>
+        <p:txBody>
+          <a:bodyPr rtlCol="0" anchor="ctr"/>
+          <a:lstStyle/>
+          <a:p>
+            <a:pPr algn="ctr"/>
+          </a:p>
+        </p:txBody>
+      </p:sp>
+      <p:sp>
+        <p:nvSpPr>
+          <p:cNvPr id="33" name="TextBox 32"/>
+          <p:cNvSpPr txBox="1"/>
+          <p:nvPr/>
+        </p:nvSpPr>
+        <p:spPr>
+          <a:xfrm>
+            <a:off x="502920" y="4919472"/>
+            <a:ext cx="4160520" cy="356616"/>
+          </a:xfrm>
+          <a:prstGeom prst="rect">
+            <a:avLst/>
+          </a:prstGeom>
+          <a:noFill/>
+        </p:spPr>
+        <p:txBody>
+          <a:bodyPr wrap="square">
+            <a:spAutoFit/>
+          </a:bodyPr>
+          <a:lstStyle/>
+          <a:p>
+            <a:pPr algn="l"/>
+            <a:r>
+              <a:rPr sz="1200" b="0" i="0">
+                <a:solidFill>
+                  <a:srgbClr val="B8D8F0"/>
+                </a:solidFill>
+              </a:rPr>
+              <a:t>K-Means only</a:t>
+            </a:r>
+          </a:p>
+        </p:txBody>
+      </p:sp>
+      <p:sp>
+        <p:nvSpPr>
+          <p:cNvPr id="34" name="TextBox 33"/>
+          <p:cNvSpPr txBox="1"/>
+          <p:nvPr/>
+        </p:nvSpPr>
+        <p:spPr>
+          <a:xfrm>
+            <a:off x="6504431" y="4919472"/>
+            <a:ext cx="640080" cy="356616"/>
+          </a:xfrm>
+          <a:prstGeom prst="rect">
+            <a:avLst/>
+          </a:prstGeom>
+          <a:noFill/>
+        </p:spPr>
+        <p:txBody>
+          <a:bodyPr wrap="square">
+            <a:spAutoFit/>
+          </a:bodyPr>
+          <a:lstStyle/>
+          <a:p>
+            <a:pPr algn="l"/>
+            <a:r>
+              <a:rPr sz="1200" b="0" i="0">
+                <a:solidFill>
+                  <a:srgbClr val="B8D8F0"/>
+                </a:solidFill>
+              </a:rPr>
+              <a:t>0.713</a:t>
+            </a:r>
+          </a:p>
+        </p:txBody>
+      </p:sp>
+      <p:sp>
+        <p:nvSpPr>
+          <p:cNvPr id="35" name="Rectangle 34"/>
+          <p:cNvSpPr/>
+          <p:nvPr/>
+        </p:nvSpPr>
+        <p:spPr>
+          <a:xfrm>
+            <a:off x="4754880" y="5340096"/>
+            <a:ext cx="6858000" cy="402336"/>
+          </a:xfrm>
+          <a:prstGeom prst="rect">
+            <a:avLst/>
+          </a:prstGeom>
+          <a:solidFill>
+            <a:srgbClr val="112840"/>
+          </a:solidFill>
+          <a:ln>
+            <a:noFill/>
+          </a:ln>
+        </p:spPr>
+        <p:style>
+          <a:lnRef idx="1">
+            <a:schemeClr val="accent1"/>
+          </a:lnRef>
+          <a:fillRef idx="3">
+            <a:schemeClr val="accent1"/>
+          </a:fillRef>
+          <a:effectRef idx="2">
+            <a:schemeClr val="accent1"/>
+          </a:effectRef>
+          <a:fontRef idx="minor">
+            <a:schemeClr val="lt1"/>
+          </a:fontRef>
+        </p:style>
+        <p:txBody>
+          <a:bodyPr rtlCol="0" anchor="ctr"/>
+          <a:lstStyle/>
+          <a:p>
+            <a:pPr algn="ctr"/>
+          </a:p>
+        </p:txBody>
+      </p:sp>
+      <p:sp>
+        <p:nvSpPr>
+          <p:cNvPr id="36" name="Rectangle 35"/>
+          <p:cNvSpPr/>
+          <p:nvPr/>
+        </p:nvSpPr>
+        <p:spPr>
+          <a:xfrm>
+            <a:off x="4754880" y="5340096"/>
+            <a:ext cx="1574799" cy="402336"/>
+          </a:xfrm>
+          <a:prstGeom prst="rect">
+            <a:avLst/>
+          </a:prstGeom>
+          <a:solidFill>
+            <a:srgbClr val="B8D8F0"/>
+          </a:solidFill>
+          <a:ln>
+            <a:noFill/>
+          </a:ln>
+        </p:spPr>
+        <p:style>
+          <a:lnRef idx="1">
+            <a:schemeClr val="accent1"/>
+          </a:lnRef>
+          <a:fillRef idx="3">
+            <a:schemeClr val="accent1"/>
+          </a:fillRef>
+          <a:effectRef idx="2">
+            <a:schemeClr val="accent1"/>
+          </a:effectRef>
+          <a:fontRef idx="minor">
+            <a:schemeClr val="lt1"/>
+          </a:fontRef>
+        </p:style>
+        <p:txBody>
+          <a:bodyPr rtlCol="0" anchor="ctr"/>
+          <a:lstStyle/>
+          <a:p>
+            <a:pPr algn="ctr"/>
+          </a:p>
+        </p:txBody>
+      </p:sp>
+      <p:sp>
+        <p:nvSpPr>
+          <p:cNvPr id="37" name="TextBox 36"/>
+          <p:cNvSpPr txBox="1"/>
+          <p:nvPr/>
+        </p:nvSpPr>
+        <p:spPr>
+          <a:xfrm>
+            <a:off x="502920" y="5385816"/>
+            <a:ext cx="4160520" cy="356616"/>
+          </a:xfrm>
+          <a:prstGeom prst="rect">
+            <a:avLst/>
+          </a:prstGeom>
+          <a:noFill/>
+        </p:spPr>
+        <p:txBody>
+          <a:bodyPr wrap="square">
+            <a:spAutoFit/>
+          </a:bodyPr>
+          <a:lstStyle/>
+          <a:p>
+            <a:pPr algn="l"/>
+            <a:r>
+              <a:rPr sz="1200" b="0" i="0">
+                <a:solidFill>
+                  <a:srgbClr val="B8D8F0"/>
+                </a:solidFill>
+              </a:rPr>
+              <a:t>HDBSCAN only</a:t>
+            </a:r>
+          </a:p>
+        </p:txBody>
+      </p:sp>
+      <p:sp>
+        <p:nvSpPr>
+          <p:cNvPr id="38" name="TextBox 37"/>
+          <p:cNvSpPr txBox="1"/>
+          <p:nvPr/>
+        </p:nvSpPr>
+        <p:spPr>
+          <a:xfrm>
+            <a:off x="6402831" y="5385816"/>
+            <a:ext cx="640080" cy="356616"/>
+          </a:xfrm>
+          <a:prstGeom prst="rect">
+            <a:avLst/>
+          </a:prstGeom>
+          <a:noFill/>
+        </p:spPr>
+        <p:txBody>
+          <a:bodyPr wrap="square">
+            <a:spAutoFit/>
+          </a:bodyPr>
+          <a:lstStyle/>
+          <a:p>
+            <a:pPr algn="l"/>
+            <a:r>
+              <a:rPr sz="1200" b="0" i="0">
+                <a:solidFill>
+                  <a:srgbClr val="B8D8F0"/>
+                </a:solidFill>
+              </a:rPr>
+              <a:t>0.711</a:t>
+            </a:r>
+          </a:p>
+        </p:txBody>
+      </p:sp>
+      <p:sp>
+        <p:nvSpPr>
+          <p:cNvPr id="39" name="Rectangle 38"/>
+          <p:cNvSpPr/>
+          <p:nvPr/>
+        </p:nvSpPr>
+        <p:spPr>
+          <a:xfrm>
+            <a:off x="4754880" y="5806440"/>
+            <a:ext cx="6858000" cy="402336"/>
+          </a:xfrm>
+          <a:prstGeom prst="rect">
+            <a:avLst/>
+          </a:prstGeom>
+          <a:solidFill>
+            <a:srgbClr val="112840"/>
+          </a:solidFill>
+          <a:ln>
+            <a:noFill/>
+          </a:ln>
+        </p:spPr>
+        <p:style>
+          <a:lnRef idx="1">
+            <a:schemeClr val="accent1"/>
+          </a:lnRef>
+          <a:fillRef idx="3">
+            <a:schemeClr val="accent1"/>
+          </a:fillRef>
+          <a:effectRef idx="2">
+            <a:schemeClr val="accent1"/>
+          </a:effectRef>
+          <a:fontRef idx="minor">
+            <a:schemeClr val="lt1"/>
+          </a:fontRef>
+        </p:style>
+        <p:txBody>
+          <a:bodyPr rtlCol="0" anchor="ctr"/>
+          <a:lstStyle/>
+          <a:p>
+            <a:pPr algn="ctr"/>
+          </a:p>
+        </p:txBody>
+      </p:sp>
+      <p:sp>
+        <p:nvSpPr>
+          <p:cNvPr id="40" name="Rectangle 39"/>
+          <p:cNvSpPr/>
+          <p:nvPr/>
+        </p:nvSpPr>
+        <p:spPr>
+          <a:xfrm>
+            <a:off x="4754880" y="5806440"/>
+            <a:ext cx="1473199" cy="402336"/>
+          </a:xfrm>
+          <a:prstGeom prst="rect">
+            <a:avLst/>
+          </a:prstGeom>
+          <a:solidFill>
+            <a:srgbClr val="2C3E55"/>
+          </a:solidFill>
+          <a:ln>
+            <a:noFill/>
+          </a:ln>
+        </p:spPr>
+        <p:style>
+          <a:lnRef idx="1">
+            <a:schemeClr val="accent1"/>
+          </a:lnRef>
+          <a:fillRef idx="3">
+            <a:schemeClr val="accent1"/>
+          </a:fillRef>
+          <a:effectRef idx="2">
+            <a:schemeClr val="accent1"/>
+          </a:effectRef>
+          <a:fontRef idx="minor">
+            <a:schemeClr val="lt1"/>
+          </a:fontRef>
+        </p:style>
+        <p:txBody>
+          <a:bodyPr rtlCol="0" anchor="ctr"/>
+          <a:lstStyle/>
+          <a:p>
+            <a:pPr algn="ctr"/>
+          </a:p>
+        </p:txBody>
+      </p:sp>
+      <p:sp>
+        <p:nvSpPr>
+          <p:cNvPr id="41" name="TextBox 40"/>
+          <p:cNvSpPr txBox="1"/>
+          <p:nvPr/>
+        </p:nvSpPr>
+        <p:spPr>
+          <a:xfrm>
+            <a:off x="502920" y="5852159"/>
+            <a:ext cx="4160520" cy="356616"/>
+          </a:xfrm>
+          <a:prstGeom prst="rect">
+            <a:avLst/>
+          </a:prstGeom>
+          <a:noFill/>
+        </p:spPr>
+        <p:txBody>
+          <a:bodyPr wrap="square">
+            <a:spAutoFit/>
+          </a:bodyPr>
+          <a:lstStyle/>
+          <a:p>
+            <a:pPr algn="l"/>
+            <a:r>
+              <a:rPr sz="1200" b="0" i="0">
+                <a:solidFill>
+                  <a:srgbClr val="B8D8F0"/>
+                </a:solidFill>
+              </a:rPr>
+              <a:t>Baseline (no clusters)</a:t>
+            </a:r>
+          </a:p>
+        </p:txBody>
+      </p:sp>
+      <p:sp>
+        <p:nvSpPr>
+          <p:cNvPr id="42" name="TextBox 41"/>
+          <p:cNvSpPr txBox="1"/>
+          <p:nvPr/>
+        </p:nvSpPr>
+        <p:spPr>
+          <a:xfrm>
+            <a:off x="6301231" y="5852159"/>
+            <a:ext cx="640080" cy="356616"/>
+          </a:xfrm>
+          <a:prstGeom prst="rect">
+            <a:avLst/>
+          </a:prstGeom>
+          <a:noFill/>
+        </p:spPr>
+        <p:txBody>
+          <a:bodyPr wrap="square">
+            <a:spAutoFit/>
+          </a:bodyPr>
+          <a:lstStyle/>
+          <a:p>
+            <a:pPr algn="l"/>
+            <a:r>
+              <a:rPr sz="1200" b="0" i="0">
+                <a:solidFill>
+                  <a:srgbClr val="2C3E55"/>
+                </a:solidFill>
+              </a:rPr>
+              <a:t>0.709</a:t>
+            </a:r>
+          </a:p>
+        </p:txBody>
+      </p:sp>
+      <p:sp>
+        <p:nvSpPr>
+          <p:cNvPr id="43" name="Rectangle 42"/>
+          <p:cNvSpPr/>
+          <p:nvPr/>
+        </p:nvSpPr>
+        <p:spPr>
+          <a:xfrm>
+            <a:off x="9885680" y="3474720"/>
+            <a:ext cx="22860" cy="2734056"/>
+          </a:xfrm>
+          <a:prstGeom prst="rect">
+            <a:avLst/>
+          </a:prstGeom>
+          <a:solidFill>
+            <a:srgbClr val="FFCA3A"/>
+          </a:solidFill>
+          <a:ln>
+            <a:noFill/>
+          </a:ln>
+        </p:spPr>
+        <p:style>
+          <a:lnRef idx="1">
+            <a:schemeClr val="accent1"/>
+          </a:lnRef>
+          <a:fillRef idx="3">
+            <a:schemeClr val="accent1"/>
+          </a:fillRef>
+          <a:effectRef idx="2">
+            <a:schemeClr val="accent1"/>
+          </a:effectRef>
+          <a:fontRef idx="minor">
+            <a:schemeClr val="lt1"/>
+          </a:fontRef>
+        </p:style>
+        <p:txBody>
+          <a:bodyPr rtlCol="0" anchor="ctr"/>
+          <a:lstStyle/>
+          <a:p>
+            <a:pPr algn="ctr"/>
           </a:p>
         </p:txBody>
       </p:sp>
@@ -5857,7 +8665,7 @@
             <a:avLst/>
           </a:prstGeom>
           <a:solidFill>
-            <a:srgbClr val="1A1A2E"/>
+            <a:srgbClr val="0D1B2A"/>
           </a:solidFill>
           <a:ln>
             <a:noFill/>
@@ -5887,20 +8695,54 @@
       </p:sp>
       <p:sp>
         <p:nvSpPr>
-          <p:cNvPr id="3" name="Rectangle 2"/>
+          <p:cNvPr id="3" name="TextBox 2"/>
+          <p:cNvSpPr txBox="1"/>
+          <p:nvPr/>
+        </p:nvSpPr>
+        <p:spPr>
+          <a:xfrm>
+            <a:off x="502920" y="164592"/>
+            <a:ext cx="10972800" cy="804672"/>
+          </a:xfrm>
+          <a:prstGeom prst="rect">
+            <a:avLst/>
+          </a:prstGeom>
+          <a:noFill/>
+        </p:spPr>
+        <p:txBody>
+          <a:bodyPr wrap="square">
+            <a:spAutoFit/>
+          </a:bodyPr>
+          <a:lstStyle/>
+          <a:p>
+            <a:pPr algn="l"/>
+            <a:r>
+              <a:rPr sz="2800" b="1" i="0">
+                <a:solidFill>
+                  <a:srgbClr val="FFFFFF"/>
+                </a:solidFill>
+              </a:rPr>
+              <a:t>Why Does Imagery Add Value?</a:t>
+            </a:r>
+          </a:p>
+        </p:txBody>
+      </p:sp>
+      <p:sp>
+        <p:nvSpPr>
+          <p:cNvPr id="4" name="Rectangle 3"/>
           <p:cNvSpPr/>
           <p:nvPr/>
         </p:nvSpPr>
         <p:spPr>
           <a:xfrm>
-            <a:off x="0" y="1005840"/>
+            <a:off x="0" y="1024128"/>
             <a:ext cx="12188952" cy="45720"/>
           </a:xfrm>
           <a:prstGeom prst="rect">
             <a:avLst/>
           </a:prstGeom>
           <a:solidFill>
-            <a:srgbClr val="00B4D8"/>
+            <a:srgbClr val="00C2E0"/>
           </a:solidFill>
           <a:ln>
             <a:noFill/>
@@ -5930,54 +8772,22 @@
       </p:sp>
       <p:sp>
         <p:nvSpPr>
-          <p:cNvPr id="4" name="TextBox 3"/>
-          <p:cNvSpPr txBox="1"/>
-          <p:nvPr/>
-        </p:nvSpPr>
-        <p:spPr>
-          <a:xfrm>
-            <a:off x="457200" y="137160"/>
-            <a:ext cx="11430000" cy="868680"/>
-          </a:xfrm>
-          <a:prstGeom prst="rect">
-            <a:avLst/>
-          </a:prstGeom>
-          <a:noFill/>
-        </p:spPr>
-        <p:txBody>
-          <a:bodyPr wrap="square">
-            <a:spAutoFit/>
-          </a:bodyPr>
-          <a:lstStyle/>
-          <a:p>
-            <a:pPr algn="l"/>
-            <a:r>
-              <a:rPr sz="3000" b="1" i="0">
-                <a:solidFill>
-                  <a:srgbClr val="FFFFFF"/>
-                </a:solidFill>
-              </a:rPr>
-              <a:t>Why Does Satellite Imagery Add Value?</a:t>
-            </a:r>
-          </a:p>
-        </p:txBody>
-      </p:sp>
-      <p:sp>
-        <p:nvSpPr>
-          <p:cNvPr id="5" name="Rectangle 4"/>
+          <p:cNvPr id="5" name="Rounded Rectangle 4"/>
           <p:cNvSpPr/>
           <p:nvPr/>
         </p:nvSpPr>
         <p:spPr>
           <a:xfrm>
-            <a:off x="457200" y="1188720"/>
-            <a:ext cx="5212080" cy="4389120"/>
-          </a:xfrm>
-          <a:prstGeom prst="rect">
-            <a:avLst/>
+            <a:off x="274320" y="1188720"/>
+            <a:ext cx="5394960" cy="4572000"/>
+          </a:xfrm>
+          <a:prstGeom prst="roundRect">
+            <a:avLst>
+              <a:gd name="adj" fmla="val 8000"/>
+            </a:avLst>
           </a:prstGeom>
           <a:solidFill>
-            <a:srgbClr val="0F3C78"/>
+            <a:srgbClr val="1B4F8A"/>
           </a:solidFill>
           <a:ln>
             <a:noFill/>
@@ -6013,8 +8823,8 @@
         </p:nvSpPr>
         <p:spPr>
           <a:xfrm>
-            <a:off x="548640" y="1261872"/>
-            <a:ext cx="5029200" cy="457200"/>
+            <a:off x="274320" y="1280160"/>
+            <a:ext cx="5394960" cy="1188720"/>
           </a:xfrm>
           <a:prstGeom prst="rect">
             <a:avLst/>
@@ -6027,14 +8837,14 @@
           </a:bodyPr>
           <a:lstStyle/>
           <a:p>
-            <a:pPr algn="l"/>
-            <a:r>
-              <a:rPr sz="1500" b="1" i="0">
-                <a:solidFill>
-                  <a:srgbClr val="FFD166"/>
+            <a:pPr algn="ctr"/>
+            <a:r>
+              <a:rPr sz="6000" b="0" i="0">
+                <a:solidFill>
+                  <a:srgbClr val="FFFFFF"/>
                 </a:solidFill>
               </a:rPr>
-              <a:t>Road Class tells you...</a:t>
+              <a:t>🏷️</a:t>
             </a:r>
           </a:p>
         </p:txBody>
@@ -6047,8 +8857,8 @@
         </p:nvSpPr>
         <p:spPr>
           <a:xfrm>
-            <a:off x="548640" y="1783080"/>
-            <a:ext cx="5029200" cy="914400"/>
+            <a:off x="274320" y="2468880"/>
+            <a:ext cx="5394960" cy="548640"/>
           </a:xfrm>
           <a:prstGeom prst="rect">
             <a:avLst/>
@@ -6061,14 +8871,14 @@
           </a:bodyPr>
           <a:lstStyle/>
           <a:p>
-            <a:pPr algn="l"/>
-            <a:r>
-              <a:rPr sz="1300" b="0" i="0">
-                <a:solidFill>
-                  <a:srgbClr val="FFFFFF"/>
+            <a:pPr algn="ctr"/>
+            <a:r>
+              <a:rPr sz="2000" b="1" i="0">
+                <a:solidFill>
+                  <a:srgbClr val="FFCA3A"/>
                 </a:solidFill>
               </a:rPr>
-              <a:t>•   Functional hierarchy: arterial vs collector vs local</a:t>
+              <a:t>Road Class</a:t>
             </a:r>
           </a:p>
         </p:txBody>
@@ -6081,8 +8891,8 @@
         </p:nvSpPr>
         <p:spPr>
           <a:xfrm>
-            <a:off x="548640" y="2606040"/>
-            <a:ext cx="5029200" cy="914400"/>
+            <a:off x="502920" y="3108960"/>
+            <a:ext cx="4937760" cy="548640"/>
           </a:xfrm>
           <a:prstGeom prst="rect">
             <a:avLst/>
@@ -6097,12 +8907,12 @@
           <a:p>
             <a:pPr algn="l"/>
             <a:r>
-              <a:rPr sz="1300" b="0" i="0">
+              <a:rPr sz="1400" b="0" i="0">
                 <a:solidFill>
                   <a:srgbClr val="FFFFFF"/>
                 </a:solidFill>
               </a:rPr>
-              <a:t>•   Design standard and speed</a:t>
+              <a:t>Functional hierarchy</a:t>
             </a:r>
           </a:p>
         </p:txBody>
@@ -6115,8 +8925,8 @@
         </p:nvSpPr>
         <p:spPr>
           <a:xfrm>
-            <a:off x="548640" y="3429000"/>
-            <a:ext cx="5029200" cy="914400"/>
+            <a:off x="502920" y="3703320"/>
+            <a:ext cx="4937760" cy="548640"/>
           </a:xfrm>
           <a:prstGeom prst="rect">
             <a:avLst/>
@@ -6131,12 +8941,12 @@
           <a:p>
             <a:pPr algn="l"/>
             <a:r>
-              <a:rPr sz="1300" b="0" i="0">
-                <a:solidFill>
-                  <a:srgbClr val="FF495C"/>
+              <a:rPr sz="1400" b="0" i="0">
+                <a:solidFill>
+                  <a:srgbClr val="FFFFFF"/>
                 </a:solidFill>
               </a:rPr>
-              <a:t>•   Does NOT capture surrounding land use</a:t>
+              <a:t>Design standard</a:t>
             </a:r>
           </a:p>
         </p:txBody>
@@ -6149,8 +8959,8 @@
         </p:nvSpPr>
         <p:spPr>
           <a:xfrm>
-            <a:off x="548640" y="4251960"/>
-            <a:ext cx="5029200" cy="914400"/>
+            <a:off x="502920" y="4297680"/>
+            <a:ext cx="4937760" cy="548640"/>
           </a:xfrm>
           <a:prstGeom prst="rect">
             <a:avLst/>
@@ -6165,32 +8975,102 @@
           <a:p>
             <a:pPr algn="l"/>
             <a:r>
-              <a:rPr sz="1300" b="0" i="0">
-                <a:solidFill>
-                  <a:srgbClr val="FF495C"/>
+              <a:rPr sz="1400" b="0" i="0">
+                <a:solidFill>
+                  <a:srgbClr val="FFFFFF"/>
                 </a:solidFill>
               </a:rPr>
-              <a:t>•   Two Minor Arterials — one in dense city core, one in quiet suburb — get the same label</a:t>
-            </a:r>
-          </a:p>
-        </p:txBody>
-      </p:sp>
-      <p:sp>
-        <p:nvSpPr>
-          <p:cNvPr id="11" name="Rectangle 10"/>
+              <a:t>Same label everywhere</a:t>
+            </a:r>
+          </a:p>
+        </p:txBody>
+      </p:sp>
+      <p:sp>
+        <p:nvSpPr>
+          <p:cNvPr id="11" name="TextBox 10"/>
+          <p:cNvSpPr txBox="1"/>
+          <p:nvPr/>
+        </p:nvSpPr>
+        <p:spPr>
+          <a:xfrm>
+            <a:off x="502920" y="4892040"/>
+            <a:ext cx="4937760" cy="548640"/>
+          </a:xfrm>
+          <a:prstGeom prst="rect">
+            <a:avLst/>
+          </a:prstGeom>
+          <a:noFill/>
+        </p:spPr>
+        <p:txBody>
+          <a:bodyPr wrap="square">
+            <a:spAutoFit/>
+          </a:bodyPr>
+          <a:lstStyle/>
+          <a:p>
+            <a:pPr algn="l"/>
+            <a:r>
+              <a:rPr sz="1400" b="0" i="0">
+                <a:solidFill>
+                  <a:srgbClr val="FFFFFF"/>
+                </a:solidFill>
+              </a:rPr>
+              <a:t>Ignores surroundings</a:t>
+            </a:r>
+          </a:p>
+        </p:txBody>
+      </p:sp>
+      <p:sp>
+        <p:nvSpPr>
+          <p:cNvPr id="12" name="TextBox 11"/>
+          <p:cNvSpPr txBox="1"/>
+          <p:nvPr/>
+        </p:nvSpPr>
+        <p:spPr>
+          <a:xfrm>
+            <a:off x="320040" y="4892040"/>
+            <a:ext cx="365760" cy="548640"/>
+          </a:xfrm>
+          <a:prstGeom prst="rect">
+            <a:avLst/>
+          </a:prstGeom>
+          <a:noFill/>
+        </p:spPr>
+        <p:txBody>
+          <a:bodyPr wrap="square">
+            <a:spAutoFit/>
+          </a:bodyPr>
+          <a:lstStyle/>
+          <a:p>
+            <a:pPr algn="l"/>
+            <a:r>
+              <a:rPr sz="1600" b="1" i="0">
+                <a:solidFill>
+                  <a:srgbClr val="FF4D6D"/>
+                </a:solidFill>
+              </a:rPr>
+              <a:t>✗</a:t>
+            </a:r>
+          </a:p>
+        </p:txBody>
+      </p:sp>
+      <p:sp>
+        <p:nvSpPr>
+          <p:cNvPr id="13" name="Rounded Rectangle 12"/>
           <p:cNvSpPr/>
           <p:nvPr/>
         </p:nvSpPr>
         <p:spPr>
           <a:xfrm>
-            <a:off x="5943600" y="1188720"/>
-            <a:ext cx="5852160" cy="4389120"/>
-          </a:xfrm>
-          <a:prstGeom prst="rect">
-            <a:avLst/>
+            <a:off x="6035040" y="1188720"/>
+            <a:ext cx="5879592" cy="4572000"/>
+          </a:xfrm>
+          <a:prstGeom prst="roundRect">
+            <a:avLst>
+              <a:gd name="adj" fmla="val 8000"/>
+            </a:avLst>
           </a:prstGeom>
           <a:solidFill>
-            <a:srgbClr val="0F3C78"/>
+            <a:srgbClr val="1B4F8A"/>
           </a:solidFill>
           <a:ln>
             <a:noFill/>
@@ -6220,14 +9100,14 @@
       </p:sp>
       <p:sp>
         <p:nvSpPr>
-          <p:cNvPr id="12" name="TextBox 11"/>
+          <p:cNvPr id="14" name="TextBox 13"/>
           <p:cNvSpPr txBox="1"/>
           <p:nvPr/>
         </p:nvSpPr>
         <p:spPr>
           <a:xfrm>
-            <a:off x="6035040" y="1261872"/>
-            <a:ext cx="5669280" cy="457200"/>
+            <a:off x="6035040" y="1280160"/>
+            <a:ext cx="5879592" cy="1188720"/>
           </a:xfrm>
           <a:prstGeom prst="rect">
             <a:avLst/>
@@ -6240,28 +9120,28 @@
           </a:bodyPr>
           <a:lstStyle/>
           <a:p>
-            <a:pPr algn="l"/>
-            <a:r>
-              <a:rPr sz="1500" b="1" i="0">
-                <a:solidFill>
-                  <a:srgbClr val="00B4D8"/>
+            <a:pPr algn="ctr"/>
+            <a:r>
+              <a:rPr sz="6000" b="0" i="0">
+                <a:solidFill>
+                  <a:srgbClr val="FFFFFF"/>
                 </a:solidFill>
               </a:rPr>
-              <a:t>Satellite imagery tells you...</a:t>
-            </a:r>
-          </a:p>
-        </p:txBody>
-      </p:sp>
-      <p:sp>
-        <p:nvSpPr>
-          <p:cNvPr id="13" name="TextBox 12"/>
+              <a:t>🛰️</a:t>
+            </a:r>
+          </a:p>
+        </p:txBody>
+      </p:sp>
+      <p:sp>
+        <p:nvSpPr>
+          <p:cNvPr id="15" name="TextBox 14"/>
           <p:cNvSpPr txBox="1"/>
           <p:nvPr/>
         </p:nvSpPr>
         <p:spPr>
           <a:xfrm>
-            <a:off x="6035040" y="1783080"/>
-            <a:ext cx="5669280" cy="914400"/>
+            <a:off x="6035040" y="2468880"/>
+            <a:ext cx="5879592" cy="548640"/>
           </a:xfrm>
           <a:prstGeom prst="rect">
             <a:avLst/>
@@ -6274,28 +9154,28 @@
           </a:bodyPr>
           <a:lstStyle/>
           <a:p>
-            <a:pPr algn="l"/>
-            <a:r>
-              <a:rPr sz="1300" b="0" i="0">
-                <a:solidFill>
-                  <a:srgbClr val="FFFFFF"/>
+            <a:pPr algn="ctr"/>
+            <a:r>
+              <a:rPr sz="2000" b="1" i="0">
+                <a:solidFill>
+                  <a:srgbClr val="00C2E0"/>
                 </a:solidFill>
               </a:rPr>
-              <a:t>•   What the road environment actually looks like</a:t>
-            </a:r>
-          </a:p>
-        </p:txBody>
-      </p:sp>
-      <p:sp>
-        <p:nvSpPr>
-          <p:cNvPr id="14" name="TextBox 13"/>
+              <a:t>Satellite Imagery</a:t>
+            </a:r>
+          </a:p>
+        </p:txBody>
+      </p:sp>
+      <p:sp>
+        <p:nvSpPr>
+          <p:cNvPr id="16" name="TextBox 15"/>
           <p:cNvSpPr txBox="1"/>
           <p:nvPr/>
         </p:nvSpPr>
         <p:spPr>
           <a:xfrm>
-            <a:off x="6035040" y="2606040"/>
-            <a:ext cx="5669280" cy="914400"/>
+            <a:off x="6035040" y="3108960"/>
+            <a:ext cx="457200" cy="548640"/>
           </a:xfrm>
           <a:prstGeom prst="rect">
             <a:avLst/>
@@ -6310,26 +9190,26 @@
           <a:p>
             <a:pPr algn="l"/>
             <a:r>
-              <a:rPr sz="1300" b="0" i="0">
-                <a:solidFill>
-                  <a:srgbClr val="FFFFFF"/>
+              <a:rPr sz="1600" b="1" i="0">
+                <a:solidFill>
+                  <a:srgbClr val="00C974"/>
                 </a:solidFill>
               </a:rPr>
-              <a:t>•   Dense urban core vs suburban strip vs industrial estate</a:t>
-            </a:r>
-          </a:p>
-        </p:txBody>
-      </p:sp>
-      <p:sp>
-        <p:nvSpPr>
-          <p:cNvPr id="15" name="TextBox 14"/>
+              <a:t>✓</a:t>
+            </a:r>
+          </a:p>
+        </p:txBody>
+      </p:sp>
+      <p:sp>
+        <p:nvSpPr>
+          <p:cNvPr id="17" name="TextBox 16"/>
           <p:cNvSpPr txBox="1"/>
           <p:nvPr/>
         </p:nvSpPr>
         <p:spPr>
           <a:xfrm>
-            <a:off x="6035040" y="3429000"/>
-            <a:ext cx="5669280" cy="914400"/>
+            <a:off x="6492240" y="3108960"/>
+            <a:ext cx="5212080" cy="548640"/>
           </a:xfrm>
           <a:prstGeom prst="rect">
             <a:avLst/>
@@ -6344,26 +9224,26 @@
           <a:p>
             <a:pPr algn="l"/>
             <a:r>
-              <a:rPr sz="1300" b="0" i="0">
+              <a:rPr sz="1400" b="0" i="0">
                 <a:solidFill>
                   <a:srgbClr val="FFFFFF"/>
                 </a:solidFill>
               </a:rPr>
-              <a:t>•   Number of lanes, intersections, parking visible from above</a:t>
-            </a:r>
-          </a:p>
-        </p:txBody>
-      </p:sp>
-      <p:sp>
-        <p:nvSpPr>
-          <p:cNvPr id="16" name="TextBox 15"/>
+              <a:t>Dense urban vs suburban</a:t>
+            </a:r>
+          </a:p>
+        </p:txBody>
+      </p:sp>
+      <p:sp>
+        <p:nvSpPr>
+          <p:cNvPr id="18" name="TextBox 17"/>
           <p:cNvSpPr txBox="1"/>
           <p:nvPr/>
         </p:nvSpPr>
         <p:spPr>
           <a:xfrm>
-            <a:off x="6035040" y="4251960"/>
-            <a:ext cx="5669280" cy="914400"/>
+            <a:off x="6035040" y="3703320"/>
+            <a:ext cx="457200" cy="548640"/>
           </a:xfrm>
           <a:prstGeom prst="rect">
             <a:avLst/>
@@ -6378,26 +9258,26 @@
           <a:p>
             <a:pPr algn="l"/>
             <a:r>
-              <a:rPr sz="1300" b="0" i="0">
-                <a:solidFill>
-                  <a:srgbClr val="06D676"/>
+              <a:rPr sz="1600" b="1" i="0">
+                <a:solidFill>
+                  <a:srgbClr val="00C974"/>
                 </a:solidFill>
               </a:rPr>
-              <a:t>•   This visual context directly affects how much traffic uses the road</a:t>
-            </a:r>
-          </a:p>
-        </p:txBody>
-      </p:sp>
-      <p:sp>
-        <p:nvSpPr>
-          <p:cNvPr id="17" name="TextBox 16"/>
+              <a:t>✓</a:t>
+            </a:r>
+          </a:p>
+        </p:txBody>
+      </p:sp>
+      <p:sp>
+        <p:nvSpPr>
+          <p:cNvPr id="19" name="TextBox 18"/>
           <p:cNvSpPr txBox="1"/>
           <p:nvPr/>
         </p:nvSpPr>
         <p:spPr>
           <a:xfrm>
-            <a:off x="457200" y="5806440"/>
-            <a:ext cx="11274552" cy="640080"/>
+            <a:off x="6492240" y="3703320"/>
+            <a:ext cx="5212080" cy="548640"/>
           </a:xfrm>
           <a:prstGeom prst="rect">
             <a:avLst/>
@@ -6410,14 +9290,306 @@
           </a:bodyPr>
           <a:lstStyle/>
           <a:p>
-            <a:pPr algn="ctr"/>
-            <a:r>
-              <a:rPr sz="1400" b="0" i="1">
-                <a:solidFill>
-                  <a:srgbClr val="FFD166"/>
+            <a:pPr algn="l"/>
+            <a:r>
+              <a:rPr sz="1400" b="0" i="0">
+                <a:solidFill>
+                  <a:srgbClr val="FFFFFF"/>
                 </a:solidFill>
               </a:rPr>
-              <a:t>The +0.020 R² gain = the visual land-use signal that Road Class treats as identical.</a:t>
+              <a:t>Land use context</a:t>
+            </a:r>
+          </a:p>
+        </p:txBody>
+      </p:sp>
+      <p:sp>
+        <p:nvSpPr>
+          <p:cNvPr id="20" name="TextBox 19"/>
+          <p:cNvSpPr txBox="1"/>
+          <p:nvPr/>
+        </p:nvSpPr>
+        <p:spPr>
+          <a:xfrm>
+            <a:off x="6035040" y="4297680"/>
+            <a:ext cx="457200" cy="548640"/>
+          </a:xfrm>
+          <a:prstGeom prst="rect">
+            <a:avLst/>
+          </a:prstGeom>
+          <a:noFill/>
+        </p:spPr>
+        <p:txBody>
+          <a:bodyPr wrap="square">
+            <a:spAutoFit/>
+          </a:bodyPr>
+          <a:lstStyle/>
+          <a:p>
+            <a:pPr algn="l"/>
+            <a:r>
+              <a:rPr sz="1600" b="1" i="0">
+                <a:solidFill>
+                  <a:srgbClr val="00C974"/>
+                </a:solidFill>
+              </a:rPr>
+              <a:t>✓</a:t>
+            </a:r>
+          </a:p>
+        </p:txBody>
+      </p:sp>
+      <p:sp>
+        <p:nvSpPr>
+          <p:cNvPr id="21" name="TextBox 20"/>
+          <p:cNvSpPr txBox="1"/>
+          <p:nvPr/>
+        </p:nvSpPr>
+        <p:spPr>
+          <a:xfrm>
+            <a:off x="6492240" y="4297680"/>
+            <a:ext cx="5212080" cy="548640"/>
+          </a:xfrm>
+          <a:prstGeom prst="rect">
+            <a:avLst/>
+          </a:prstGeom>
+          <a:noFill/>
+        </p:spPr>
+        <p:txBody>
+          <a:bodyPr wrap="square">
+            <a:spAutoFit/>
+          </a:bodyPr>
+          <a:lstStyle/>
+          <a:p>
+            <a:pPr algn="l"/>
+            <a:r>
+              <a:rPr sz="1400" b="0" i="0">
+                <a:solidFill>
+                  <a:srgbClr val="FFFFFF"/>
+                </a:solidFill>
+              </a:rPr>
+              <a:t>Road geometry from above</a:t>
+            </a:r>
+          </a:p>
+        </p:txBody>
+      </p:sp>
+      <p:sp>
+        <p:nvSpPr>
+          <p:cNvPr id="22" name="TextBox 21"/>
+          <p:cNvSpPr txBox="1"/>
+          <p:nvPr/>
+        </p:nvSpPr>
+        <p:spPr>
+          <a:xfrm>
+            <a:off x="6035040" y="4892040"/>
+            <a:ext cx="457200" cy="548640"/>
+          </a:xfrm>
+          <a:prstGeom prst="rect">
+            <a:avLst/>
+          </a:prstGeom>
+          <a:noFill/>
+        </p:spPr>
+        <p:txBody>
+          <a:bodyPr wrap="square">
+            <a:spAutoFit/>
+          </a:bodyPr>
+          <a:lstStyle/>
+          <a:p>
+            <a:pPr algn="l"/>
+            <a:r>
+              <a:rPr sz="1600" b="1" i="0">
+                <a:solidFill>
+                  <a:srgbClr val="00C974"/>
+                </a:solidFill>
+              </a:rPr>
+              <a:t>✓</a:t>
+            </a:r>
+          </a:p>
+        </p:txBody>
+      </p:sp>
+      <p:sp>
+        <p:nvSpPr>
+          <p:cNvPr id="23" name="TextBox 22"/>
+          <p:cNvSpPr txBox="1"/>
+          <p:nvPr/>
+        </p:nvSpPr>
+        <p:spPr>
+          <a:xfrm>
+            <a:off x="6492240" y="4892040"/>
+            <a:ext cx="5212080" cy="548640"/>
+          </a:xfrm>
+          <a:prstGeom prst="rect">
+            <a:avLst/>
+          </a:prstGeom>
+          <a:noFill/>
+        </p:spPr>
+        <p:txBody>
+          <a:bodyPr wrap="square">
+            <a:spAutoFit/>
+          </a:bodyPr>
+          <a:lstStyle/>
+          <a:p>
+            <a:pPr algn="l"/>
+            <a:r>
+              <a:rPr sz="1400" b="0" i="0">
+                <a:solidFill>
+                  <a:srgbClr val="FFFFFF"/>
+                </a:solidFill>
+              </a:rPr>
+              <a:t>Visual surroundings</a:t>
+            </a:r>
+          </a:p>
+        </p:txBody>
+      </p:sp>
+      <p:sp>
+        <p:nvSpPr>
+          <p:cNvPr id="24" name="TextBox 23"/>
+          <p:cNvSpPr txBox="1"/>
+          <p:nvPr/>
+        </p:nvSpPr>
+        <p:spPr>
+          <a:xfrm>
+            <a:off x="5394960" y="3017520"/>
+            <a:ext cx="822960" cy="822960"/>
+          </a:xfrm>
+          <a:prstGeom prst="rect">
+            <a:avLst/>
+          </a:prstGeom>
+          <a:noFill/>
+        </p:spPr>
+        <p:txBody>
+          <a:bodyPr wrap="square">
+            <a:spAutoFit/>
+          </a:bodyPr>
+          <a:lstStyle/>
+          <a:p>
+            <a:pPr algn="ctr"/>
+            <a:r>
+              <a:rPr sz="2200" b="1" i="0">
+                <a:solidFill>
+                  <a:srgbClr val="B8D8F0"/>
+                </a:solidFill>
+              </a:rPr>
+              <a:t>VS</a:t>
+            </a:r>
+          </a:p>
+        </p:txBody>
+      </p:sp>
+      <p:sp>
+        <p:nvSpPr>
+          <p:cNvPr id="25" name="Rectangle 24"/>
+          <p:cNvSpPr/>
+          <p:nvPr/>
+        </p:nvSpPr>
+        <p:spPr>
+          <a:xfrm>
+            <a:off x="5650992" y="1188720"/>
+            <a:ext cx="36576" cy="4572000"/>
+          </a:xfrm>
+          <a:prstGeom prst="rect">
+            <a:avLst/>
+          </a:prstGeom>
+          <a:solidFill>
+            <a:srgbClr val="2C3E55"/>
+          </a:solidFill>
+          <a:ln>
+            <a:noFill/>
+          </a:ln>
+        </p:spPr>
+        <p:style>
+          <a:lnRef idx="1">
+            <a:schemeClr val="accent1"/>
+          </a:lnRef>
+          <a:fillRef idx="3">
+            <a:schemeClr val="accent1"/>
+          </a:fillRef>
+          <a:effectRef idx="2">
+            <a:schemeClr val="accent1"/>
+          </a:effectRef>
+          <a:fontRef idx="minor">
+            <a:schemeClr val="lt1"/>
+          </a:fontRef>
+        </p:style>
+        <p:txBody>
+          <a:bodyPr rtlCol="0" anchor="ctr"/>
+          <a:lstStyle/>
+          <a:p>
+            <a:pPr algn="ctr"/>
+          </a:p>
+        </p:txBody>
+      </p:sp>
+      <p:sp>
+        <p:nvSpPr>
+          <p:cNvPr id="26" name="Rounded Rectangle 25"/>
+          <p:cNvSpPr/>
+          <p:nvPr/>
+        </p:nvSpPr>
+        <p:spPr>
+          <a:xfrm>
+            <a:off x="274320" y="5943600"/>
+            <a:ext cx="11640312" cy="685800"/>
+          </a:xfrm>
+          <a:prstGeom prst="roundRect">
+            <a:avLst>
+              <a:gd name="adj" fmla="val 8000"/>
+            </a:avLst>
+          </a:prstGeom>
+          <a:solidFill>
+            <a:srgbClr val="2C3E55"/>
+          </a:solidFill>
+          <a:ln>
+            <a:noFill/>
+          </a:ln>
+        </p:spPr>
+        <p:style>
+          <a:lnRef idx="1">
+            <a:schemeClr val="accent1"/>
+          </a:lnRef>
+          <a:fillRef idx="3">
+            <a:schemeClr val="accent1"/>
+          </a:fillRef>
+          <a:effectRef idx="2">
+            <a:schemeClr val="accent1"/>
+          </a:effectRef>
+          <a:fontRef idx="minor">
+            <a:schemeClr val="lt1"/>
+          </a:fontRef>
+        </p:style>
+        <p:txBody>
+          <a:bodyPr rtlCol="0" anchor="ctr"/>
+          <a:lstStyle/>
+          <a:p>
+            <a:pPr algn="ctr"/>
+          </a:p>
+        </p:txBody>
+      </p:sp>
+      <p:sp>
+        <p:nvSpPr>
+          <p:cNvPr id="27" name="TextBox 26"/>
+          <p:cNvSpPr txBox="1"/>
+          <p:nvPr/>
+        </p:nvSpPr>
+        <p:spPr>
+          <a:xfrm>
+            <a:off x="502920" y="5989320"/>
+            <a:ext cx="11338560" cy="594360"/>
+          </a:xfrm>
+          <a:prstGeom prst="rect">
+            <a:avLst/>
+          </a:prstGeom>
+          <a:noFill/>
+        </p:spPr>
+        <p:txBody>
+          <a:bodyPr wrap="square">
+            <a:spAutoFit/>
+          </a:bodyPr>
+          <a:lstStyle/>
+          <a:p>
+            <a:pPr algn="ctr"/>
+            <a:r>
+              <a:rPr sz="1300" b="0" i="1">
+                <a:solidFill>
+                  <a:srgbClr val="FFCA3A"/>
+                </a:solidFill>
+              </a:rPr>
+              <a:t>Two Minor Arterials — one in a dense city core, one in a quiet suburb — get the same Road Class label but very different AAWDT. Imagery tells them apart.</a:t>
             </a:r>
           </a:p>
         </p:txBody>
@@ -6455,7 +9627,7 @@
             <a:avLst/>
           </a:prstGeom>
           <a:solidFill>
-            <a:srgbClr val="1A1A2E"/>
+            <a:srgbClr val="0D1B2A"/>
           </a:solidFill>
           <a:ln>
             <a:noFill/>
@@ -6485,20 +9657,54 @@
       </p:sp>
       <p:sp>
         <p:nvSpPr>
-          <p:cNvPr id="3" name="Rectangle 2"/>
+          <p:cNvPr id="3" name="TextBox 2"/>
+          <p:cNvSpPr txBox="1"/>
+          <p:nvPr/>
+        </p:nvSpPr>
+        <p:spPr>
+          <a:xfrm>
+            <a:off x="502920" y="164592"/>
+            <a:ext cx="10972800" cy="804672"/>
+          </a:xfrm>
+          <a:prstGeom prst="rect">
+            <a:avLst/>
+          </a:prstGeom>
+          <a:noFill/>
+        </p:spPr>
+        <p:txBody>
+          <a:bodyPr wrap="square">
+            <a:spAutoFit/>
+          </a:bodyPr>
+          <a:lstStyle/>
+          <a:p>
+            <a:pPr algn="l"/>
+            <a:r>
+              <a:rPr sz="2800" b="1" i="0">
+                <a:solidFill>
+                  <a:srgbClr val="FFFFFF"/>
+                </a:solidFill>
+              </a:rPr>
+              <a:t>Next Steps</a:t>
+            </a:r>
+          </a:p>
+        </p:txBody>
+      </p:sp>
+      <p:sp>
+        <p:nvSpPr>
+          <p:cNvPr id="4" name="Rectangle 3"/>
           <p:cNvSpPr/>
           <p:nvPr/>
         </p:nvSpPr>
         <p:spPr>
           <a:xfrm>
-            <a:off x="0" y="1005840"/>
+            <a:off x="0" y="1024128"/>
             <a:ext cx="12188952" cy="45720"/>
           </a:xfrm>
           <a:prstGeom prst="rect">
             <a:avLst/>
           </a:prstGeom>
           <a:solidFill>
-            <a:srgbClr val="00B4D8"/>
+            <a:srgbClr val="00C2E0"/>
           </a:solidFill>
           <a:ln>
             <a:noFill/>
@@ -6528,54 +9734,22 @@
       </p:sp>
       <p:sp>
         <p:nvSpPr>
-          <p:cNvPr id="4" name="TextBox 3"/>
-          <p:cNvSpPr txBox="1"/>
-          <p:nvPr/>
-        </p:nvSpPr>
-        <p:spPr>
-          <a:xfrm>
-            <a:off x="457200" y="137160"/>
-            <a:ext cx="11430000" cy="868680"/>
-          </a:xfrm>
-          <a:prstGeom prst="rect">
-            <a:avLst/>
-          </a:prstGeom>
-          <a:noFill/>
-        </p:spPr>
-        <p:txBody>
-          <a:bodyPr wrap="square">
-            <a:spAutoFit/>
-          </a:bodyPr>
-          <a:lstStyle/>
-          <a:p>
-            <a:pPr algn="l"/>
-            <a:r>
-              <a:rPr sz="3000" b="1" i="0">
-                <a:solidFill>
-                  <a:srgbClr val="FFFFFF"/>
-                </a:solidFill>
-              </a:rPr>
-              <a:t>Next Steps</a:t>
-            </a:r>
-          </a:p>
-        </p:txBody>
-      </p:sp>
-      <p:sp>
-        <p:nvSpPr>
-          <p:cNvPr id="5" name="Rectangle 4"/>
+          <p:cNvPr id="5" name="Rounded Rectangle 4"/>
           <p:cNvSpPr/>
           <p:nvPr/>
         </p:nvSpPr>
         <p:spPr>
           <a:xfrm>
-            <a:off x="457200" y="1234440"/>
-            <a:ext cx="109728" cy="1097280"/>
-          </a:xfrm>
-          <a:prstGeom prst="rect">
-            <a:avLst/>
+            <a:off x="1097280" y="1417320"/>
+            <a:ext cx="4572000" cy="2148840"/>
+          </a:xfrm>
+          <a:prstGeom prst="roundRect">
+            <a:avLst>
+              <a:gd name="adj" fmla="val 8000"/>
+            </a:avLst>
           </a:prstGeom>
           <a:solidFill>
-            <a:srgbClr val="00B4D8"/>
+            <a:srgbClr val="1B4F8A"/>
           </a:solidFill>
           <a:ln>
             <a:noFill/>
@@ -6611,8 +9785,8 @@
         </p:nvSpPr>
         <p:spPr>
           <a:xfrm>
-            <a:off x="685800" y="1280160"/>
-            <a:ext cx="10972800" cy="438912"/>
+            <a:off x="1097280" y="1508760"/>
+            <a:ext cx="4572000" cy="914400"/>
           </a:xfrm>
           <a:prstGeom prst="rect">
             <a:avLst/>
@@ -6625,14 +9799,14 @@
           </a:bodyPr>
           <a:lstStyle/>
           <a:p>
-            <a:pPr algn="l"/>
-            <a:r>
-              <a:rPr sz="1500" b="1" i="0">
-                <a:solidFill>
-                  <a:srgbClr val="00B4D8"/>
+            <a:pPr algn="ctr"/>
+            <a:r>
+              <a:rPr sz="4200" b="0" i="0">
+                <a:solidFill>
+                  <a:srgbClr val="FFFFFF"/>
                 </a:solidFill>
               </a:rPr>
-              <a:t>1.  Extend cluster sweep to GMM g=40</a:t>
+              <a:t>🔢</a:t>
             </a:r>
           </a:p>
         </p:txBody>
@@ -6645,8 +9819,8 @@
         </p:nvSpPr>
         <p:spPr>
           <a:xfrm>
-            <a:off x="685800" y="1737360"/>
-            <a:ext cx="10972800" cy="594360"/>
+            <a:off x="1097280" y="2423160"/>
+            <a:ext cx="4572000" cy="640080"/>
           </a:xfrm>
           <a:prstGeom prst="rect">
             <a:avLst/>
@@ -6659,34 +9833,72 @@
           </a:bodyPr>
           <a:lstStyle/>
           <a:p>
-            <a:pPr algn="l"/>
-            <a:r>
-              <a:rPr sz="1300" b="0" i="0">
-                <a:solidFill>
-                  <a:srgbClr val="FFFFFF"/>
+            <a:pPr algn="ctr"/>
+            <a:r>
+              <a:rPr sz="1600" b="1" i="0">
+                <a:solidFill>
+                  <a:srgbClr val="00C2E0"/>
                 </a:solidFill>
               </a:rPr>
-              <a:t>The benefit curve was still noisy at g=30. Want to confirm whether g=21 is truly optimal or if higher counts help further.</a:t>
-            </a:r>
-          </a:p>
-        </p:txBody>
-      </p:sp>
-      <p:sp>
-        <p:nvSpPr>
-          <p:cNvPr id="8" name="Rectangle 7"/>
+              <a:t>Extend GMM
+Sweep to g=40</a:t>
+            </a:r>
+          </a:p>
+        </p:txBody>
+      </p:sp>
+      <p:sp>
+        <p:nvSpPr>
+          <p:cNvPr id="8" name="TextBox 7"/>
+          <p:cNvSpPr txBox="1"/>
+          <p:nvPr/>
+        </p:nvSpPr>
+        <p:spPr>
+          <a:xfrm>
+            <a:off x="1097280" y="3044952"/>
+            <a:ext cx="4572000" cy="475488"/>
+          </a:xfrm>
+          <a:prstGeom prst="rect">
+            <a:avLst/>
+          </a:prstGeom>
+          <a:noFill/>
+        </p:spPr>
+        <p:txBody>
+          <a:bodyPr wrap="square">
+            <a:spAutoFit/>
+          </a:bodyPr>
+          <a:lstStyle/>
+          <a:p>
+            <a:pPr algn="ctr"/>
+            <a:r>
+              <a:rPr sz="1200" b="0" i="1">
+                <a:solidFill>
+                  <a:srgbClr val="B8D8F0"/>
+                </a:solidFill>
+              </a:rPr>
+              <a:t>Confirm optimal
+cluster count</a:t>
+            </a:r>
+          </a:p>
+        </p:txBody>
+      </p:sp>
+      <p:sp>
+        <p:nvSpPr>
+          <p:cNvPr id="9" name="Rounded Rectangle 8"/>
           <p:cNvSpPr/>
           <p:nvPr/>
         </p:nvSpPr>
         <p:spPr>
           <a:xfrm>
-            <a:off x="457200" y="2514600"/>
-            <a:ext cx="109728" cy="1097280"/>
-          </a:xfrm>
-          <a:prstGeom prst="rect">
-            <a:avLst/>
+            <a:off x="6400800" y="1417320"/>
+            <a:ext cx="4572000" cy="2148840"/>
+          </a:xfrm>
+          <a:prstGeom prst="roundRect">
+            <a:avLst>
+              <a:gd name="adj" fmla="val 8000"/>
+            </a:avLst>
           </a:prstGeom>
           <a:solidFill>
-            <a:srgbClr val="FFD166"/>
+            <a:srgbClr val="1B4F8A"/>
           </a:solidFill>
           <a:ln>
             <a:noFill/>
@@ -6716,14 +9928,14 @@
       </p:sp>
       <p:sp>
         <p:nvSpPr>
-          <p:cNvPr id="9" name="TextBox 8"/>
+          <p:cNvPr id="10" name="TextBox 9"/>
           <p:cNvSpPr txBox="1"/>
           <p:nvPr/>
         </p:nvSpPr>
         <p:spPr>
           <a:xfrm>
-            <a:off x="685800" y="2560320"/>
-            <a:ext cx="10972800" cy="438912"/>
+            <a:off x="6400800" y="1508760"/>
+            <a:ext cx="4572000" cy="914400"/>
           </a:xfrm>
           <a:prstGeom prst="rect">
             <a:avLst/>
@@ -6736,28 +9948,28 @@
           </a:bodyPr>
           <a:lstStyle/>
           <a:p>
-            <a:pPr algn="l"/>
-            <a:r>
-              <a:rPr sz="1500" b="1" i="0">
-                <a:solidFill>
-                  <a:srgbClr val="FFD166"/>
+            <a:pPr algn="ctr"/>
+            <a:r>
+              <a:rPr sz="4200" b="0" i="0">
+                <a:solidFill>
+                  <a:srgbClr val="FFFFFF"/>
                 </a:solidFill>
               </a:rPr>
-              <a:t>2.  Test on held-out data</a:t>
-            </a:r>
-          </a:p>
-        </p:txBody>
-      </p:sp>
-      <p:sp>
-        <p:nvSpPr>
-          <p:cNvPr id="10" name="TextBox 9"/>
+              <a:t>📋</a:t>
+            </a:r>
+          </a:p>
+        </p:txBody>
+      </p:sp>
+      <p:sp>
+        <p:nvSpPr>
+          <p:cNvPr id="11" name="TextBox 10"/>
           <p:cNvSpPr txBox="1"/>
           <p:nvPr/>
         </p:nvSpPr>
         <p:spPr>
           <a:xfrm>
-            <a:off x="685800" y="3017520"/>
-            <a:ext cx="10972800" cy="594360"/>
+            <a:off x="6400800" y="2423160"/>
+            <a:ext cx="4572000" cy="640080"/>
           </a:xfrm>
           <a:prstGeom prst="rect">
             <a:avLst/>
@@ -6770,34 +9982,72 @@
           </a:bodyPr>
           <a:lstStyle/>
           <a:p>
-            <a:pPr algn="l"/>
-            <a:r>
-              <a:rPr sz="1300" b="0" i="0">
-                <a:solidFill>
-                  <a:srgbClr val="FFFFFF"/>
+            <a:pPr algn="ctr"/>
+            <a:r>
+              <a:rPr sz="1600" b="1" i="0">
+                <a:solidFill>
+                  <a:srgbClr val="00C2E0"/>
                 </a:solidFill>
               </a:rPr>
-              <a:t>Current R² is measured on the same 726 segments used to build the clusters. Need an independent test set to confirm the +0.020 gain is not overfitting.</a:t>
-            </a:r>
-          </a:p>
-        </p:txBody>
-      </p:sp>
-      <p:sp>
-        <p:nvSpPr>
-          <p:cNvPr id="11" name="Rectangle 10"/>
+              <a:t>Held-Out
+Test Set</a:t>
+            </a:r>
+          </a:p>
+        </p:txBody>
+      </p:sp>
+      <p:sp>
+        <p:nvSpPr>
+          <p:cNvPr id="12" name="TextBox 11"/>
+          <p:cNvSpPr txBox="1"/>
+          <p:nvPr/>
+        </p:nvSpPr>
+        <p:spPr>
+          <a:xfrm>
+            <a:off x="6400800" y="3044952"/>
+            <a:ext cx="4572000" cy="475488"/>
+          </a:xfrm>
+          <a:prstGeom prst="rect">
+            <a:avLst/>
+          </a:prstGeom>
+          <a:noFill/>
+        </p:spPr>
+        <p:txBody>
+          <a:bodyPr wrap="square">
+            <a:spAutoFit/>
+          </a:bodyPr>
+          <a:lstStyle/>
+          <a:p>
+            <a:pPr algn="ctr"/>
+            <a:r>
+              <a:rPr sz="1200" b="0" i="1">
+                <a:solidFill>
+                  <a:srgbClr val="B8D8F0"/>
+                </a:solidFill>
+              </a:rPr>
+              <a:t>Validate on
+new data</a:t>
+            </a:r>
+          </a:p>
+        </p:txBody>
+      </p:sp>
+      <p:sp>
+        <p:nvSpPr>
+          <p:cNvPr id="13" name="Rounded Rectangle 12"/>
           <p:cNvSpPr/>
           <p:nvPr/>
         </p:nvSpPr>
         <p:spPr>
           <a:xfrm>
-            <a:off x="457200" y="3794760"/>
-            <a:ext cx="109728" cy="1097280"/>
-          </a:xfrm>
-          <a:prstGeom prst="rect">
-            <a:avLst/>
+            <a:off x="1097280" y="3840480"/>
+            <a:ext cx="4572000" cy="2148840"/>
+          </a:xfrm>
+          <a:prstGeom prst="roundRect">
+            <a:avLst>
+              <a:gd name="adj" fmla="val 8000"/>
+            </a:avLst>
           </a:prstGeom>
           <a:solidFill>
-            <a:srgbClr val="06D676"/>
+            <a:srgbClr val="1B4F8A"/>
           </a:solidFill>
           <a:ln>
             <a:noFill/>
@@ -6827,14 +10077,14 @@
       </p:sp>
       <p:sp>
         <p:nvSpPr>
-          <p:cNvPr id="12" name="TextBox 11"/>
+          <p:cNvPr id="14" name="TextBox 13"/>
           <p:cNvSpPr txBox="1"/>
           <p:nvPr/>
         </p:nvSpPr>
         <p:spPr>
           <a:xfrm>
-            <a:off x="685800" y="3840480"/>
-            <a:ext cx="10972800" cy="438912"/>
+            <a:off x="1097280" y="3931920"/>
+            <a:ext cx="4572000" cy="914400"/>
           </a:xfrm>
           <a:prstGeom prst="rect">
             <a:avLst/>
@@ -6847,28 +10097,28 @@
           </a:bodyPr>
           <a:lstStyle/>
           <a:p>
-            <a:pPr algn="l"/>
-            <a:r>
-              <a:rPr sz="1500" b="1" i="0">
-                <a:solidFill>
-                  <a:srgbClr val="06D676"/>
+            <a:pPr algn="ctr"/>
+            <a:r>
+              <a:rPr sz="4200" b="0" i="0">
+                <a:solidFill>
+                  <a:srgbClr val="FFFFFF"/>
                 </a:solidFill>
               </a:rPr>
-              <a:t>3.  Interpret what each cluster represents</a:t>
-            </a:r>
-          </a:p>
-        </p:txBody>
-      </p:sp>
-      <p:sp>
-        <p:nvSpPr>
-          <p:cNvPr id="13" name="TextBox 12"/>
+              <a:t>🗺️</a:t>
+            </a:r>
+          </a:p>
+        </p:txBody>
+      </p:sp>
+      <p:sp>
+        <p:nvSpPr>
+          <p:cNvPr id="15" name="TextBox 14"/>
           <p:cNvSpPr txBox="1"/>
           <p:nvPr/>
         </p:nvSpPr>
         <p:spPr>
           <a:xfrm>
-            <a:off x="685800" y="4297680"/>
-            <a:ext cx="10972800" cy="594360"/>
+            <a:off x="1097280" y="4846320"/>
+            <a:ext cx="4572000" cy="640080"/>
           </a:xfrm>
           <a:prstGeom prst="rect">
             <a:avLst/>
@@ -6881,34 +10131,72 @@
           </a:bodyPr>
           <a:lstStyle/>
           <a:p>
-            <a:pPr algn="l"/>
-            <a:r>
-              <a:rPr sz="1300" b="0" i="0">
-                <a:solidFill>
-                  <a:srgbClr val="FFFFFF"/>
+            <a:pPr algn="ctr"/>
+            <a:r>
+              <a:rPr sz="1600" b="1" i="0">
+                <a:solidFill>
+                  <a:srgbClr val="00C2E0"/>
                 </a:solidFill>
               </a:rPr>
-              <a:t>Label each cluster manually — e.g. 'dense urban arterial', 'suburban collector', 'rural highway'. This would make the clusters meaningful to planners.</a:t>
-            </a:r>
-          </a:p>
-        </p:txBody>
-      </p:sp>
-      <p:sp>
-        <p:nvSpPr>
-          <p:cNvPr id="14" name="Rectangle 13"/>
+              <a:t>Label Each
+Cluster</a:t>
+            </a:r>
+          </a:p>
+        </p:txBody>
+      </p:sp>
+      <p:sp>
+        <p:nvSpPr>
+          <p:cNvPr id="16" name="TextBox 15"/>
+          <p:cNvSpPr txBox="1"/>
+          <p:nvPr/>
+        </p:nvSpPr>
+        <p:spPr>
+          <a:xfrm>
+            <a:off x="1097280" y="5468112"/>
+            <a:ext cx="4572000" cy="475488"/>
+          </a:xfrm>
+          <a:prstGeom prst="rect">
+            <a:avLst/>
+          </a:prstGeom>
+          <a:noFill/>
+        </p:spPr>
+        <p:txBody>
+          <a:bodyPr wrap="square">
+            <a:spAutoFit/>
+          </a:bodyPr>
+          <a:lstStyle/>
+          <a:p>
+            <a:pPr algn="ctr"/>
+            <a:r>
+              <a:rPr sz="1200" b="0" i="1">
+                <a:solidFill>
+                  <a:srgbClr val="B8D8F0"/>
+                </a:solidFill>
+              </a:rPr>
+              <a:t>e.g. 'Dense urban
+arterial'</a:t>
+            </a:r>
+          </a:p>
+        </p:txBody>
+      </p:sp>
+      <p:sp>
+        <p:nvSpPr>
+          <p:cNvPr id="17" name="Rounded Rectangle 16"/>
           <p:cNvSpPr/>
           <p:nvPr/>
         </p:nvSpPr>
         <p:spPr>
           <a:xfrm>
-            <a:off x="457200" y="5074919"/>
-            <a:ext cx="109728" cy="1097280"/>
-          </a:xfrm>
-          <a:prstGeom prst="rect">
-            <a:avLst/>
+            <a:off x="6400800" y="3840480"/>
+            <a:ext cx="4572000" cy="2148840"/>
+          </a:xfrm>
+          <a:prstGeom prst="roundRect">
+            <a:avLst>
+              <a:gd name="adj" fmla="val 8000"/>
+            </a:avLst>
           </a:prstGeom>
           <a:solidFill>
-            <a:srgbClr val="CAE9FF"/>
+            <a:srgbClr val="1B4F8A"/>
           </a:solidFill>
           <a:ln>
             <a:noFill/>
@@ -6938,14 +10226,14 @@
       </p:sp>
       <p:sp>
         <p:nvSpPr>
-          <p:cNvPr id="15" name="TextBox 14"/>
+          <p:cNvPr id="18" name="TextBox 17"/>
           <p:cNvSpPr txBox="1"/>
           <p:nvPr/>
         </p:nvSpPr>
         <p:spPr>
           <a:xfrm>
-            <a:off x="685800" y="5120639"/>
-            <a:ext cx="10972800" cy="438912"/>
+            <a:off x="6400800" y="3931920"/>
+            <a:ext cx="4572000" cy="914400"/>
           </a:xfrm>
           <a:prstGeom prst="rect">
             <a:avLst/>
@@ -6958,28 +10246,28 @@
           </a:bodyPr>
           <a:lstStyle/>
           <a:p>
-            <a:pPr algn="l"/>
-            <a:r>
-              <a:rPr sz="1500" b="1" i="0">
-                <a:solidFill>
-                  <a:srgbClr val="CAE9FF"/>
+            <a:pPr algn="ctr"/>
+            <a:r>
+              <a:rPr sz="4200" b="0" i="0">
+                <a:solidFill>
+                  <a:srgbClr val="FFFFFF"/>
                 </a:solidFill>
               </a:rPr>
-              <a:t>4.  Write up methodology section</a:t>
-            </a:r>
-          </a:p>
-        </p:txBody>
-      </p:sp>
-      <p:sp>
-        <p:nvSpPr>
-          <p:cNvPr id="16" name="TextBox 15"/>
+              <a:t>📝</a:t>
+            </a:r>
+          </a:p>
+        </p:txBody>
+      </p:sp>
+      <p:sp>
+        <p:nvSpPr>
+          <p:cNvPr id="19" name="TextBox 18"/>
           <p:cNvSpPr txBox="1"/>
           <p:nvPr/>
         </p:nvSpPr>
         <p:spPr>
           <a:xfrm>
-            <a:off x="685800" y="5577839"/>
-            <a:ext cx="10972800" cy="594360"/>
+            <a:off x="6400800" y="4846320"/>
+            <a:ext cx="4572000" cy="640080"/>
           </a:xfrm>
           <a:prstGeom prst="rect">
             <a:avLst/>
@@ -6992,14 +10280,50 @@
           </a:bodyPr>
           <a:lstStyle/>
           <a:p>
-            <a:pPr algn="l"/>
-            <a:r>
-              <a:rPr sz="1300" b="0" i="0">
-                <a:solidFill>
-                  <a:srgbClr val="FFFFFF"/>
+            <a:pPr algn="ctr"/>
+            <a:r>
+              <a:rPr sz="1600" b="1" i="0">
+                <a:solidFill>
+                  <a:srgbClr val="00C2E0"/>
                 </a:solidFill>
               </a:rPr>
-              <a:t>Document the pipeline formally for the report/thesis chapter.</a:t>
+              <a:t>Write Up
+Methodology</a:t>
+            </a:r>
+          </a:p>
+        </p:txBody>
+      </p:sp>
+      <p:sp>
+        <p:nvSpPr>
+          <p:cNvPr id="20" name="TextBox 19"/>
+          <p:cNvSpPr txBox="1"/>
+          <p:nvPr/>
+        </p:nvSpPr>
+        <p:spPr>
+          <a:xfrm>
+            <a:off x="6400800" y="5468112"/>
+            <a:ext cx="4572000" cy="475488"/>
+          </a:xfrm>
+          <a:prstGeom prst="rect">
+            <a:avLst/>
+          </a:prstGeom>
+          <a:noFill/>
+        </p:spPr>
+        <p:txBody>
+          <a:bodyPr wrap="square">
+            <a:spAutoFit/>
+          </a:bodyPr>
+          <a:lstStyle/>
+          <a:p>
+            <a:pPr algn="ctr"/>
+            <a:r>
+              <a:rPr sz="1200" b="0" i="1">
+                <a:solidFill>
+                  <a:srgbClr val="B8D8F0"/>
+                </a:solidFill>
+              </a:rPr>
+              <a:t>Thesis chapter
+prep</a:t>
             </a:r>
           </a:p>
         </p:txBody>
@@ -7330,4 +10654,324 @@
   </a:objectDefaults>
   <a:extraClrSchemeLst/>
 </a:theme>
+</file>
+
+<file path=ppt/theme/theme2.xml><?xml version="1.0" encoding="utf-8"?>
+<a:theme xmlns:a="http://schemas.openxmlformats.org/drawingml/2006/main" name="Office Theme">
+  <a:themeElements>
+    <a:clrScheme name="Office">
+      <a:dk1>
+        <a:sysClr val="windowText" lastClr="000000"/>
+      </a:dk1>
+      <a:lt1>
+        <a:sysClr val="window" lastClr="FFFFFF"/>
+      </a:lt1>
+      <a:dk2>
+        <a:srgbClr val="1F497D"/>
+      </a:dk2>
+      <a:lt2>
+        <a:srgbClr val="EEECE1"/>
+      </a:lt2>
+      <a:accent1>
+        <a:srgbClr val="4F81BD"/>
+      </a:accent1>
+      <a:accent2>
+        <a:srgbClr val="C0504D"/>
+      </a:accent2>
+      <a:accent3>
+        <a:srgbClr val="9BBB59"/>
+      </a:accent3>
+      <a:accent4>
+        <a:srgbClr val="8064A2"/>
+      </a:accent4>
+      <a:accent5>
+        <a:srgbClr val="4BACC6"/>
+      </a:accent5>
+      <a:accent6>
+        <a:srgbClr val="F79646"/>
+      </a:accent6>
+      <a:hlink>
+        <a:srgbClr val="0000FF"/>
+      </a:hlink>
+      <a:folHlink>
+        <a:srgbClr val="800080"/>
+      </a:folHlink>
+    </a:clrScheme>
+    <a:fontScheme name="Office">
+      <a:majorFont>
+        <a:latin typeface="Calibri"/>
+        <a:ea typeface=""/>
+        <a:cs typeface=""/>
+        <a:font script="Jpan" typeface="ＭＳ Ｐゴシック"/>
+        <a:font script="Hang" typeface="맑은 고딕"/>
+        <a:font script="Hans" typeface="宋体"/>
+        <a:font script="Hant" typeface="新細明體"/>
+        <a:font script="Arab" typeface="Times New Roman"/>
+        <a:font script="Hebr" typeface="Times New Roman"/>
+        <a:font script="Thai" typeface="Angsana New"/>
+        <a:font script="Ethi" typeface="Nyala"/>
+        <a:font script="Beng" typeface="Vrinda"/>
+        <a:font script="Gujr" typeface="Shruti"/>
+        <a:font script="Khmr" typeface="MoolBoran"/>
+        <a:font script="Knda" typeface="Tunga"/>
+        <a:font script="Guru" typeface="Raavi"/>
+        <a:font script="Cans" typeface="Euphemia"/>
+        <a:font script="Cher" typeface="Plantagenet Cherokee"/>
+        <a:font script="Yiii" typeface="Microsoft Yi Baiti"/>
+        <a:font script="Tibt" typeface="Microsoft Himalaya"/>
+        <a:font script="Thaa" typeface="MV Boli"/>
+        <a:font script="Deva" typeface="Mangal"/>
+        <a:font script="Telu" typeface="Gautami"/>
+        <a:font script="Taml" typeface="Latha"/>
+        <a:font script="Syrc" typeface="Estrangelo Edessa"/>
+        <a:font script="Orya" typeface="Kalinga"/>
+        <a:font script="Mlym" typeface="Kartika"/>
+        <a:font script="Laoo" typeface="DokChampa"/>
+        <a:font script="Sinh" typeface="Iskoola Pota"/>
+        <a:font script="Mong" typeface="Mongolian Baiti"/>
+        <a:font script="Viet" typeface="Times New Roman"/>
+        <a:font script="Uigh" typeface="Microsoft Uighur"/>
+        <a:font script="Geor" typeface="Sylfaen"/>
+      </a:majorFont>
+      <a:minorFont>
+        <a:latin typeface="Calibri"/>
+        <a:ea typeface=""/>
+        <a:cs typeface=""/>
+        <a:font script="Jpan" typeface="ＭＳ Ｐゴシック"/>
+        <a:font script="Hang" typeface="맑은 고딕"/>
+        <a:font script="Hans" typeface="宋体"/>
+        <a:font script="Hant" typeface="新細明體"/>
+        <a:font script="Arab" typeface="Arial"/>
+        <a:font script="Hebr" typeface="Arial"/>
+        <a:font script="Thai" typeface="Cordia New"/>
+        <a:font script="Ethi" typeface="Nyala"/>
+        <a:font script="Beng" typeface="Vrinda"/>
+        <a:font script="Gujr" typeface="Shruti"/>
+        <a:font script="Khmr" typeface="DaunPenh"/>
+        <a:font script="Knda" typeface="Tunga"/>
+        <a:font script="Guru" typeface="Raavi"/>
+        <a:font script="Cans" typeface="Euphemia"/>
+        <a:font script="Cher" typeface="Plantagenet Cherokee"/>
+        <a:font script="Yiii" typeface="Microsoft Yi Baiti"/>
+        <a:font script="Tibt" typeface="Microsoft Himalaya"/>
+        <a:font script="Thaa" typeface="MV Boli"/>
+        <a:font script="Deva" typeface="Mangal"/>
+        <a:font script="Telu" typeface="Gautami"/>
+        <a:font script="Taml" typeface="Latha"/>
+        <a:font script="Syrc" typeface="Estrangelo Edessa"/>
+        <a:font script="Orya" typeface="Kalinga"/>
+        <a:font script="Mlym" typeface="Kartika"/>
+        <a:font script="Laoo" typeface="DokChampa"/>
+        <a:font script="Sinh" typeface="Iskoola Pota"/>
+        <a:font script="Mong" typeface="Mongolian Baiti"/>
+        <a:font script="Viet" typeface="Arial"/>
+        <a:font script="Uigh" typeface="Microsoft Uighur"/>
+        <a:font script="Geor" typeface="Sylfaen"/>
+      </a:minorFont>
+    </a:fontScheme>
+    <a:fmtScheme name="Office">
+      <a:fillStyleLst>
+        <a:solidFill>
+          <a:schemeClr val="phClr"/>
+        </a:solidFill>
+        <a:gradFill rotWithShape="1">
+          <a:gsLst>
+            <a:gs pos="0">
+              <a:schemeClr val="phClr">
+                <a:tint val="50000"/>
+                <a:satMod val="300000"/>
+              </a:schemeClr>
+            </a:gs>
+            <a:gs pos="35000">
+              <a:schemeClr val="phClr">
+                <a:tint val="37000"/>
+                <a:satMod val="300000"/>
+              </a:schemeClr>
+            </a:gs>
+            <a:gs pos="100000">
+              <a:schemeClr val="phClr">
+                <a:tint val="15000"/>
+                <a:satMod val="350000"/>
+              </a:schemeClr>
+            </a:gs>
+          </a:gsLst>
+          <a:lin ang="16200000" scaled="1"/>
+        </a:gradFill>
+        <a:gradFill rotWithShape="1">
+          <a:gsLst>
+            <a:gs pos="0">
+              <a:schemeClr val="phClr">
+                <a:tint val="100000"/>
+                <a:shade val="100000"/>
+                <a:satMod val="130000"/>
+              </a:schemeClr>
+            </a:gs>
+            <a:gs pos="100000">
+              <a:schemeClr val="phClr">
+                <a:tint val="50000"/>
+                <a:shade val="100000"/>
+                <a:satMod val="350000"/>
+              </a:schemeClr>
+            </a:gs>
+          </a:gsLst>
+          <a:lin ang="16200000" scaled="0"/>
+        </a:gradFill>
+      </a:fillStyleLst>
+      <a:lnStyleLst>
+        <a:ln w="9525" cap="flat" cmpd="sng" algn="ctr">
+          <a:solidFill>
+            <a:schemeClr val="phClr">
+              <a:shade val="95000"/>
+              <a:satMod val="105000"/>
+            </a:schemeClr>
+          </a:solidFill>
+          <a:prstDash val="solid"/>
+        </a:ln>
+        <a:ln w="25400" cap="flat" cmpd="sng" algn="ctr">
+          <a:solidFill>
+            <a:schemeClr val="phClr"/>
+          </a:solidFill>
+          <a:prstDash val="solid"/>
+        </a:ln>
+        <a:ln w="38100" cap="flat" cmpd="sng" algn="ctr">
+          <a:solidFill>
+            <a:schemeClr val="phClr"/>
+          </a:solidFill>
+          <a:prstDash val="solid"/>
+        </a:ln>
+      </a:lnStyleLst>
+      <a:effectStyleLst>
+        <a:effectStyle>
+          <a:effectLst>
+            <a:outerShdw blurRad="40000" dist="20000" dir="5400000" rotWithShape="0">
+              <a:srgbClr val="000000">
+                <a:alpha val="38000"/>
+              </a:srgbClr>
+            </a:outerShdw>
+          </a:effectLst>
+        </a:effectStyle>
+        <a:effectStyle>
+          <a:effectLst>
+            <a:outerShdw blurRad="40000" dist="23000" dir="5400000" rotWithShape="0">
+              <a:srgbClr val="000000">
+                <a:alpha val="35000"/>
+              </a:srgbClr>
+            </a:outerShdw>
+          </a:effectLst>
+        </a:effectStyle>
+        <a:effectStyle>
+          <a:effectLst>
+            <a:outerShdw blurRad="40000" dist="23000" dir="5400000" rotWithShape="0">
+              <a:srgbClr val="000000">
+                <a:alpha val="35000"/>
+              </a:srgbClr>
+            </a:outerShdw>
+          </a:effectLst>
+          <a:scene3d>
+            <a:camera prst="orthographicFront">
+              <a:rot lat="0" lon="0" rev="0"/>
+            </a:camera>
+            <a:lightRig rig="threePt" dir="t">
+              <a:rot lat="0" lon="0" rev="1200000"/>
+            </a:lightRig>
+          </a:scene3d>
+          <a:sp3d>
+            <a:bevelT w="63500" h="25400"/>
+          </a:sp3d>
+        </a:effectStyle>
+      </a:effectStyleLst>
+      <a:bgFillStyleLst>
+        <a:solidFill>
+          <a:schemeClr val="phClr"/>
+        </a:solidFill>
+        <a:gradFill rotWithShape="1">
+          <a:gsLst>
+            <a:gs pos="0">
+              <a:schemeClr val="phClr">
+                <a:tint val="40000"/>
+                <a:satMod val="350000"/>
+              </a:schemeClr>
+            </a:gs>
+            <a:gs pos="40000">
+              <a:schemeClr val="phClr">
+                <a:tint val="45000"/>
+                <a:shade val="99000"/>
+                <a:satMod val="350000"/>
+              </a:schemeClr>
+            </a:gs>
+            <a:gs pos="100000">
+              <a:schemeClr val="phClr">
+                <a:shade val="20000"/>
+                <a:satMod val="255000"/>
+              </a:schemeClr>
+            </a:gs>
+          </a:gsLst>
+          <a:path path="circle">
+            <a:fillToRect l="50000" t="-80000" r="50000" b="180000"/>
+          </a:path>
+        </a:gradFill>
+        <a:gradFill rotWithShape="1">
+          <a:gsLst>
+            <a:gs pos="0">
+              <a:schemeClr val="phClr">
+                <a:tint val="80000"/>
+                <a:satMod val="300000"/>
+              </a:schemeClr>
+            </a:gs>
+            <a:gs pos="100000">
+              <a:schemeClr val="phClr">
+                <a:shade val="30000"/>
+                <a:satMod val="200000"/>
+              </a:schemeClr>
+            </a:gs>
+          </a:gsLst>
+          <a:path path="circle">
+            <a:fillToRect l="50000" t="50000" r="50000" b="50000"/>
+          </a:path>
+        </a:gradFill>
+      </a:bgFillStyleLst>
+    </a:fmtScheme>
+  </a:themeElements>
+  <a:objectDefaults>
+    <a:spDef>
+      <a:spPr/>
+      <a:bodyPr/>
+      <a:lstStyle/>
+      <a:style>
+        <a:lnRef idx="1">
+          <a:schemeClr val="accent1"/>
+        </a:lnRef>
+        <a:fillRef idx="3">
+          <a:schemeClr val="accent1"/>
+        </a:fillRef>
+        <a:effectRef idx="2">
+          <a:schemeClr val="accent1"/>
+        </a:effectRef>
+        <a:fontRef idx="minor">
+          <a:schemeClr val="lt1"/>
+        </a:fontRef>
+      </a:style>
+    </a:spDef>
+    <a:lnDef>
+      <a:spPr/>
+      <a:bodyPr/>
+      <a:lstStyle/>
+      <a:style>
+        <a:lnRef idx="2">
+          <a:schemeClr val="accent1"/>
+        </a:lnRef>
+        <a:fillRef idx="0">
+          <a:schemeClr val="accent1"/>
+        </a:fillRef>
+        <a:effectRef idx="1">
+          <a:schemeClr val="accent1"/>
+        </a:effectRef>
+        <a:fontRef idx="minor">
+          <a:schemeClr val="tx1"/>
+        </a:fontRef>
+      </a:style>
+    </a:lnDef>
+  </a:objectDefaults>
+  <a:extraClrSchemeLst/>
+</a:theme>
 </file>